--- a/KIP_MidTermReview.pptx
+++ b/KIP_MidTermReview.pptx
@@ -5,15 +5,28 @@
     <p:sldMasterId id="2147483648" r:id="rId5"/>
   </p:sldMasterIdLst>
   <p:notesMasterIdLst>
-    <p:notesMasterId r:id="rId9"/>
+    <p:notesMasterId r:id="rId22"/>
   </p:notesMasterIdLst>
   <p:handoutMasterIdLst>
-    <p:handoutMasterId r:id="rId10"/>
+    <p:handoutMasterId r:id="rId23"/>
   </p:handoutMasterIdLst>
   <p:sldIdLst>
     <p:sldId id="261" r:id="rId6"/>
     <p:sldId id="257" r:id="rId7"/>
-    <p:sldId id="262" r:id="rId8"/>
+    <p:sldId id="264" r:id="rId8"/>
+    <p:sldId id="266" r:id="rId9"/>
+    <p:sldId id="263" r:id="rId10"/>
+    <p:sldId id="270" r:id="rId11"/>
+    <p:sldId id="267" r:id="rId12"/>
+    <p:sldId id="268" r:id="rId13"/>
+    <p:sldId id="269" r:id="rId14"/>
+    <p:sldId id="273" r:id="rId15"/>
+    <p:sldId id="274" r:id="rId16"/>
+    <p:sldId id="275" r:id="rId17"/>
+    <p:sldId id="272" r:id="rId18"/>
+    <p:sldId id="276" r:id="rId19"/>
+    <p:sldId id="277" r:id="rId20"/>
+    <p:sldId id="262" r:id="rId21"/>
   </p:sldIdLst>
   <p:sldSz cx="12192000" cy="6858000"/>
   <p:notesSz cx="6858000" cy="9144000"/>
@@ -434,7 +447,7 @@
           <a:p>
             <a:fld id="{C48B1069-75E4-459F-81E7-F12BB487B326}" type="datetimeFigureOut">
               <a:rPr lang="de-DE" smtClean="0"/>
-              <a:t>30.04.26</a:t>
+              <a:t>01.05.26</a:t>
             </a:fld>
             <a:endParaRPr lang="de-DE"/>
           </a:p>
@@ -611,7 +624,7 @@
           <a:p>
             <a:fld id="{4BA2E619-BF61-4444-8A30-4D976D0E5E7E}" type="datetimeFigureOut">
               <a:rPr lang="de-DE" smtClean="0"/>
-              <a:t>30.04.26</a:t>
+              <a:t>01.05.26</a:t>
             </a:fld>
             <a:endParaRPr lang="de-DE"/>
           </a:p>
@@ -11632,12 +11645,18 @@
 </p:sld>
 </file>
 
-<file path=ppt/slides/slide2.xml><?xml version="1.0" encoding="utf-8"?>
+<file path=ppt/slides/slide10.xml><?xml version="1.0" encoding="utf-8"?>
 <p:sld xmlns:a="http://schemas.openxmlformats.org/drawingml/2006/main" xmlns:r="http://schemas.openxmlformats.org/officeDocument/2006/relationships" xmlns:p="http://schemas.openxmlformats.org/presentationml/2006/main">
   <p:cSld>
     <p:spTree>
       <p:nvGrpSpPr>
-        <p:cNvPr id="1" name=""/>
+        <p:cNvPr id="1" name="">
+          <a:extLst>
+            <a:ext uri="{FF2B5EF4-FFF2-40B4-BE49-F238E27FC236}">
+              <a16:creationId xmlns:a16="http://schemas.microsoft.com/office/drawing/2014/main" id="{43F932D8-3ED5-00EC-DBDF-FEBA7D7919E4}"/>
+            </a:ext>
+          </a:extLst>
+        </p:cNvPr>
         <p:cNvGrpSpPr/>
         <p:nvPr/>
       </p:nvGrpSpPr>
@@ -11654,7 +11673,7 @@
           <p:cNvPr id="2" name="Fußzeilenplatzhalter 1">
             <a:extLst>
               <a:ext uri="{FF2B5EF4-FFF2-40B4-BE49-F238E27FC236}">
-                <a16:creationId xmlns:a16="http://schemas.microsoft.com/office/drawing/2014/main" id="{E243F3DD-3A82-4C37-7893-A1CD1D5E8CDB}"/>
+                <a16:creationId xmlns:a16="http://schemas.microsoft.com/office/drawing/2014/main" id="{74556979-F2B4-88E9-B375-4460A44694DC}"/>
               </a:ext>
             </a:extLst>
           </p:cNvPr>
@@ -11683,7 +11702,7 @@
           <p:cNvPr id="3" name="Foliennummernplatzhalter 2">
             <a:extLst>
               <a:ext uri="{FF2B5EF4-FFF2-40B4-BE49-F238E27FC236}">
-                <a16:creationId xmlns:a16="http://schemas.microsoft.com/office/drawing/2014/main" id="{2AB3BC2A-A1CF-319D-DB72-C39D63DF7332}"/>
+                <a16:creationId xmlns:a16="http://schemas.microsoft.com/office/drawing/2014/main" id="{E026AFB6-A707-74D1-06B6-D0B6FAB4BFFB}"/>
               </a:ext>
             </a:extLst>
           </p:cNvPr>
@@ -11702,61 +11721,8 @@
             <a:fld id="{E7298502-BA22-4927-B2ED-0A18FFA86FFE}" type="slidenum">
               <a:rPr lang="de-DE" smtClean="0"/>
               <a:pPr/>
-              <a:t>2</a:t>
+              <a:t>10</a:t>
             </a:fld>
-            <a:endParaRPr lang="de-DE" dirty="0"/>
-          </a:p>
-        </p:txBody>
-      </p:sp>
-      <p:sp>
-        <p:nvSpPr>
-          <p:cNvPr id="6" name="Textplatzhalter 5">
-            <a:extLst>
-              <a:ext uri="{FF2B5EF4-FFF2-40B4-BE49-F238E27FC236}">
-                <a16:creationId xmlns:a16="http://schemas.microsoft.com/office/drawing/2014/main" id="{483B08F1-24AA-9D93-1780-B9A8C4207A54}"/>
-              </a:ext>
-            </a:extLst>
-          </p:cNvPr>
-          <p:cNvSpPr>
-            <a:spLocks noGrp="1"/>
-          </p:cNvSpPr>
-          <p:nvPr>
-            <p:ph type="body" sz="quarter" idx="16"/>
-          </p:nvPr>
-        </p:nvSpPr>
-        <p:spPr/>
-        <p:txBody>
-          <a:bodyPr/>
-          <a:lstStyle/>
-          <a:p>
-            <a:r>
-              <a:rPr lang="de-DE" dirty="0"/>
-              <a:t>Bitte löschen Sie die Folien 1-5 aus Ihrer Präsentation. Diese Folien dienen nur für allgemeine Hinweise zur Nutzung der Vorlagen.</a:t>
-            </a:r>
-          </a:p>
-          <a:p>
-            <a:pPr marL="0" indent="0">
-              <a:buNone/>
-            </a:pPr>
-            <a:endParaRPr lang="de-DE" dirty="0"/>
-          </a:p>
-          <a:p>
-            <a:r>
-              <a:rPr lang="de-DE" dirty="0"/>
-              <a:t>Bitte wenden Sie sich bei Fragen oder Anmerkungen an </a:t>
-            </a:r>
-            <a:r>
-              <a:rPr lang="de-DE" dirty="0">
-                <a:hlinkClick r:id="rId2"/>
-              </a:rPr>
-              <a:t>kommunikation@oth-regensburg.de</a:t>
-            </a:r>
-            <a:r>
-              <a:rPr lang="de-DE" dirty="0"/>
-              <a:t> </a:t>
-            </a:r>
-          </a:p>
-          <a:p>
             <a:endParaRPr lang="de-DE" dirty="0"/>
           </a:p>
         </p:txBody>
@@ -11766,7 +11732,7 @@
           <p:cNvPr id="8" name="Gerader Verbinder 7">
             <a:extLst>
               <a:ext uri="{FF2B5EF4-FFF2-40B4-BE49-F238E27FC236}">
-                <a16:creationId xmlns:a16="http://schemas.microsoft.com/office/drawing/2014/main" id="{6E59BA97-E8DF-58DA-61CD-A073C1BE65C0}"/>
+                <a16:creationId xmlns:a16="http://schemas.microsoft.com/office/drawing/2014/main" id="{748D395A-685B-EEFA-0CC2-F388FF3A3577}"/>
               </a:ext>
             </a:extLst>
           </p:cNvPr>
@@ -11805,7 +11771,7 @@
           <p:cNvPr id="9" name="Textplatzhalter 12">
             <a:extLst>
               <a:ext uri="{FF2B5EF4-FFF2-40B4-BE49-F238E27FC236}">
-                <a16:creationId xmlns:a16="http://schemas.microsoft.com/office/drawing/2014/main" id="{FF9A9E24-B62E-A31E-AE20-E571D5E7B9F3}"/>
+                <a16:creationId xmlns:a16="http://schemas.microsoft.com/office/drawing/2014/main" id="{0D3912A3-89CC-AA40-ABB1-3AAE5A78752A}"/>
               </a:ext>
             </a:extLst>
           </p:cNvPr>
@@ -11850,12 +11816,8 @@
           <a:p>
             <a:r>
               <a:rPr lang="de-DE" dirty="0"/>
-              <a:t>Hinweise zur Nutzung der Vorlagen</a:t>
-            </a:r>
-          </a:p>
-          <a:p>
-            <a:pPr lvl="0"/>
-            <a:endParaRPr lang="de-DE" dirty="0"/>
+              <a:t>Roadmap</a:t>
+            </a:r>
           </a:p>
         </p:txBody>
       </p:sp>
@@ -11864,7 +11826,7 @@
           <p:cNvPr id="10" name="Textplatzhalter 20">
             <a:extLst>
               <a:ext uri="{FF2B5EF4-FFF2-40B4-BE49-F238E27FC236}">
-                <a16:creationId xmlns:a16="http://schemas.microsoft.com/office/drawing/2014/main" id="{6083A0B9-04A1-69B8-FC6E-9630A3C82F4B}"/>
+                <a16:creationId xmlns:a16="http://schemas.microsoft.com/office/drawing/2014/main" id="{D2C7985F-534E-8861-EA1E-20D1684DDF35}"/>
               </a:ext>
             </a:extLst>
           </p:cNvPr>
@@ -11896,8 +11858,2746 @@
             <a:pPr lvl="0"/>
             <a:r>
               <a:rPr lang="de-DE" dirty="0"/>
-              <a:t>Allgemeine Hinweise</a:t>
-            </a:r>
+              <a:t>Geplante Aufgaben</a:t>
+            </a:r>
+          </a:p>
+        </p:txBody>
+      </p:sp>
+      <p:sp>
+        <p:nvSpPr>
+          <p:cNvPr id="4" name="Text Placeholder 4">
+            <a:extLst>
+              <a:ext uri="{FF2B5EF4-FFF2-40B4-BE49-F238E27FC236}">
+                <a16:creationId xmlns:a16="http://schemas.microsoft.com/office/drawing/2014/main" id="{F24AB5CE-2C62-031E-F0E8-98B760DBBF2F}"/>
+              </a:ext>
+            </a:extLst>
+          </p:cNvPr>
+          <p:cNvSpPr txBox="1">
+            <a:spLocks/>
+          </p:cNvSpPr>
+          <p:nvPr/>
+        </p:nvSpPr>
+        <p:spPr>
+          <a:xfrm>
+            <a:off x="710624" y="3142810"/>
+            <a:ext cx="11303356" cy="1464415"/>
+          </a:xfrm>
+          <a:prstGeom prst="rect">
+            <a:avLst/>
+          </a:prstGeom>
+        </p:spPr>
+        <p:txBody>
+          <a:bodyPr/>
+          <a:lstStyle>
+            <a:lvl1pPr marL="228600" indent="-228600" algn="l" defTabSz="914400" rtl="0" eaLnBrk="1" latinLnBrk="0" hangingPunct="1">
+              <a:lnSpc>
+                <a:spcPct val="90000"/>
+              </a:lnSpc>
+              <a:spcBef>
+                <a:spcPts val="1000"/>
+              </a:spcBef>
+              <a:buFont typeface="Arial" panose="020B0604020202020204" pitchFamily="34" charset="0"/>
+              <a:buChar char="•"/>
+              <a:defRPr sz="2000" kern="1200">
+                <a:solidFill>
+                  <a:schemeClr val="tx1"/>
+                </a:solidFill>
+                <a:latin typeface="+mn-lt"/>
+                <a:ea typeface="+mn-ea"/>
+                <a:cs typeface="+mn-cs"/>
+              </a:defRPr>
+            </a:lvl1pPr>
+            <a:lvl2pPr marL="685800" indent="-228600" algn="l" defTabSz="914400" rtl="0" eaLnBrk="1" latinLnBrk="0" hangingPunct="1">
+              <a:lnSpc>
+                <a:spcPct val="90000"/>
+              </a:lnSpc>
+              <a:spcBef>
+                <a:spcPts val="500"/>
+              </a:spcBef>
+              <a:buFont typeface="Arial" panose="020B0604020202020204" pitchFamily="34" charset="0"/>
+              <a:buChar char="•"/>
+              <a:defRPr sz="1800" kern="1200">
+                <a:solidFill>
+                  <a:schemeClr val="tx1"/>
+                </a:solidFill>
+                <a:latin typeface="+mn-lt"/>
+                <a:ea typeface="+mn-ea"/>
+                <a:cs typeface="+mn-cs"/>
+              </a:defRPr>
+            </a:lvl2pPr>
+            <a:lvl3pPr marL="1143000" indent="-228600" algn="l" defTabSz="914400" rtl="0" eaLnBrk="1" latinLnBrk="0" hangingPunct="1">
+              <a:lnSpc>
+                <a:spcPct val="90000"/>
+              </a:lnSpc>
+              <a:spcBef>
+                <a:spcPts val="500"/>
+              </a:spcBef>
+              <a:buFont typeface="Arial" panose="020B0604020202020204" pitchFamily="34" charset="0"/>
+              <a:buChar char="•"/>
+              <a:defRPr sz="1600" kern="1200">
+                <a:solidFill>
+                  <a:schemeClr val="tx1"/>
+                </a:solidFill>
+                <a:latin typeface="+mn-lt"/>
+                <a:ea typeface="+mn-ea"/>
+                <a:cs typeface="+mn-cs"/>
+              </a:defRPr>
+            </a:lvl3pPr>
+            <a:lvl4pPr marL="1600200" indent="-228600" algn="l" defTabSz="914400" rtl="0" eaLnBrk="1" latinLnBrk="0" hangingPunct="1">
+              <a:lnSpc>
+                <a:spcPct val="90000"/>
+              </a:lnSpc>
+              <a:spcBef>
+                <a:spcPts val="500"/>
+              </a:spcBef>
+              <a:buFont typeface="Arial" panose="020B0604020202020204" pitchFamily="34" charset="0"/>
+              <a:buChar char="•"/>
+              <a:defRPr sz="1800" kern="1200">
+                <a:solidFill>
+                  <a:schemeClr val="tx1"/>
+                </a:solidFill>
+                <a:latin typeface="+mn-lt"/>
+                <a:ea typeface="+mn-ea"/>
+                <a:cs typeface="+mn-cs"/>
+              </a:defRPr>
+            </a:lvl4pPr>
+            <a:lvl5pPr marL="2057400" indent="-228600" algn="l" defTabSz="914400" rtl="0" eaLnBrk="1" latinLnBrk="0" hangingPunct="1">
+              <a:lnSpc>
+                <a:spcPct val="90000"/>
+              </a:lnSpc>
+              <a:spcBef>
+                <a:spcPts val="500"/>
+              </a:spcBef>
+              <a:buFont typeface="Arial" panose="020B0604020202020204" pitchFamily="34" charset="0"/>
+              <a:buChar char="•"/>
+              <a:defRPr sz="1800" kern="1200">
+                <a:solidFill>
+                  <a:schemeClr val="tx1"/>
+                </a:solidFill>
+                <a:latin typeface="+mn-lt"/>
+                <a:ea typeface="+mn-ea"/>
+                <a:cs typeface="+mn-cs"/>
+              </a:defRPr>
+            </a:lvl5pPr>
+            <a:lvl6pPr marL="2514600" indent="-228600" algn="l" defTabSz="914400" rtl="0" eaLnBrk="1" latinLnBrk="0" hangingPunct="1">
+              <a:lnSpc>
+                <a:spcPct val="90000"/>
+              </a:lnSpc>
+              <a:spcBef>
+                <a:spcPts val="500"/>
+              </a:spcBef>
+              <a:buFont typeface="Arial" panose="020B0604020202020204" pitchFamily="34" charset="0"/>
+              <a:buChar char="•"/>
+              <a:defRPr sz="1800" kern="1200">
+                <a:solidFill>
+                  <a:schemeClr val="tx1"/>
+                </a:solidFill>
+                <a:latin typeface="+mn-lt"/>
+                <a:ea typeface="+mn-ea"/>
+                <a:cs typeface="+mn-cs"/>
+              </a:defRPr>
+            </a:lvl6pPr>
+            <a:lvl7pPr marL="2971800" indent="-228600" algn="l" defTabSz="914400" rtl="0" eaLnBrk="1" latinLnBrk="0" hangingPunct="1">
+              <a:lnSpc>
+                <a:spcPct val="90000"/>
+              </a:lnSpc>
+              <a:spcBef>
+                <a:spcPts val="500"/>
+              </a:spcBef>
+              <a:buFont typeface="Arial" panose="020B0604020202020204" pitchFamily="34" charset="0"/>
+              <a:buChar char="•"/>
+              <a:defRPr sz="1800" kern="1200">
+                <a:solidFill>
+                  <a:schemeClr val="tx1"/>
+                </a:solidFill>
+                <a:latin typeface="+mn-lt"/>
+                <a:ea typeface="+mn-ea"/>
+                <a:cs typeface="+mn-cs"/>
+              </a:defRPr>
+            </a:lvl7pPr>
+            <a:lvl8pPr marL="3429000" indent="-228600" algn="l" defTabSz="914400" rtl="0" eaLnBrk="1" latinLnBrk="0" hangingPunct="1">
+              <a:lnSpc>
+                <a:spcPct val="90000"/>
+              </a:lnSpc>
+              <a:spcBef>
+                <a:spcPts val="500"/>
+              </a:spcBef>
+              <a:buFont typeface="Arial" panose="020B0604020202020204" pitchFamily="34" charset="0"/>
+              <a:buChar char="•"/>
+              <a:defRPr sz="1800" kern="1200">
+                <a:solidFill>
+                  <a:schemeClr val="tx1"/>
+                </a:solidFill>
+                <a:latin typeface="+mn-lt"/>
+                <a:ea typeface="+mn-ea"/>
+                <a:cs typeface="+mn-cs"/>
+              </a:defRPr>
+            </a:lvl8pPr>
+            <a:lvl9pPr marL="3886200" indent="-228600" algn="l" defTabSz="914400" rtl="0" eaLnBrk="1" latinLnBrk="0" hangingPunct="1">
+              <a:lnSpc>
+                <a:spcPct val="90000"/>
+              </a:lnSpc>
+              <a:spcBef>
+                <a:spcPts val="500"/>
+              </a:spcBef>
+              <a:buFont typeface="Arial" panose="020B0604020202020204" pitchFamily="34" charset="0"/>
+              <a:buChar char="•"/>
+              <a:defRPr sz="1800" kern="1200">
+                <a:solidFill>
+                  <a:schemeClr val="tx1"/>
+                </a:solidFill>
+                <a:latin typeface="+mn-lt"/>
+                <a:ea typeface="+mn-ea"/>
+                <a:cs typeface="+mn-cs"/>
+              </a:defRPr>
+            </a:lvl9pPr>
+          </a:lstStyle>
+          <a:p>
+            <a:pPr marL="457200" lvl="1" indent="0">
+              <a:buFont typeface="Arial" panose="020B0604020202020204" pitchFamily="34" charset="0"/>
+              <a:buNone/>
+            </a:pPr>
+            <a:endParaRPr lang="en-US" dirty="0"/>
+          </a:p>
+        </p:txBody>
+      </p:sp>
+      <p:sp>
+        <p:nvSpPr>
+          <p:cNvPr id="11" name="Text Placeholder 4">
+            <a:extLst>
+              <a:ext uri="{FF2B5EF4-FFF2-40B4-BE49-F238E27FC236}">
+                <a16:creationId xmlns:a16="http://schemas.microsoft.com/office/drawing/2014/main" id="{1DF803B4-DC76-E9B7-E738-9026FDEE0D49}"/>
+              </a:ext>
+            </a:extLst>
+          </p:cNvPr>
+          <p:cNvSpPr>
+            <a:spLocks noGrp="1"/>
+          </p:cNvSpPr>
+          <p:nvPr>
+            <p:ph type="body" sz="quarter" idx="16"/>
+          </p:nvPr>
+        </p:nvSpPr>
+        <p:spPr>
+          <a:xfrm>
+            <a:off x="695325" y="1635624"/>
+            <a:ext cx="11303356" cy="4163514"/>
+          </a:xfrm>
+        </p:spPr>
+        <p:txBody>
+          <a:bodyPr/>
+          <a:lstStyle/>
+          <a:p>
+            <a:pPr marL="0" indent="0">
+              <a:buNone/>
+            </a:pPr>
+            <a:r>
+              <a:rPr lang="en-US" dirty="0"/>
+              <a:t>LLM as a Judge</a:t>
+            </a:r>
+          </a:p>
+          <a:p>
+            <a:pPr marL="0" indent="0">
+              <a:buNone/>
+            </a:pPr>
+            <a:endParaRPr lang="en-US" dirty="0"/>
+          </a:p>
+          <a:p>
+            <a:pPr marL="0" indent="0">
+              <a:buNone/>
+            </a:pPr>
+            <a:r>
+              <a:rPr lang="en-US" dirty="0"/>
+              <a:t>Run </a:t>
+            </a:r>
+            <a:r>
+              <a:rPr lang="en-US" dirty="0" err="1"/>
+              <a:t>Metriken</a:t>
+            </a:r>
+            <a:r>
+              <a:rPr lang="en-US" dirty="0"/>
+              <a:t> (Runtime, Token usage, best R2…) </a:t>
+            </a:r>
+            <a:r>
+              <a:rPr lang="en-US" dirty="0" err="1"/>
+              <a:t>zur</a:t>
+            </a:r>
+            <a:r>
+              <a:rPr lang="en-US" dirty="0"/>
+              <a:t> </a:t>
+            </a:r>
+            <a:r>
+              <a:rPr lang="en-US" dirty="0" err="1"/>
+              <a:t>Messung</a:t>
+            </a:r>
+            <a:r>
+              <a:rPr lang="en-US" dirty="0"/>
+              <a:t> der </a:t>
+            </a:r>
+            <a:r>
+              <a:rPr lang="en-US" dirty="0" err="1"/>
+              <a:t>Verbesserung</a:t>
+            </a:r>
+            <a:endParaRPr lang="en-US" dirty="0"/>
+          </a:p>
+          <a:p>
+            <a:pPr marL="0" indent="0">
+              <a:buNone/>
+            </a:pPr>
+            <a:endParaRPr lang="en-US" dirty="0"/>
+          </a:p>
+          <a:p>
+            <a:pPr marL="0" indent="0">
+              <a:buNone/>
+            </a:pPr>
+            <a:r>
+              <a:rPr lang="en-US" dirty="0"/>
+              <a:t>Refinement der Pipeline</a:t>
+            </a:r>
+          </a:p>
+          <a:p>
+            <a:pPr marL="0" indent="0">
+              <a:buNone/>
+            </a:pPr>
+            <a:endParaRPr lang="en-US" dirty="0"/>
+          </a:p>
+          <a:p>
+            <a:pPr marL="0" indent="0">
+              <a:buNone/>
+            </a:pPr>
+            <a:r>
+              <a:rPr lang="en-US" dirty="0" err="1"/>
+              <a:t>Kmeans</a:t>
+            </a:r>
+            <a:r>
+              <a:rPr lang="en-US" dirty="0"/>
+              <a:t> Baseline / Benchmark</a:t>
+            </a:r>
+          </a:p>
+          <a:p>
+            <a:pPr marL="0" indent="0">
+              <a:buNone/>
+            </a:pPr>
+            <a:endParaRPr lang="en-US" dirty="0"/>
+          </a:p>
+          <a:p>
+            <a:pPr marL="0" indent="0">
+              <a:buNone/>
+            </a:pPr>
+            <a:r>
+              <a:rPr lang="en-US" dirty="0"/>
+              <a:t>Pre Pipeline </a:t>
+            </a:r>
+            <a:r>
+              <a:rPr lang="en-US" dirty="0" err="1"/>
+              <a:t>Prozess</a:t>
+            </a:r>
+            <a:r>
+              <a:rPr lang="en-US" dirty="0"/>
+              <a:t> </a:t>
+            </a:r>
+            <a:r>
+              <a:rPr lang="en-US" dirty="0" err="1"/>
+              <a:t>Informationen</a:t>
+            </a:r>
+            <a:r>
+              <a:rPr lang="en-US" dirty="0"/>
+              <a:t> (Human Input </a:t>
+            </a:r>
+            <a:r>
+              <a:rPr lang="en-US" dirty="0" err="1"/>
+              <a:t>zum</a:t>
+            </a:r>
+            <a:r>
+              <a:rPr lang="en-US" dirty="0"/>
+              <a:t> </a:t>
+            </a:r>
+            <a:r>
+              <a:rPr lang="en-US" dirty="0" err="1"/>
+              <a:t>Datensatz</a:t>
+            </a:r>
+            <a:r>
+              <a:rPr lang="en-US" dirty="0"/>
+              <a:t>)</a:t>
+            </a:r>
+          </a:p>
+          <a:p>
+            <a:pPr marL="0" indent="0">
+              <a:buNone/>
+            </a:pPr>
+            <a:endParaRPr lang="en-US" dirty="0"/>
+          </a:p>
+          <a:p>
+            <a:pPr marL="0" indent="0">
+              <a:buNone/>
+            </a:pPr>
+            <a:r>
+              <a:rPr lang="en-US" dirty="0" err="1"/>
+              <a:t>Dokumentation</a:t>
+            </a:r>
+            <a:r>
+              <a:rPr lang="en-US"/>
+              <a:t> (Summary)</a:t>
+            </a:r>
+            <a:endParaRPr lang="en-US" dirty="0"/>
+          </a:p>
+          <a:p>
+            <a:pPr marL="0" indent="0">
+              <a:buNone/>
+            </a:pPr>
+            <a:endParaRPr lang="en-US" dirty="0"/>
+          </a:p>
+          <a:p>
+            <a:pPr marL="0" indent="0">
+              <a:buNone/>
+            </a:pPr>
+            <a:r>
+              <a:rPr lang="en-US" dirty="0"/>
+              <a:t>(</a:t>
+            </a:r>
+            <a:r>
+              <a:rPr lang="en-US" dirty="0" err="1"/>
+              <a:t>Dockerization</a:t>
+            </a:r>
+            <a:r>
+              <a:rPr lang="en-US" dirty="0"/>
+              <a:t>)</a:t>
+            </a:r>
+          </a:p>
+          <a:p>
+            <a:pPr marL="0" indent="0">
+              <a:buNone/>
+            </a:pPr>
+            <a:endParaRPr lang="en-US" dirty="0"/>
+          </a:p>
+        </p:txBody>
+      </p:sp>
+    </p:spTree>
+    <p:extLst>
+      <p:ext uri="{BB962C8B-B14F-4D97-AF65-F5344CB8AC3E}">
+        <p14:creationId xmlns:p14="http://schemas.microsoft.com/office/powerpoint/2010/main" val="1968766738"/>
+      </p:ext>
+    </p:extLst>
+  </p:cSld>
+  <p:clrMapOvr>
+    <a:masterClrMapping/>
+  </p:clrMapOvr>
+</p:sld>
+</file>
+
+<file path=ppt/slides/slide11.xml><?xml version="1.0" encoding="utf-8"?>
+<p:sld xmlns:a="http://schemas.openxmlformats.org/drawingml/2006/main" xmlns:r="http://schemas.openxmlformats.org/officeDocument/2006/relationships" xmlns:p="http://schemas.openxmlformats.org/presentationml/2006/main">
+  <p:cSld>
+    <p:spTree>
+      <p:nvGrpSpPr>
+        <p:cNvPr id="1" name="">
+          <a:extLst>
+            <a:ext uri="{FF2B5EF4-FFF2-40B4-BE49-F238E27FC236}">
+              <a16:creationId xmlns:a16="http://schemas.microsoft.com/office/drawing/2014/main" id="{23F6396A-E526-709E-218D-BE63C98942E6}"/>
+            </a:ext>
+          </a:extLst>
+        </p:cNvPr>
+        <p:cNvGrpSpPr/>
+        <p:nvPr/>
+      </p:nvGrpSpPr>
+      <p:grpSpPr>
+        <a:xfrm>
+          <a:off x="0" y="0"/>
+          <a:ext cx="0" cy="0"/>
+          <a:chOff x="0" y="0"/>
+          <a:chExt cx="0" cy="0"/>
+        </a:xfrm>
+      </p:grpSpPr>
+      <p:sp>
+        <p:nvSpPr>
+          <p:cNvPr id="2" name="Fußzeilenplatzhalter 1">
+            <a:extLst>
+              <a:ext uri="{FF2B5EF4-FFF2-40B4-BE49-F238E27FC236}">
+                <a16:creationId xmlns:a16="http://schemas.microsoft.com/office/drawing/2014/main" id="{394056D3-8EB3-5E47-7CF1-E875E2395688}"/>
+              </a:ext>
+            </a:extLst>
+          </p:cNvPr>
+          <p:cNvSpPr>
+            <a:spLocks noGrp="1"/>
+          </p:cNvSpPr>
+          <p:nvPr>
+            <p:ph type="ftr" sz="quarter" idx="26"/>
+          </p:nvPr>
+        </p:nvSpPr>
+        <p:spPr/>
+        <p:txBody>
+          <a:bodyPr/>
+          <a:lstStyle/>
+          <a:p>
+            <a:r>
+              <a:rPr lang="de-DE"/>
+              <a:t>KI Projekt | Sina Brunner, Lars Nettersheim, John Schwarz, Leon Ulbrich, Felix Wensky </a:t>
+            </a:r>
+            <a:endParaRPr lang="de-DE" dirty="0"/>
+          </a:p>
+        </p:txBody>
+      </p:sp>
+      <p:sp>
+        <p:nvSpPr>
+          <p:cNvPr id="3" name="Foliennummernplatzhalter 2">
+            <a:extLst>
+              <a:ext uri="{FF2B5EF4-FFF2-40B4-BE49-F238E27FC236}">
+                <a16:creationId xmlns:a16="http://schemas.microsoft.com/office/drawing/2014/main" id="{2860B16E-33DA-ADA9-799E-32FF70103595}"/>
+              </a:ext>
+            </a:extLst>
+          </p:cNvPr>
+          <p:cNvSpPr>
+            <a:spLocks noGrp="1"/>
+          </p:cNvSpPr>
+          <p:nvPr>
+            <p:ph type="sldNum" sz="quarter" idx="4"/>
+          </p:nvPr>
+        </p:nvSpPr>
+        <p:spPr/>
+        <p:txBody>
+          <a:bodyPr/>
+          <a:lstStyle/>
+          <a:p>
+            <a:fld id="{E7298502-BA22-4927-B2ED-0A18FFA86FFE}" type="slidenum">
+              <a:rPr lang="de-DE" smtClean="0"/>
+              <a:pPr/>
+              <a:t>11</a:t>
+            </a:fld>
+            <a:endParaRPr lang="de-DE" dirty="0"/>
+          </a:p>
+        </p:txBody>
+      </p:sp>
+      <p:cxnSp>
+        <p:nvCxnSpPr>
+          <p:cNvPr id="8" name="Gerader Verbinder 7">
+            <a:extLst>
+              <a:ext uri="{FF2B5EF4-FFF2-40B4-BE49-F238E27FC236}">
+                <a16:creationId xmlns:a16="http://schemas.microsoft.com/office/drawing/2014/main" id="{0A82A840-B914-6BF5-DF84-2922E94C9B8D}"/>
+              </a:ext>
+            </a:extLst>
+          </p:cNvPr>
+          <p:cNvCxnSpPr>
+            <a:cxnSpLocks/>
+          </p:cNvCxnSpPr>
+          <p:nvPr/>
+        </p:nvCxnSpPr>
+        <p:spPr>
+          <a:xfrm>
+            <a:off x="713582" y="746389"/>
+            <a:ext cx="0" cy="468000"/>
+          </a:xfrm>
+          <a:prstGeom prst="line">
+            <a:avLst/>
+          </a:prstGeom>
+          <a:ln w="28575"/>
+        </p:spPr>
+        <p:style>
+          <a:lnRef idx="1">
+            <a:schemeClr val="accent1"/>
+          </a:lnRef>
+          <a:fillRef idx="0">
+            <a:schemeClr val="accent1"/>
+          </a:fillRef>
+          <a:effectRef idx="0">
+            <a:schemeClr val="accent1"/>
+          </a:effectRef>
+          <a:fontRef idx="minor">
+            <a:schemeClr val="tx1"/>
+          </a:fontRef>
+        </p:style>
+      </p:cxnSp>
+      <p:sp>
+        <p:nvSpPr>
+          <p:cNvPr id="9" name="Textplatzhalter 12">
+            <a:extLst>
+              <a:ext uri="{FF2B5EF4-FFF2-40B4-BE49-F238E27FC236}">
+                <a16:creationId xmlns:a16="http://schemas.microsoft.com/office/drawing/2014/main" id="{F08E2FC8-43A1-2A7D-8DE6-6AC97211947C}"/>
+              </a:ext>
+            </a:extLst>
+          </p:cNvPr>
+          <p:cNvSpPr>
+            <a:spLocks noGrp="1"/>
+          </p:cNvSpPr>
+          <p:nvPr>
+            <p:ph type="body" sz="quarter" idx="13" hasCustomPrompt="1"/>
+          </p:nvPr>
+        </p:nvSpPr>
+        <p:spPr>
+          <a:xfrm>
+            <a:off x="695325" y="199474"/>
+            <a:ext cx="10119053" cy="468000"/>
+          </a:xfrm>
+          <a:prstGeom prst="rect">
+            <a:avLst/>
+          </a:prstGeom>
+        </p:spPr>
+        <p:txBody>
+          <a:bodyPr anchor="t">
+            <a:noAutofit/>
+          </a:bodyPr>
+          <a:lstStyle>
+            <a:lvl1pPr marL="0" indent="0">
+              <a:buNone/>
+              <a:defRPr sz="3000" b="1" cap="none" baseline="0"/>
+            </a:lvl1pPr>
+            <a:lvl2pPr>
+              <a:defRPr sz="2900" b="1" cap="all" baseline="0"/>
+            </a:lvl2pPr>
+            <a:lvl3pPr>
+              <a:defRPr sz="2900" b="1" cap="all" baseline="0"/>
+            </a:lvl3pPr>
+            <a:lvl4pPr>
+              <a:defRPr sz="2900" b="1" cap="all" baseline="0"/>
+            </a:lvl4pPr>
+            <a:lvl5pPr>
+              <a:defRPr sz="2900" b="1" cap="all" baseline="0"/>
+            </a:lvl5pPr>
+          </a:lstStyle>
+          <a:p>
+            <a:r>
+              <a:rPr lang="de-DE" dirty="0"/>
+              <a:t>System Demo (Screenshots)</a:t>
+            </a:r>
+          </a:p>
+        </p:txBody>
+      </p:sp>
+      <p:sp>
+        <p:nvSpPr>
+          <p:cNvPr id="10" name="Textplatzhalter 20">
+            <a:extLst>
+              <a:ext uri="{FF2B5EF4-FFF2-40B4-BE49-F238E27FC236}">
+                <a16:creationId xmlns:a16="http://schemas.microsoft.com/office/drawing/2014/main" id="{88F56AF9-1D15-BCEA-E088-9A71A35B3FCD}"/>
+              </a:ext>
+            </a:extLst>
+          </p:cNvPr>
+          <p:cNvSpPr>
+            <a:spLocks noGrp="1"/>
+          </p:cNvSpPr>
+          <p:nvPr>
+            <p:ph type="body" sz="quarter" idx="25" hasCustomPrompt="1"/>
+          </p:nvPr>
+        </p:nvSpPr>
+        <p:spPr>
+          <a:xfrm>
+            <a:off x="710624" y="813558"/>
+            <a:ext cx="10119052" cy="338138"/>
+          </a:xfrm>
+          <a:prstGeom prst="rect">
+            <a:avLst/>
+          </a:prstGeom>
+        </p:spPr>
+        <p:txBody>
+          <a:bodyPr/>
+          <a:lstStyle>
+            <a:lvl1pPr marL="0" indent="0">
+              <a:buNone/>
+              <a:defRPr sz="2000" b="1"/>
+            </a:lvl1pPr>
+          </a:lstStyle>
+          <a:p>
+            <a:pPr lvl="0"/>
+            <a:r>
+              <a:rPr lang="de-DE" dirty="0"/>
+              <a:t>Single Agent Pipeline</a:t>
+            </a:r>
+          </a:p>
+        </p:txBody>
+      </p:sp>
+      <p:sp>
+        <p:nvSpPr>
+          <p:cNvPr id="4" name="Text Placeholder 4">
+            <a:extLst>
+              <a:ext uri="{FF2B5EF4-FFF2-40B4-BE49-F238E27FC236}">
+                <a16:creationId xmlns:a16="http://schemas.microsoft.com/office/drawing/2014/main" id="{2BDFDBF5-8C51-344E-75B1-3AE6128B06F5}"/>
+              </a:ext>
+            </a:extLst>
+          </p:cNvPr>
+          <p:cNvSpPr txBox="1">
+            <a:spLocks/>
+          </p:cNvSpPr>
+          <p:nvPr/>
+        </p:nvSpPr>
+        <p:spPr>
+          <a:xfrm>
+            <a:off x="710624" y="3142810"/>
+            <a:ext cx="11303356" cy="1464415"/>
+          </a:xfrm>
+          <a:prstGeom prst="rect">
+            <a:avLst/>
+          </a:prstGeom>
+        </p:spPr>
+        <p:txBody>
+          <a:bodyPr/>
+          <a:lstStyle>
+            <a:lvl1pPr marL="228600" indent="-228600" algn="l" defTabSz="914400" rtl="0" eaLnBrk="1" latinLnBrk="0" hangingPunct="1">
+              <a:lnSpc>
+                <a:spcPct val="90000"/>
+              </a:lnSpc>
+              <a:spcBef>
+                <a:spcPts val="1000"/>
+              </a:spcBef>
+              <a:buFont typeface="Arial" panose="020B0604020202020204" pitchFamily="34" charset="0"/>
+              <a:buChar char="•"/>
+              <a:defRPr sz="2000" kern="1200">
+                <a:solidFill>
+                  <a:schemeClr val="tx1"/>
+                </a:solidFill>
+                <a:latin typeface="+mn-lt"/>
+                <a:ea typeface="+mn-ea"/>
+                <a:cs typeface="+mn-cs"/>
+              </a:defRPr>
+            </a:lvl1pPr>
+            <a:lvl2pPr marL="685800" indent="-228600" algn="l" defTabSz="914400" rtl="0" eaLnBrk="1" latinLnBrk="0" hangingPunct="1">
+              <a:lnSpc>
+                <a:spcPct val="90000"/>
+              </a:lnSpc>
+              <a:spcBef>
+                <a:spcPts val="500"/>
+              </a:spcBef>
+              <a:buFont typeface="Arial" panose="020B0604020202020204" pitchFamily="34" charset="0"/>
+              <a:buChar char="•"/>
+              <a:defRPr sz="1800" kern="1200">
+                <a:solidFill>
+                  <a:schemeClr val="tx1"/>
+                </a:solidFill>
+                <a:latin typeface="+mn-lt"/>
+                <a:ea typeface="+mn-ea"/>
+                <a:cs typeface="+mn-cs"/>
+              </a:defRPr>
+            </a:lvl2pPr>
+            <a:lvl3pPr marL="1143000" indent="-228600" algn="l" defTabSz="914400" rtl="0" eaLnBrk="1" latinLnBrk="0" hangingPunct="1">
+              <a:lnSpc>
+                <a:spcPct val="90000"/>
+              </a:lnSpc>
+              <a:spcBef>
+                <a:spcPts val="500"/>
+              </a:spcBef>
+              <a:buFont typeface="Arial" panose="020B0604020202020204" pitchFamily="34" charset="0"/>
+              <a:buChar char="•"/>
+              <a:defRPr sz="1600" kern="1200">
+                <a:solidFill>
+                  <a:schemeClr val="tx1"/>
+                </a:solidFill>
+                <a:latin typeface="+mn-lt"/>
+                <a:ea typeface="+mn-ea"/>
+                <a:cs typeface="+mn-cs"/>
+              </a:defRPr>
+            </a:lvl3pPr>
+            <a:lvl4pPr marL="1600200" indent="-228600" algn="l" defTabSz="914400" rtl="0" eaLnBrk="1" latinLnBrk="0" hangingPunct="1">
+              <a:lnSpc>
+                <a:spcPct val="90000"/>
+              </a:lnSpc>
+              <a:spcBef>
+                <a:spcPts val="500"/>
+              </a:spcBef>
+              <a:buFont typeface="Arial" panose="020B0604020202020204" pitchFamily="34" charset="0"/>
+              <a:buChar char="•"/>
+              <a:defRPr sz="1800" kern="1200">
+                <a:solidFill>
+                  <a:schemeClr val="tx1"/>
+                </a:solidFill>
+                <a:latin typeface="+mn-lt"/>
+                <a:ea typeface="+mn-ea"/>
+                <a:cs typeface="+mn-cs"/>
+              </a:defRPr>
+            </a:lvl4pPr>
+            <a:lvl5pPr marL="2057400" indent="-228600" algn="l" defTabSz="914400" rtl="0" eaLnBrk="1" latinLnBrk="0" hangingPunct="1">
+              <a:lnSpc>
+                <a:spcPct val="90000"/>
+              </a:lnSpc>
+              <a:spcBef>
+                <a:spcPts val="500"/>
+              </a:spcBef>
+              <a:buFont typeface="Arial" panose="020B0604020202020204" pitchFamily="34" charset="0"/>
+              <a:buChar char="•"/>
+              <a:defRPr sz="1800" kern="1200">
+                <a:solidFill>
+                  <a:schemeClr val="tx1"/>
+                </a:solidFill>
+                <a:latin typeface="+mn-lt"/>
+                <a:ea typeface="+mn-ea"/>
+                <a:cs typeface="+mn-cs"/>
+              </a:defRPr>
+            </a:lvl5pPr>
+            <a:lvl6pPr marL="2514600" indent="-228600" algn="l" defTabSz="914400" rtl="0" eaLnBrk="1" latinLnBrk="0" hangingPunct="1">
+              <a:lnSpc>
+                <a:spcPct val="90000"/>
+              </a:lnSpc>
+              <a:spcBef>
+                <a:spcPts val="500"/>
+              </a:spcBef>
+              <a:buFont typeface="Arial" panose="020B0604020202020204" pitchFamily="34" charset="0"/>
+              <a:buChar char="•"/>
+              <a:defRPr sz="1800" kern="1200">
+                <a:solidFill>
+                  <a:schemeClr val="tx1"/>
+                </a:solidFill>
+                <a:latin typeface="+mn-lt"/>
+                <a:ea typeface="+mn-ea"/>
+                <a:cs typeface="+mn-cs"/>
+              </a:defRPr>
+            </a:lvl6pPr>
+            <a:lvl7pPr marL="2971800" indent="-228600" algn="l" defTabSz="914400" rtl="0" eaLnBrk="1" latinLnBrk="0" hangingPunct="1">
+              <a:lnSpc>
+                <a:spcPct val="90000"/>
+              </a:lnSpc>
+              <a:spcBef>
+                <a:spcPts val="500"/>
+              </a:spcBef>
+              <a:buFont typeface="Arial" panose="020B0604020202020204" pitchFamily="34" charset="0"/>
+              <a:buChar char="•"/>
+              <a:defRPr sz="1800" kern="1200">
+                <a:solidFill>
+                  <a:schemeClr val="tx1"/>
+                </a:solidFill>
+                <a:latin typeface="+mn-lt"/>
+                <a:ea typeface="+mn-ea"/>
+                <a:cs typeface="+mn-cs"/>
+              </a:defRPr>
+            </a:lvl7pPr>
+            <a:lvl8pPr marL="3429000" indent="-228600" algn="l" defTabSz="914400" rtl="0" eaLnBrk="1" latinLnBrk="0" hangingPunct="1">
+              <a:lnSpc>
+                <a:spcPct val="90000"/>
+              </a:lnSpc>
+              <a:spcBef>
+                <a:spcPts val="500"/>
+              </a:spcBef>
+              <a:buFont typeface="Arial" panose="020B0604020202020204" pitchFamily="34" charset="0"/>
+              <a:buChar char="•"/>
+              <a:defRPr sz="1800" kern="1200">
+                <a:solidFill>
+                  <a:schemeClr val="tx1"/>
+                </a:solidFill>
+                <a:latin typeface="+mn-lt"/>
+                <a:ea typeface="+mn-ea"/>
+                <a:cs typeface="+mn-cs"/>
+              </a:defRPr>
+            </a:lvl8pPr>
+            <a:lvl9pPr marL="3886200" indent="-228600" algn="l" defTabSz="914400" rtl="0" eaLnBrk="1" latinLnBrk="0" hangingPunct="1">
+              <a:lnSpc>
+                <a:spcPct val="90000"/>
+              </a:lnSpc>
+              <a:spcBef>
+                <a:spcPts val="500"/>
+              </a:spcBef>
+              <a:buFont typeface="Arial" panose="020B0604020202020204" pitchFamily="34" charset="0"/>
+              <a:buChar char="•"/>
+              <a:defRPr sz="1800" kern="1200">
+                <a:solidFill>
+                  <a:schemeClr val="tx1"/>
+                </a:solidFill>
+                <a:latin typeface="+mn-lt"/>
+                <a:ea typeface="+mn-ea"/>
+                <a:cs typeface="+mn-cs"/>
+              </a:defRPr>
+            </a:lvl9pPr>
+          </a:lstStyle>
+          <a:p>
+            <a:pPr marL="457200" lvl="1" indent="0">
+              <a:buFont typeface="Arial" panose="020B0604020202020204" pitchFamily="34" charset="0"/>
+              <a:buNone/>
+            </a:pPr>
+            <a:endParaRPr lang="en-US" dirty="0"/>
+          </a:p>
+        </p:txBody>
+      </p:sp>
+      <p:sp>
+        <p:nvSpPr>
+          <p:cNvPr id="11" name="Text Placeholder 4">
+            <a:extLst>
+              <a:ext uri="{FF2B5EF4-FFF2-40B4-BE49-F238E27FC236}">
+                <a16:creationId xmlns:a16="http://schemas.microsoft.com/office/drawing/2014/main" id="{9DF10550-1641-75E9-AEDC-2044E74B2036}"/>
+              </a:ext>
+            </a:extLst>
+          </p:cNvPr>
+          <p:cNvSpPr>
+            <a:spLocks noGrp="1"/>
+          </p:cNvSpPr>
+          <p:nvPr>
+            <p:ph type="body" sz="quarter" idx="16"/>
+          </p:nvPr>
+        </p:nvSpPr>
+        <p:spPr>
+          <a:xfrm>
+            <a:off x="695325" y="1635624"/>
+            <a:ext cx="11303356" cy="4163514"/>
+          </a:xfrm>
+        </p:spPr>
+        <p:txBody>
+          <a:bodyPr/>
+          <a:lstStyle/>
+          <a:p>
+            <a:pPr marL="0" indent="0">
+              <a:buNone/>
+            </a:pPr>
+            <a:endParaRPr lang="en-US" dirty="0"/>
+          </a:p>
+          <a:p>
+            <a:pPr marL="0" indent="0">
+              <a:buNone/>
+            </a:pPr>
+            <a:endParaRPr lang="en-US" dirty="0"/>
+          </a:p>
+        </p:txBody>
+      </p:sp>
+    </p:spTree>
+    <p:extLst>
+      <p:ext uri="{BB962C8B-B14F-4D97-AF65-F5344CB8AC3E}">
+        <p14:creationId xmlns:p14="http://schemas.microsoft.com/office/powerpoint/2010/main" val="3345783157"/>
+      </p:ext>
+    </p:extLst>
+  </p:cSld>
+  <p:clrMapOvr>
+    <a:masterClrMapping/>
+  </p:clrMapOvr>
+</p:sld>
+</file>
+
+<file path=ppt/slides/slide12.xml><?xml version="1.0" encoding="utf-8"?>
+<p:sld xmlns:a="http://schemas.openxmlformats.org/drawingml/2006/main" xmlns:r="http://schemas.openxmlformats.org/officeDocument/2006/relationships" xmlns:p="http://schemas.openxmlformats.org/presentationml/2006/main">
+  <p:cSld>
+    <p:spTree>
+      <p:nvGrpSpPr>
+        <p:cNvPr id="1" name="">
+          <a:extLst>
+            <a:ext uri="{FF2B5EF4-FFF2-40B4-BE49-F238E27FC236}">
+              <a16:creationId xmlns:a16="http://schemas.microsoft.com/office/drawing/2014/main" id="{882143D9-E573-23D2-6252-165C49E878A0}"/>
+            </a:ext>
+          </a:extLst>
+        </p:cNvPr>
+        <p:cNvGrpSpPr/>
+        <p:nvPr/>
+      </p:nvGrpSpPr>
+      <p:grpSpPr>
+        <a:xfrm>
+          <a:off x="0" y="0"/>
+          <a:ext cx="0" cy="0"/>
+          <a:chOff x="0" y="0"/>
+          <a:chExt cx="0" cy="0"/>
+        </a:xfrm>
+      </p:grpSpPr>
+      <p:sp>
+        <p:nvSpPr>
+          <p:cNvPr id="2" name="Fußzeilenplatzhalter 1">
+            <a:extLst>
+              <a:ext uri="{FF2B5EF4-FFF2-40B4-BE49-F238E27FC236}">
+                <a16:creationId xmlns:a16="http://schemas.microsoft.com/office/drawing/2014/main" id="{D781025E-C7D8-795D-B6BF-23B180D32441}"/>
+              </a:ext>
+            </a:extLst>
+          </p:cNvPr>
+          <p:cNvSpPr>
+            <a:spLocks noGrp="1"/>
+          </p:cNvSpPr>
+          <p:nvPr>
+            <p:ph type="ftr" sz="quarter" idx="26"/>
+          </p:nvPr>
+        </p:nvSpPr>
+        <p:spPr/>
+        <p:txBody>
+          <a:bodyPr/>
+          <a:lstStyle/>
+          <a:p>
+            <a:r>
+              <a:rPr lang="de-DE"/>
+              <a:t>KI Projekt | Sina Brunner, Lars Nettersheim, John Schwarz, Leon Ulbrich, Felix Wensky </a:t>
+            </a:r>
+            <a:endParaRPr lang="de-DE" dirty="0"/>
+          </a:p>
+        </p:txBody>
+      </p:sp>
+      <p:sp>
+        <p:nvSpPr>
+          <p:cNvPr id="3" name="Foliennummernplatzhalter 2">
+            <a:extLst>
+              <a:ext uri="{FF2B5EF4-FFF2-40B4-BE49-F238E27FC236}">
+                <a16:creationId xmlns:a16="http://schemas.microsoft.com/office/drawing/2014/main" id="{8AD6C353-5D56-DB2A-3D2F-151C6F9BF5B8}"/>
+              </a:ext>
+            </a:extLst>
+          </p:cNvPr>
+          <p:cNvSpPr>
+            <a:spLocks noGrp="1"/>
+          </p:cNvSpPr>
+          <p:nvPr>
+            <p:ph type="sldNum" sz="quarter" idx="4"/>
+          </p:nvPr>
+        </p:nvSpPr>
+        <p:spPr/>
+        <p:txBody>
+          <a:bodyPr/>
+          <a:lstStyle/>
+          <a:p>
+            <a:fld id="{E7298502-BA22-4927-B2ED-0A18FFA86FFE}" type="slidenum">
+              <a:rPr lang="de-DE" smtClean="0"/>
+              <a:pPr/>
+              <a:t>12</a:t>
+            </a:fld>
+            <a:endParaRPr lang="de-DE" dirty="0"/>
+          </a:p>
+        </p:txBody>
+      </p:sp>
+      <p:cxnSp>
+        <p:nvCxnSpPr>
+          <p:cNvPr id="8" name="Gerader Verbinder 7">
+            <a:extLst>
+              <a:ext uri="{FF2B5EF4-FFF2-40B4-BE49-F238E27FC236}">
+                <a16:creationId xmlns:a16="http://schemas.microsoft.com/office/drawing/2014/main" id="{4BE308EC-B044-6D0F-8023-7D3A6A6BAF22}"/>
+              </a:ext>
+            </a:extLst>
+          </p:cNvPr>
+          <p:cNvCxnSpPr>
+            <a:cxnSpLocks/>
+          </p:cNvCxnSpPr>
+          <p:nvPr/>
+        </p:nvCxnSpPr>
+        <p:spPr>
+          <a:xfrm>
+            <a:off x="713582" y="746389"/>
+            <a:ext cx="0" cy="468000"/>
+          </a:xfrm>
+          <a:prstGeom prst="line">
+            <a:avLst/>
+          </a:prstGeom>
+          <a:ln w="28575"/>
+        </p:spPr>
+        <p:style>
+          <a:lnRef idx="1">
+            <a:schemeClr val="accent1"/>
+          </a:lnRef>
+          <a:fillRef idx="0">
+            <a:schemeClr val="accent1"/>
+          </a:fillRef>
+          <a:effectRef idx="0">
+            <a:schemeClr val="accent1"/>
+          </a:effectRef>
+          <a:fontRef idx="minor">
+            <a:schemeClr val="tx1"/>
+          </a:fontRef>
+        </p:style>
+      </p:cxnSp>
+      <p:sp>
+        <p:nvSpPr>
+          <p:cNvPr id="9" name="Textplatzhalter 12">
+            <a:extLst>
+              <a:ext uri="{FF2B5EF4-FFF2-40B4-BE49-F238E27FC236}">
+                <a16:creationId xmlns:a16="http://schemas.microsoft.com/office/drawing/2014/main" id="{CA60EE94-9C2F-C0CD-EF1E-F9E09C774DA9}"/>
+              </a:ext>
+            </a:extLst>
+          </p:cNvPr>
+          <p:cNvSpPr>
+            <a:spLocks noGrp="1"/>
+          </p:cNvSpPr>
+          <p:nvPr>
+            <p:ph type="body" sz="quarter" idx="13" hasCustomPrompt="1"/>
+          </p:nvPr>
+        </p:nvSpPr>
+        <p:spPr>
+          <a:xfrm>
+            <a:off x="695325" y="199474"/>
+            <a:ext cx="10119053" cy="468000"/>
+          </a:xfrm>
+          <a:prstGeom prst="rect">
+            <a:avLst/>
+          </a:prstGeom>
+        </p:spPr>
+        <p:txBody>
+          <a:bodyPr anchor="t">
+            <a:noAutofit/>
+          </a:bodyPr>
+          <a:lstStyle>
+            <a:lvl1pPr marL="0" indent="0">
+              <a:buNone/>
+              <a:defRPr sz="3000" b="1" cap="none" baseline="0"/>
+            </a:lvl1pPr>
+            <a:lvl2pPr>
+              <a:defRPr sz="2900" b="1" cap="all" baseline="0"/>
+            </a:lvl2pPr>
+            <a:lvl3pPr>
+              <a:defRPr sz="2900" b="1" cap="all" baseline="0"/>
+            </a:lvl3pPr>
+            <a:lvl4pPr>
+              <a:defRPr sz="2900" b="1" cap="all" baseline="0"/>
+            </a:lvl4pPr>
+            <a:lvl5pPr>
+              <a:defRPr sz="2900" b="1" cap="all" baseline="0"/>
+            </a:lvl5pPr>
+          </a:lstStyle>
+          <a:p>
+            <a:r>
+              <a:rPr lang="de-DE" dirty="0"/>
+              <a:t>System Demo (Screenshots)</a:t>
+            </a:r>
+          </a:p>
+        </p:txBody>
+      </p:sp>
+      <p:sp>
+        <p:nvSpPr>
+          <p:cNvPr id="10" name="Textplatzhalter 20">
+            <a:extLst>
+              <a:ext uri="{FF2B5EF4-FFF2-40B4-BE49-F238E27FC236}">
+                <a16:creationId xmlns:a16="http://schemas.microsoft.com/office/drawing/2014/main" id="{2AA3057C-E69C-1541-CE5A-8752136D0C06}"/>
+              </a:ext>
+            </a:extLst>
+          </p:cNvPr>
+          <p:cNvSpPr>
+            <a:spLocks noGrp="1"/>
+          </p:cNvSpPr>
+          <p:nvPr>
+            <p:ph type="body" sz="quarter" idx="25" hasCustomPrompt="1"/>
+          </p:nvPr>
+        </p:nvSpPr>
+        <p:spPr>
+          <a:xfrm>
+            <a:off x="710624" y="813558"/>
+            <a:ext cx="10119052" cy="338138"/>
+          </a:xfrm>
+          <a:prstGeom prst="rect">
+            <a:avLst/>
+          </a:prstGeom>
+        </p:spPr>
+        <p:txBody>
+          <a:bodyPr/>
+          <a:lstStyle>
+            <a:lvl1pPr marL="0" indent="0">
+              <a:buNone/>
+              <a:defRPr sz="2000" b="1"/>
+            </a:lvl1pPr>
+          </a:lstStyle>
+          <a:p>
+            <a:pPr lvl="0"/>
+            <a:r>
+              <a:rPr lang="de-DE" dirty="0" err="1"/>
+              <a:t>Inference</a:t>
+            </a:r>
+            <a:r>
+              <a:rPr lang="de-DE" dirty="0"/>
+              <a:t> </a:t>
+            </a:r>
+            <a:r>
+              <a:rPr lang="de-DE" dirty="0" err="1"/>
+              <a:t>Application</a:t>
+            </a:r>
+            <a:endParaRPr lang="de-DE" dirty="0"/>
+          </a:p>
+        </p:txBody>
+      </p:sp>
+      <p:sp>
+        <p:nvSpPr>
+          <p:cNvPr id="4" name="Text Placeholder 4">
+            <a:extLst>
+              <a:ext uri="{FF2B5EF4-FFF2-40B4-BE49-F238E27FC236}">
+                <a16:creationId xmlns:a16="http://schemas.microsoft.com/office/drawing/2014/main" id="{3B1C3E52-AC5C-673E-2D2F-5DEDF0669741}"/>
+              </a:ext>
+            </a:extLst>
+          </p:cNvPr>
+          <p:cNvSpPr txBox="1">
+            <a:spLocks/>
+          </p:cNvSpPr>
+          <p:nvPr/>
+        </p:nvSpPr>
+        <p:spPr>
+          <a:xfrm>
+            <a:off x="710624" y="3142810"/>
+            <a:ext cx="11303356" cy="1464415"/>
+          </a:xfrm>
+          <a:prstGeom prst="rect">
+            <a:avLst/>
+          </a:prstGeom>
+        </p:spPr>
+        <p:txBody>
+          <a:bodyPr/>
+          <a:lstStyle>
+            <a:lvl1pPr marL="228600" indent="-228600" algn="l" defTabSz="914400" rtl="0" eaLnBrk="1" latinLnBrk="0" hangingPunct="1">
+              <a:lnSpc>
+                <a:spcPct val="90000"/>
+              </a:lnSpc>
+              <a:spcBef>
+                <a:spcPts val="1000"/>
+              </a:spcBef>
+              <a:buFont typeface="Arial" panose="020B0604020202020204" pitchFamily="34" charset="0"/>
+              <a:buChar char="•"/>
+              <a:defRPr sz="2000" kern="1200">
+                <a:solidFill>
+                  <a:schemeClr val="tx1"/>
+                </a:solidFill>
+                <a:latin typeface="+mn-lt"/>
+                <a:ea typeface="+mn-ea"/>
+                <a:cs typeface="+mn-cs"/>
+              </a:defRPr>
+            </a:lvl1pPr>
+            <a:lvl2pPr marL="685800" indent="-228600" algn="l" defTabSz="914400" rtl="0" eaLnBrk="1" latinLnBrk="0" hangingPunct="1">
+              <a:lnSpc>
+                <a:spcPct val="90000"/>
+              </a:lnSpc>
+              <a:spcBef>
+                <a:spcPts val="500"/>
+              </a:spcBef>
+              <a:buFont typeface="Arial" panose="020B0604020202020204" pitchFamily="34" charset="0"/>
+              <a:buChar char="•"/>
+              <a:defRPr sz="1800" kern="1200">
+                <a:solidFill>
+                  <a:schemeClr val="tx1"/>
+                </a:solidFill>
+                <a:latin typeface="+mn-lt"/>
+                <a:ea typeface="+mn-ea"/>
+                <a:cs typeface="+mn-cs"/>
+              </a:defRPr>
+            </a:lvl2pPr>
+            <a:lvl3pPr marL="1143000" indent="-228600" algn="l" defTabSz="914400" rtl="0" eaLnBrk="1" latinLnBrk="0" hangingPunct="1">
+              <a:lnSpc>
+                <a:spcPct val="90000"/>
+              </a:lnSpc>
+              <a:spcBef>
+                <a:spcPts val="500"/>
+              </a:spcBef>
+              <a:buFont typeface="Arial" panose="020B0604020202020204" pitchFamily="34" charset="0"/>
+              <a:buChar char="•"/>
+              <a:defRPr sz="1600" kern="1200">
+                <a:solidFill>
+                  <a:schemeClr val="tx1"/>
+                </a:solidFill>
+                <a:latin typeface="+mn-lt"/>
+                <a:ea typeface="+mn-ea"/>
+                <a:cs typeface="+mn-cs"/>
+              </a:defRPr>
+            </a:lvl3pPr>
+            <a:lvl4pPr marL="1600200" indent="-228600" algn="l" defTabSz="914400" rtl="0" eaLnBrk="1" latinLnBrk="0" hangingPunct="1">
+              <a:lnSpc>
+                <a:spcPct val="90000"/>
+              </a:lnSpc>
+              <a:spcBef>
+                <a:spcPts val="500"/>
+              </a:spcBef>
+              <a:buFont typeface="Arial" panose="020B0604020202020204" pitchFamily="34" charset="0"/>
+              <a:buChar char="•"/>
+              <a:defRPr sz="1800" kern="1200">
+                <a:solidFill>
+                  <a:schemeClr val="tx1"/>
+                </a:solidFill>
+                <a:latin typeface="+mn-lt"/>
+                <a:ea typeface="+mn-ea"/>
+                <a:cs typeface="+mn-cs"/>
+              </a:defRPr>
+            </a:lvl4pPr>
+            <a:lvl5pPr marL="2057400" indent="-228600" algn="l" defTabSz="914400" rtl="0" eaLnBrk="1" latinLnBrk="0" hangingPunct="1">
+              <a:lnSpc>
+                <a:spcPct val="90000"/>
+              </a:lnSpc>
+              <a:spcBef>
+                <a:spcPts val="500"/>
+              </a:spcBef>
+              <a:buFont typeface="Arial" panose="020B0604020202020204" pitchFamily="34" charset="0"/>
+              <a:buChar char="•"/>
+              <a:defRPr sz="1800" kern="1200">
+                <a:solidFill>
+                  <a:schemeClr val="tx1"/>
+                </a:solidFill>
+                <a:latin typeface="+mn-lt"/>
+                <a:ea typeface="+mn-ea"/>
+                <a:cs typeface="+mn-cs"/>
+              </a:defRPr>
+            </a:lvl5pPr>
+            <a:lvl6pPr marL="2514600" indent="-228600" algn="l" defTabSz="914400" rtl="0" eaLnBrk="1" latinLnBrk="0" hangingPunct="1">
+              <a:lnSpc>
+                <a:spcPct val="90000"/>
+              </a:lnSpc>
+              <a:spcBef>
+                <a:spcPts val="500"/>
+              </a:spcBef>
+              <a:buFont typeface="Arial" panose="020B0604020202020204" pitchFamily="34" charset="0"/>
+              <a:buChar char="•"/>
+              <a:defRPr sz="1800" kern="1200">
+                <a:solidFill>
+                  <a:schemeClr val="tx1"/>
+                </a:solidFill>
+                <a:latin typeface="+mn-lt"/>
+                <a:ea typeface="+mn-ea"/>
+                <a:cs typeface="+mn-cs"/>
+              </a:defRPr>
+            </a:lvl6pPr>
+            <a:lvl7pPr marL="2971800" indent="-228600" algn="l" defTabSz="914400" rtl="0" eaLnBrk="1" latinLnBrk="0" hangingPunct="1">
+              <a:lnSpc>
+                <a:spcPct val="90000"/>
+              </a:lnSpc>
+              <a:spcBef>
+                <a:spcPts val="500"/>
+              </a:spcBef>
+              <a:buFont typeface="Arial" panose="020B0604020202020204" pitchFamily="34" charset="0"/>
+              <a:buChar char="•"/>
+              <a:defRPr sz="1800" kern="1200">
+                <a:solidFill>
+                  <a:schemeClr val="tx1"/>
+                </a:solidFill>
+                <a:latin typeface="+mn-lt"/>
+                <a:ea typeface="+mn-ea"/>
+                <a:cs typeface="+mn-cs"/>
+              </a:defRPr>
+            </a:lvl7pPr>
+            <a:lvl8pPr marL="3429000" indent="-228600" algn="l" defTabSz="914400" rtl="0" eaLnBrk="1" latinLnBrk="0" hangingPunct="1">
+              <a:lnSpc>
+                <a:spcPct val="90000"/>
+              </a:lnSpc>
+              <a:spcBef>
+                <a:spcPts val="500"/>
+              </a:spcBef>
+              <a:buFont typeface="Arial" panose="020B0604020202020204" pitchFamily="34" charset="0"/>
+              <a:buChar char="•"/>
+              <a:defRPr sz="1800" kern="1200">
+                <a:solidFill>
+                  <a:schemeClr val="tx1"/>
+                </a:solidFill>
+                <a:latin typeface="+mn-lt"/>
+                <a:ea typeface="+mn-ea"/>
+                <a:cs typeface="+mn-cs"/>
+              </a:defRPr>
+            </a:lvl8pPr>
+            <a:lvl9pPr marL="3886200" indent="-228600" algn="l" defTabSz="914400" rtl="0" eaLnBrk="1" latinLnBrk="0" hangingPunct="1">
+              <a:lnSpc>
+                <a:spcPct val="90000"/>
+              </a:lnSpc>
+              <a:spcBef>
+                <a:spcPts val="500"/>
+              </a:spcBef>
+              <a:buFont typeface="Arial" panose="020B0604020202020204" pitchFamily="34" charset="0"/>
+              <a:buChar char="•"/>
+              <a:defRPr sz="1800" kern="1200">
+                <a:solidFill>
+                  <a:schemeClr val="tx1"/>
+                </a:solidFill>
+                <a:latin typeface="+mn-lt"/>
+                <a:ea typeface="+mn-ea"/>
+                <a:cs typeface="+mn-cs"/>
+              </a:defRPr>
+            </a:lvl9pPr>
+          </a:lstStyle>
+          <a:p>
+            <a:pPr marL="457200" lvl="1" indent="0">
+              <a:buFont typeface="Arial" panose="020B0604020202020204" pitchFamily="34" charset="0"/>
+              <a:buNone/>
+            </a:pPr>
+            <a:endParaRPr lang="en-US" dirty="0"/>
+          </a:p>
+        </p:txBody>
+      </p:sp>
+      <p:sp>
+        <p:nvSpPr>
+          <p:cNvPr id="11" name="Text Placeholder 4">
+            <a:extLst>
+              <a:ext uri="{FF2B5EF4-FFF2-40B4-BE49-F238E27FC236}">
+                <a16:creationId xmlns:a16="http://schemas.microsoft.com/office/drawing/2014/main" id="{5F4958FA-A313-391A-31DB-A0E489962B09}"/>
+              </a:ext>
+            </a:extLst>
+          </p:cNvPr>
+          <p:cNvSpPr>
+            <a:spLocks noGrp="1"/>
+          </p:cNvSpPr>
+          <p:nvPr>
+            <p:ph type="body" sz="quarter" idx="16"/>
+          </p:nvPr>
+        </p:nvSpPr>
+        <p:spPr>
+          <a:xfrm>
+            <a:off x="695325" y="1635624"/>
+            <a:ext cx="11303356" cy="4163514"/>
+          </a:xfrm>
+        </p:spPr>
+        <p:txBody>
+          <a:bodyPr/>
+          <a:lstStyle/>
+          <a:p>
+            <a:pPr marL="0" indent="0">
+              <a:buNone/>
+            </a:pPr>
+            <a:endParaRPr lang="en-US" dirty="0"/>
+          </a:p>
+          <a:p>
+            <a:pPr marL="0" indent="0">
+              <a:buNone/>
+            </a:pPr>
+            <a:endParaRPr lang="en-US" dirty="0"/>
+          </a:p>
+        </p:txBody>
+      </p:sp>
+    </p:spTree>
+    <p:extLst>
+      <p:ext uri="{BB962C8B-B14F-4D97-AF65-F5344CB8AC3E}">
+        <p14:creationId xmlns:p14="http://schemas.microsoft.com/office/powerpoint/2010/main" val="3884505175"/>
+      </p:ext>
+    </p:extLst>
+  </p:cSld>
+  <p:clrMapOvr>
+    <a:masterClrMapping/>
+  </p:clrMapOvr>
+</p:sld>
+</file>
+
+<file path=ppt/slides/slide13.xml><?xml version="1.0" encoding="utf-8"?>
+<p:sld xmlns:a="http://schemas.openxmlformats.org/drawingml/2006/main" xmlns:r="http://schemas.openxmlformats.org/officeDocument/2006/relationships" xmlns:p="http://schemas.openxmlformats.org/presentationml/2006/main">
+  <p:cSld>
+    <p:spTree>
+      <p:nvGrpSpPr>
+        <p:cNvPr id="1" name=""/>
+        <p:cNvGrpSpPr/>
+        <p:nvPr/>
+      </p:nvGrpSpPr>
+      <p:grpSpPr>
+        <a:xfrm>
+          <a:off x="0" y="0"/>
+          <a:ext cx="0" cy="0"/>
+          <a:chOff x="0" y="0"/>
+          <a:chExt cx="0" cy="0"/>
+        </a:xfrm>
+      </p:grpSpPr>
+      <p:sp>
+        <p:nvSpPr>
+          <p:cNvPr id="2" name="Footer Placeholder 1">
+            <a:extLst>
+              <a:ext uri="{FF2B5EF4-FFF2-40B4-BE49-F238E27FC236}">
+                <a16:creationId xmlns:a16="http://schemas.microsoft.com/office/drawing/2014/main" id="{8EDE743A-357C-1190-893C-58792AB750F1}"/>
+              </a:ext>
+            </a:extLst>
+          </p:cNvPr>
+          <p:cNvSpPr>
+            <a:spLocks noGrp="1"/>
+          </p:cNvSpPr>
+          <p:nvPr>
+            <p:ph type="ftr" sz="quarter" idx="26"/>
+          </p:nvPr>
+        </p:nvSpPr>
+        <p:spPr/>
+        <p:txBody>
+          <a:bodyPr/>
+          <a:lstStyle/>
+          <a:p>
+            <a:r>
+              <a:rPr lang="de-DE"/>
+              <a:t>KI Projekt | Sina Brunner, Lars Nettersheim, John Schwarz, Leon Ulbrich, Felix Wensky </a:t>
+            </a:r>
+            <a:endParaRPr lang="de-DE" dirty="0"/>
+          </a:p>
+        </p:txBody>
+      </p:sp>
+      <p:sp>
+        <p:nvSpPr>
+          <p:cNvPr id="3" name="Slide Number Placeholder 2">
+            <a:extLst>
+              <a:ext uri="{FF2B5EF4-FFF2-40B4-BE49-F238E27FC236}">
+                <a16:creationId xmlns:a16="http://schemas.microsoft.com/office/drawing/2014/main" id="{AA9BF9B0-3007-F47D-54EC-BCC123D3E244}"/>
+              </a:ext>
+            </a:extLst>
+          </p:cNvPr>
+          <p:cNvSpPr>
+            <a:spLocks noGrp="1"/>
+          </p:cNvSpPr>
+          <p:nvPr>
+            <p:ph type="sldNum" sz="quarter" idx="4"/>
+          </p:nvPr>
+        </p:nvSpPr>
+        <p:spPr/>
+        <p:txBody>
+          <a:bodyPr/>
+          <a:lstStyle/>
+          <a:p>
+            <a:fld id="{E7298502-BA22-4927-B2ED-0A18FFA86FFE}" type="slidenum">
+              <a:rPr lang="de-DE" smtClean="0"/>
+              <a:pPr/>
+              <a:t>13</a:t>
+            </a:fld>
+            <a:endParaRPr lang="de-DE" dirty="0"/>
+          </a:p>
+        </p:txBody>
+      </p:sp>
+      <p:sp>
+        <p:nvSpPr>
+          <p:cNvPr id="5" name="Text Placeholder 4">
+            <a:extLst>
+              <a:ext uri="{FF2B5EF4-FFF2-40B4-BE49-F238E27FC236}">
+                <a16:creationId xmlns:a16="http://schemas.microsoft.com/office/drawing/2014/main" id="{834E58B6-C026-FAF6-FC0D-B57EE8AC0D10}"/>
+              </a:ext>
+            </a:extLst>
+          </p:cNvPr>
+          <p:cNvSpPr>
+            <a:spLocks noGrp="1"/>
+          </p:cNvSpPr>
+          <p:nvPr>
+            <p:ph type="body" sz="quarter" idx="25"/>
+          </p:nvPr>
+        </p:nvSpPr>
+        <p:spPr/>
+        <p:txBody>
+          <a:bodyPr/>
+          <a:lstStyle/>
+          <a:p>
+            <a:r>
+              <a:rPr lang="en-US" dirty="0" err="1"/>
+              <a:t>Unterschriften</a:t>
+            </a:r>
+            <a:endParaRPr lang="en-US" dirty="0"/>
+          </a:p>
+        </p:txBody>
+      </p:sp>
+      <p:sp>
+        <p:nvSpPr>
+          <p:cNvPr id="6" name="Text Placeholder 5">
+            <a:extLst>
+              <a:ext uri="{FF2B5EF4-FFF2-40B4-BE49-F238E27FC236}">
+                <a16:creationId xmlns:a16="http://schemas.microsoft.com/office/drawing/2014/main" id="{5EAC9BE7-58A7-5B66-17DE-F63025510964}"/>
+              </a:ext>
+            </a:extLst>
+          </p:cNvPr>
+          <p:cNvSpPr>
+            <a:spLocks noGrp="1"/>
+          </p:cNvSpPr>
+          <p:nvPr>
+            <p:ph type="body" sz="quarter" idx="16"/>
+          </p:nvPr>
+        </p:nvSpPr>
+        <p:spPr/>
+        <p:txBody>
+          <a:bodyPr/>
+          <a:lstStyle/>
+          <a:p>
+            <a:endParaRPr lang="en-US" dirty="0"/>
+          </a:p>
+        </p:txBody>
+      </p:sp>
+      <p:sp>
+        <p:nvSpPr>
+          <p:cNvPr id="8" name="Text Placeholder 7">
+            <a:extLst>
+              <a:ext uri="{FF2B5EF4-FFF2-40B4-BE49-F238E27FC236}">
+                <a16:creationId xmlns:a16="http://schemas.microsoft.com/office/drawing/2014/main" id="{9E979993-EA2F-5705-26E8-9AB42E416B3F}"/>
+              </a:ext>
+            </a:extLst>
+          </p:cNvPr>
+          <p:cNvSpPr>
+            <a:spLocks noGrp="1"/>
+          </p:cNvSpPr>
+          <p:nvPr>
+            <p:ph type="body" sz="quarter" idx="13"/>
+          </p:nvPr>
+        </p:nvSpPr>
+        <p:spPr/>
+        <p:txBody>
+          <a:bodyPr/>
+          <a:lstStyle/>
+          <a:p>
+            <a:endParaRPr lang="en-US" dirty="0"/>
+          </a:p>
+        </p:txBody>
+      </p:sp>
+    </p:spTree>
+    <p:extLst>
+      <p:ext uri="{BB962C8B-B14F-4D97-AF65-F5344CB8AC3E}">
+        <p14:creationId xmlns:p14="http://schemas.microsoft.com/office/powerpoint/2010/main" val="3400008258"/>
+      </p:ext>
+    </p:extLst>
+  </p:cSld>
+  <p:clrMapOvr>
+    <a:masterClrMapping/>
+  </p:clrMapOvr>
+</p:sld>
+</file>
+
+<file path=ppt/slides/slide14.xml><?xml version="1.0" encoding="utf-8"?>
+<p:sld xmlns:a="http://schemas.openxmlformats.org/drawingml/2006/main" xmlns:r="http://schemas.openxmlformats.org/officeDocument/2006/relationships" xmlns:p="http://schemas.openxmlformats.org/presentationml/2006/main">
+  <p:cSld>
+    <p:spTree>
+      <p:nvGrpSpPr>
+        <p:cNvPr id="1" name="">
+          <a:extLst>
+            <a:ext uri="{FF2B5EF4-FFF2-40B4-BE49-F238E27FC236}">
+              <a16:creationId xmlns:a16="http://schemas.microsoft.com/office/drawing/2014/main" id="{546938E0-A9E2-56D2-458B-013C519B792A}"/>
+            </a:ext>
+          </a:extLst>
+        </p:cNvPr>
+        <p:cNvGrpSpPr/>
+        <p:nvPr/>
+      </p:nvGrpSpPr>
+      <p:grpSpPr>
+        <a:xfrm>
+          <a:off x="0" y="0"/>
+          <a:ext cx="0" cy="0"/>
+          <a:chOff x="0" y="0"/>
+          <a:chExt cx="0" cy="0"/>
+        </a:xfrm>
+      </p:grpSpPr>
+      <p:sp>
+        <p:nvSpPr>
+          <p:cNvPr id="2" name="Footer Placeholder 1">
+            <a:extLst>
+              <a:ext uri="{FF2B5EF4-FFF2-40B4-BE49-F238E27FC236}">
+                <a16:creationId xmlns:a16="http://schemas.microsoft.com/office/drawing/2014/main" id="{5FA26D17-9A64-9303-623C-6137B5D0F646}"/>
+              </a:ext>
+            </a:extLst>
+          </p:cNvPr>
+          <p:cNvSpPr>
+            <a:spLocks noGrp="1"/>
+          </p:cNvSpPr>
+          <p:nvPr>
+            <p:ph type="ftr" sz="quarter" idx="26"/>
+          </p:nvPr>
+        </p:nvSpPr>
+        <p:spPr/>
+        <p:txBody>
+          <a:bodyPr/>
+          <a:lstStyle/>
+          <a:p>
+            <a:r>
+              <a:rPr lang="de-DE"/>
+              <a:t>KI Projekt | Sina Brunner, Lars Nettersheim, John Schwarz, Leon Ulbrich, Felix Wensky </a:t>
+            </a:r>
+            <a:endParaRPr lang="de-DE" dirty="0"/>
+          </a:p>
+        </p:txBody>
+      </p:sp>
+      <p:sp>
+        <p:nvSpPr>
+          <p:cNvPr id="3" name="Slide Number Placeholder 2">
+            <a:extLst>
+              <a:ext uri="{FF2B5EF4-FFF2-40B4-BE49-F238E27FC236}">
+                <a16:creationId xmlns:a16="http://schemas.microsoft.com/office/drawing/2014/main" id="{2AFC2D73-79D8-ADD1-5B67-EFFD89C5676E}"/>
+              </a:ext>
+            </a:extLst>
+          </p:cNvPr>
+          <p:cNvSpPr>
+            <a:spLocks noGrp="1"/>
+          </p:cNvSpPr>
+          <p:nvPr>
+            <p:ph type="sldNum" sz="quarter" idx="4"/>
+          </p:nvPr>
+        </p:nvSpPr>
+        <p:spPr/>
+        <p:txBody>
+          <a:bodyPr/>
+          <a:lstStyle/>
+          <a:p>
+            <a:fld id="{E7298502-BA22-4927-B2ED-0A18FFA86FFE}" type="slidenum">
+              <a:rPr lang="de-DE" smtClean="0"/>
+              <a:pPr/>
+              <a:t>14</a:t>
+            </a:fld>
+            <a:endParaRPr lang="de-DE" dirty="0"/>
+          </a:p>
+        </p:txBody>
+      </p:sp>
+      <p:sp>
+        <p:nvSpPr>
+          <p:cNvPr id="5" name="Text Placeholder 4">
+            <a:extLst>
+              <a:ext uri="{FF2B5EF4-FFF2-40B4-BE49-F238E27FC236}">
+                <a16:creationId xmlns:a16="http://schemas.microsoft.com/office/drawing/2014/main" id="{FE311772-D97B-AA56-5F0F-4A9A40DE4D6E}"/>
+              </a:ext>
+            </a:extLst>
+          </p:cNvPr>
+          <p:cNvSpPr>
+            <a:spLocks noGrp="1"/>
+          </p:cNvSpPr>
+          <p:nvPr>
+            <p:ph type="body" sz="quarter" idx="25"/>
+          </p:nvPr>
+        </p:nvSpPr>
+        <p:spPr/>
+        <p:txBody>
+          <a:bodyPr/>
+          <a:lstStyle/>
+          <a:p>
+            <a:r>
+              <a:rPr lang="en-US" dirty="0"/>
+              <a:t>GitHub Projects: Kanban Board - 30.04.2026</a:t>
+            </a:r>
+          </a:p>
+          <a:p>
+            <a:endParaRPr lang="en-US" dirty="0"/>
+          </a:p>
+        </p:txBody>
+      </p:sp>
+      <p:sp>
+        <p:nvSpPr>
+          <p:cNvPr id="8" name="Text Placeholder 7">
+            <a:extLst>
+              <a:ext uri="{FF2B5EF4-FFF2-40B4-BE49-F238E27FC236}">
+                <a16:creationId xmlns:a16="http://schemas.microsoft.com/office/drawing/2014/main" id="{7F40A8F5-DEB3-4DF0-CE5A-C907135D0AE7}"/>
+              </a:ext>
+            </a:extLst>
+          </p:cNvPr>
+          <p:cNvSpPr>
+            <a:spLocks noGrp="1"/>
+          </p:cNvSpPr>
+          <p:nvPr>
+            <p:ph type="body" sz="quarter" idx="13"/>
+          </p:nvPr>
+        </p:nvSpPr>
+        <p:spPr/>
+        <p:txBody>
+          <a:bodyPr/>
+          <a:lstStyle/>
+          <a:p>
+            <a:r>
+              <a:rPr lang="en-US" dirty="0"/>
+              <a:t>Screenshot:</a:t>
+            </a:r>
+          </a:p>
+        </p:txBody>
+      </p:sp>
+      <p:pic>
+        <p:nvPicPr>
+          <p:cNvPr id="4" name="Picture 3">
+            <a:extLst>
+              <a:ext uri="{FF2B5EF4-FFF2-40B4-BE49-F238E27FC236}">
+                <a16:creationId xmlns:a16="http://schemas.microsoft.com/office/drawing/2014/main" id="{BAF876BA-F8B1-12F7-ABE7-BBEA69C06273}"/>
+              </a:ext>
+            </a:extLst>
+          </p:cNvPr>
+          <p:cNvPicPr>
+            <a:picLocks noChangeAspect="1"/>
+          </p:cNvPicPr>
+          <p:nvPr/>
+        </p:nvPicPr>
+        <p:blipFill>
+          <a:blip r:embed="rId2"/>
+          <a:stretch>
+            <a:fillRect/>
+          </a:stretch>
+        </p:blipFill>
+        <p:spPr>
+          <a:xfrm>
+            <a:off x="1243088" y="1297780"/>
+            <a:ext cx="9705823" cy="5029070"/>
+          </a:xfrm>
+          <a:prstGeom prst="rect">
+            <a:avLst/>
+          </a:prstGeom>
+        </p:spPr>
+      </p:pic>
+    </p:spTree>
+    <p:extLst>
+      <p:ext uri="{BB962C8B-B14F-4D97-AF65-F5344CB8AC3E}">
+        <p14:creationId xmlns:p14="http://schemas.microsoft.com/office/powerpoint/2010/main" val="2456902855"/>
+      </p:ext>
+    </p:extLst>
+  </p:cSld>
+  <p:clrMapOvr>
+    <a:masterClrMapping/>
+  </p:clrMapOvr>
+</p:sld>
+</file>
+
+<file path=ppt/slides/slide15.xml><?xml version="1.0" encoding="utf-8"?>
+<p:sld xmlns:a="http://schemas.openxmlformats.org/drawingml/2006/main" xmlns:r="http://schemas.openxmlformats.org/officeDocument/2006/relationships" xmlns:p="http://schemas.openxmlformats.org/presentationml/2006/main">
+  <p:cSld>
+    <p:spTree>
+      <p:nvGrpSpPr>
+        <p:cNvPr id="1" name=""/>
+        <p:cNvGrpSpPr/>
+        <p:nvPr/>
+      </p:nvGrpSpPr>
+      <p:grpSpPr>
+        <a:xfrm>
+          <a:off x="0" y="0"/>
+          <a:ext cx="0" cy="0"/>
+          <a:chOff x="0" y="0"/>
+          <a:chExt cx="0" cy="0"/>
+        </a:xfrm>
+      </p:grpSpPr>
+      <p:sp>
+        <p:nvSpPr>
+          <p:cNvPr id="2" name="Footer Placeholder 1">
+            <a:extLst>
+              <a:ext uri="{FF2B5EF4-FFF2-40B4-BE49-F238E27FC236}">
+                <a16:creationId xmlns:a16="http://schemas.microsoft.com/office/drawing/2014/main" id="{489E7FB6-3F8E-989A-CFB3-8D9EF5EA8C37}"/>
+              </a:ext>
+            </a:extLst>
+          </p:cNvPr>
+          <p:cNvSpPr>
+            <a:spLocks noGrp="1"/>
+          </p:cNvSpPr>
+          <p:nvPr>
+            <p:ph type="ftr" sz="quarter" idx="26"/>
+          </p:nvPr>
+        </p:nvSpPr>
+        <p:spPr/>
+        <p:txBody>
+          <a:bodyPr/>
+          <a:lstStyle/>
+          <a:p>
+            <a:r>
+              <a:rPr lang="de-DE"/>
+              <a:t>KI Projekt | Sina Brunner, Lars Nettersheim, John Schwarz, Leon Ulbrich, Felix Wensky </a:t>
+            </a:r>
+            <a:endParaRPr lang="de-DE" dirty="0"/>
+          </a:p>
+        </p:txBody>
+      </p:sp>
+      <p:sp>
+        <p:nvSpPr>
+          <p:cNvPr id="3" name="Slide Number Placeholder 2">
+            <a:extLst>
+              <a:ext uri="{FF2B5EF4-FFF2-40B4-BE49-F238E27FC236}">
+                <a16:creationId xmlns:a16="http://schemas.microsoft.com/office/drawing/2014/main" id="{FE71A9AA-BAFB-7CA5-4B6C-70E813D16BCC}"/>
+              </a:ext>
+            </a:extLst>
+          </p:cNvPr>
+          <p:cNvSpPr>
+            <a:spLocks noGrp="1"/>
+          </p:cNvSpPr>
+          <p:nvPr>
+            <p:ph type="sldNum" sz="quarter" idx="4"/>
+          </p:nvPr>
+        </p:nvSpPr>
+        <p:spPr/>
+        <p:txBody>
+          <a:bodyPr/>
+          <a:lstStyle/>
+          <a:p>
+            <a:fld id="{E7298502-BA22-4927-B2ED-0A18FFA86FFE}" type="slidenum">
+              <a:rPr lang="de-DE" smtClean="0"/>
+              <a:pPr/>
+              <a:t>15</a:t>
+            </a:fld>
+            <a:endParaRPr lang="de-DE" dirty="0"/>
+          </a:p>
+        </p:txBody>
+      </p:sp>
+      <p:sp>
+        <p:nvSpPr>
+          <p:cNvPr id="4" name="Text Placeholder 3">
+            <a:extLst>
+              <a:ext uri="{FF2B5EF4-FFF2-40B4-BE49-F238E27FC236}">
+                <a16:creationId xmlns:a16="http://schemas.microsoft.com/office/drawing/2014/main" id="{C275C557-E752-EA8D-CBA3-51A9E4C571A1}"/>
+              </a:ext>
+            </a:extLst>
+          </p:cNvPr>
+          <p:cNvSpPr>
+            <a:spLocks noGrp="1"/>
+          </p:cNvSpPr>
+          <p:nvPr>
+            <p:ph type="body" sz="quarter" idx="13"/>
+          </p:nvPr>
+        </p:nvSpPr>
+        <p:spPr/>
+        <p:txBody>
+          <a:bodyPr/>
+          <a:lstStyle/>
+          <a:p>
+            <a:r>
+              <a:rPr lang="en-US" dirty="0"/>
+              <a:t>Screenshot</a:t>
+            </a:r>
+          </a:p>
+        </p:txBody>
+      </p:sp>
+      <p:sp>
+        <p:nvSpPr>
+          <p:cNvPr id="5" name="Text Placeholder 4">
+            <a:extLst>
+              <a:ext uri="{FF2B5EF4-FFF2-40B4-BE49-F238E27FC236}">
+                <a16:creationId xmlns:a16="http://schemas.microsoft.com/office/drawing/2014/main" id="{8DF40A6B-A814-C038-6783-1BC5D55B1BD5}"/>
+              </a:ext>
+            </a:extLst>
+          </p:cNvPr>
+          <p:cNvSpPr>
+            <a:spLocks noGrp="1"/>
+          </p:cNvSpPr>
+          <p:nvPr>
+            <p:ph type="body" sz="quarter" idx="25"/>
+          </p:nvPr>
+        </p:nvSpPr>
+        <p:spPr/>
+        <p:txBody>
+          <a:bodyPr/>
+          <a:lstStyle/>
+          <a:p>
+            <a:r>
+              <a:rPr lang="en-US" dirty="0" err="1"/>
+              <a:t>Github</a:t>
+            </a:r>
+            <a:r>
+              <a:rPr lang="en-US" dirty="0"/>
+              <a:t> Issues: Milestones (Sprints) – 30.04.2026</a:t>
+            </a:r>
+          </a:p>
+        </p:txBody>
+      </p:sp>
+      <p:pic>
+        <p:nvPicPr>
+          <p:cNvPr id="8" name="Picture 7">
+            <a:extLst>
+              <a:ext uri="{FF2B5EF4-FFF2-40B4-BE49-F238E27FC236}">
+                <a16:creationId xmlns:a16="http://schemas.microsoft.com/office/drawing/2014/main" id="{921D3E3C-1A12-FBE4-8170-035CB44A3718}"/>
+              </a:ext>
+            </a:extLst>
+          </p:cNvPr>
+          <p:cNvPicPr>
+            <a:picLocks noChangeAspect="1"/>
+          </p:cNvPicPr>
+          <p:nvPr/>
+        </p:nvPicPr>
+        <p:blipFill>
+          <a:blip r:embed="rId2">
+            <a:extLst>
+              <a:ext uri="{28A0092B-C50C-407E-A947-70E740481C1C}">
+                <a14:useLocalDpi xmlns:a14="http://schemas.microsoft.com/office/drawing/2010/main" val="0"/>
+              </a:ext>
+            </a:extLst>
+          </a:blip>
+          <a:stretch>
+            <a:fillRect/>
+          </a:stretch>
+        </p:blipFill>
+        <p:spPr>
+          <a:xfrm>
+            <a:off x="1071153" y="1906392"/>
+            <a:ext cx="9134397" cy="2369516"/>
+          </a:xfrm>
+          <a:prstGeom prst="rect">
+            <a:avLst/>
+          </a:prstGeom>
+        </p:spPr>
+      </p:pic>
+    </p:spTree>
+    <p:extLst>
+      <p:ext uri="{BB962C8B-B14F-4D97-AF65-F5344CB8AC3E}">
+        <p14:creationId xmlns:p14="http://schemas.microsoft.com/office/powerpoint/2010/main" val="791970167"/>
+      </p:ext>
+    </p:extLst>
+  </p:cSld>
+  <p:clrMapOvr>
+    <a:masterClrMapping/>
+  </p:clrMapOvr>
+</p:sld>
+</file>
+
+<file path=ppt/slides/slide16.xml><?xml version="1.0" encoding="utf-8"?>
+<p:sld xmlns:a="http://schemas.openxmlformats.org/drawingml/2006/main" xmlns:r="http://schemas.openxmlformats.org/officeDocument/2006/relationships" xmlns:p="http://schemas.openxmlformats.org/presentationml/2006/main">
+  <p:cSld>
+    <p:spTree>
+      <p:nvGrpSpPr>
+        <p:cNvPr id="1" name=""/>
+        <p:cNvGrpSpPr/>
+        <p:nvPr/>
+      </p:nvGrpSpPr>
+      <p:grpSpPr>
+        <a:xfrm>
+          <a:off x="0" y="0"/>
+          <a:ext cx="0" cy="0"/>
+          <a:chOff x="0" y="0"/>
+          <a:chExt cx="0" cy="0"/>
+        </a:xfrm>
+      </p:grpSpPr>
+      <p:sp>
+        <p:nvSpPr>
+          <p:cNvPr id="2" name="Textplatzhalter 1">
+            <a:extLst>
+              <a:ext uri="{FF2B5EF4-FFF2-40B4-BE49-F238E27FC236}">
+                <a16:creationId xmlns:a16="http://schemas.microsoft.com/office/drawing/2014/main" id="{26DF4B18-6E4A-B8AF-4C30-F8C9C4D5E972}"/>
+              </a:ext>
+            </a:extLst>
+          </p:cNvPr>
+          <p:cNvSpPr>
+            <a:spLocks noGrp="1"/>
+          </p:cNvSpPr>
+          <p:nvPr>
+            <p:ph type="body" sz="quarter" idx="14"/>
+          </p:nvPr>
+        </p:nvSpPr>
+        <p:spPr/>
+        <p:txBody>
+          <a:bodyPr/>
+          <a:lstStyle/>
+          <a:p>
+            <a:r>
+              <a:rPr lang="de-DE" dirty="0"/>
+              <a:t>Stabsstelle Kommunikation</a:t>
+            </a:r>
+          </a:p>
+          <a:p>
+            <a:endParaRPr lang="de-DE" dirty="0"/>
+          </a:p>
+        </p:txBody>
+      </p:sp>
+      <p:sp>
+        <p:nvSpPr>
+          <p:cNvPr id="3" name="Fußzeilenplatzhalter 2">
+            <a:extLst>
+              <a:ext uri="{FF2B5EF4-FFF2-40B4-BE49-F238E27FC236}">
+                <a16:creationId xmlns:a16="http://schemas.microsoft.com/office/drawing/2014/main" id="{951755B3-D6D0-0BDE-01FC-40B3DB5F0E9E}"/>
+              </a:ext>
+            </a:extLst>
+          </p:cNvPr>
+          <p:cNvSpPr>
+            <a:spLocks noGrp="1"/>
+          </p:cNvSpPr>
+          <p:nvPr>
+            <p:ph type="ftr" sz="quarter" idx="26"/>
+          </p:nvPr>
+        </p:nvSpPr>
+        <p:spPr/>
+        <p:txBody>
+          <a:bodyPr/>
+          <a:lstStyle/>
+          <a:p>
+            <a:r>
+              <a:rPr lang="de-DE"/>
+              <a:t>KI Projekt | Sina Brunner, Lars Nettersheim, John Schwarz, Leon Ulbrich, Felix Wensky </a:t>
+            </a:r>
+            <a:endParaRPr lang="de-DE" dirty="0"/>
+          </a:p>
+        </p:txBody>
+      </p:sp>
+      <p:sp>
+        <p:nvSpPr>
+          <p:cNvPr id="4" name="Foliennummernplatzhalter 3">
+            <a:extLst>
+              <a:ext uri="{FF2B5EF4-FFF2-40B4-BE49-F238E27FC236}">
+                <a16:creationId xmlns:a16="http://schemas.microsoft.com/office/drawing/2014/main" id="{C6C5996F-6B19-3176-B1A5-177D23732D8E}"/>
+              </a:ext>
+            </a:extLst>
+          </p:cNvPr>
+          <p:cNvSpPr>
+            <a:spLocks noGrp="1"/>
+          </p:cNvSpPr>
+          <p:nvPr>
+            <p:ph type="sldNum" sz="quarter" idx="4"/>
+          </p:nvPr>
+        </p:nvSpPr>
+        <p:spPr/>
+        <p:txBody>
+          <a:bodyPr/>
+          <a:lstStyle/>
+          <a:p>
+            <a:fld id="{E7298502-BA22-4927-B2ED-0A18FFA86FFE}" type="slidenum">
+              <a:rPr lang="de-DE" smtClean="0"/>
+              <a:pPr/>
+              <a:t>16</a:t>
+            </a:fld>
+            <a:endParaRPr lang="de-DE" dirty="0"/>
+          </a:p>
+        </p:txBody>
+      </p:sp>
+      <p:sp>
+        <p:nvSpPr>
+          <p:cNvPr id="5" name="Textplatzhalter 4">
+            <a:extLst>
+              <a:ext uri="{FF2B5EF4-FFF2-40B4-BE49-F238E27FC236}">
+                <a16:creationId xmlns:a16="http://schemas.microsoft.com/office/drawing/2014/main" id="{A07147D1-2036-95F4-774C-93DDF337863C}"/>
+              </a:ext>
+            </a:extLst>
+          </p:cNvPr>
+          <p:cNvSpPr>
+            <a:spLocks noGrp="1"/>
+          </p:cNvSpPr>
+          <p:nvPr>
+            <p:ph type="body" sz="quarter" idx="13"/>
+          </p:nvPr>
+        </p:nvSpPr>
+        <p:spPr/>
+        <p:txBody>
+          <a:bodyPr/>
+          <a:lstStyle/>
+          <a:p>
+            <a:endParaRPr lang="de-DE"/>
+          </a:p>
+        </p:txBody>
+      </p:sp>
+      <p:sp>
+        <p:nvSpPr>
+          <p:cNvPr id="6" name="Textplatzhalter 5">
+            <a:extLst>
+              <a:ext uri="{FF2B5EF4-FFF2-40B4-BE49-F238E27FC236}">
+                <a16:creationId xmlns:a16="http://schemas.microsoft.com/office/drawing/2014/main" id="{E8FB1FE0-8CCF-260D-D940-384FF80C15B6}"/>
+              </a:ext>
+            </a:extLst>
+          </p:cNvPr>
+          <p:cNvSpPr>
+            <a:spLocks noGrp="1"/>
+          </p:cNvSpPr>
+          <p:nvPr>
+            <p:ph type="body" sz="quarter" idx="25"/>
+          </p:nvPr>
+        </p:nvSpPr>
+        <p:spPr/>
+        <p:txBody>
+          <a:bodyPr/>
+          <a:lstStyle/>
+          <a:p>
+            <a:r>
+              <a:rPr lang="de-DE" dirty="0"/>
+              <a:t>Bitte wenden Sie sich bei Fragen an uns</a:t>
+            </a:r>
+          </a:p>
+          <a:p>
+            <a:endParaRPr lang="de-DE" dirty="0"/>
+          </a:p>
+        </p:txBody>
+      </p:sp>
+      <p:sp>
+        <p:nvSpPr>
+          <p:cNvPr id="7" name="Textplatzhalter 6">
+            <a:extLst>
+              <a:ext uri="{FF2B5EF4-FFF2-40B4-BE49-F238E27FC236}">
+                <a16:creationId xmlns:a16="http://schemas.microsoft.com/office/drawing/2014/main" id="{ED506ADA-D51D-0F47-C6FF-2523D3DFC682}"/>
+              </a:ext>
+            </a:extLst>
+          </p:cNvPr>
+          <p:cNvSpPr>
+            <a:spLocks noGrp="1"/>
+          </p:cNvSpPr>
+          <p:nvPr>
+            <p:ph type="body" sz="quarter" idx="27"/>
+          </p:nvPr>
+        </p:nvSpPr>
+        <p:spPr/>
+        <p:txBody>
+          <a:bodyPr/>
+          <a:lstStyle/>
+          <a:p>
+            <a:r>
+              <a:rPr lang="de-DE" dirty="0"/>
+              <a:t>-</a:t>
+            </a:r>
+          </a:p>
+        </p:txBody>
+      </p:sp>
+      <p:sp>
+        <p:nvSpPr>
+          <p:cNvPr id="8" name="Textplatzhalter 7">
+            <a:extLst>
+              <a:ext uri="{FF2B5EF4-FFF2-40B4-BE49-F238E27FC236}">
+                <a16:creationId xmlns:a16="http://schemas.microsoft.com/office/drawing/2014/main" id="{60FF552A-A38F-6D61-A136-653E08D20C73}"/>
+              </a:ext>
+            </a:extLst>
+          </p:cNvPr>
+          <p:cNvSpPr>
+            <a:spLocks noGrp="1"/>
+          </p:cNvSpPr>
+          <p:nvPr>
+            <p:ph type="body" sz="quarter" idx="28"/>
+          </p:nvPr>
+        </p:nvSpPr>
+        <p:spPr/>
+        <p:txBody>
+          <a:bodyPr/>
+          <a:lstStyle/>
+          <a:p>
+            <a:r>
+              <a:rPr lang="de-DE" dirty="0" err="1"/>
+              <a:t>Seybothstraße</a:t>
+            </a:r>
+            <a:r>
+              <a:rPr lang="de-DE" dirty="0"/>
+              <a:t> 2</a:t>
+            </a:r>
+          </a:p>
+          <a:p>
+            <a:r>
+              <a:rPr lang="de-DE" dirty="0"/>
+              <a:t>93053 Regensburg</a:t>
+            </a:r>
+          </a:p>
+          <a:p>
+            <a:endParaRPr lang="de-DE" dirty="0"/>
+          </a:p>
+        </p:txBody>
+      </p:sp>
+      <p:sp>
+        <p:nvSpPr>
+          <p:cNvPr id="9" name="Textplatzhalter 8">
+            <a:extLst>
+              <a:ext uri="{FF2B5EF4-FFF2-40B4-BE49-F238E27FC236}">
+                <a16:creationId xmlns:a16="http://schemas.microsoft.com/office/drawing/2014/main" id="{B938A625-4C84-E31C-2D1C-B2221751D30F}"/>
+              </a:ext>
+            </a:extLst>
+          </p:cNvPr>
+          <p:cNvSpPr>
+            <a:spLocks noGrp="1"/>
+          </p:cNvSpPr>
+          <p:nvPr>
+            <p:ph type="body" sz="quarter" idx="29"/>
+          </p:nvPr>
+        </p:nvSpPr>
+        <p:spPr>
+          <a:xfrm>
+            <a:off x="2248392" y="4513899"/>
+            <a:ext cx="3600000" cy="408495"/>
+          </a:xfrm>
+        </p:spPr>
+        <p:txBody>
+          <a:bodyPr/>
+          <a:lstStyle/>
+          <a:p>
+            <a:r>
+              <a:rPr lang="de-DE" dirty="0"/>
+              <a:t>kommunikation@oth-regensburg.de</a:t>
+            </a:r>
+          </a:p>
+          <a:p>
+            <a:endParaRPr lang="de-DE" dirty="0"/>
+          </a:p>
+        </p:txBody>
+      </p:sp>
+    </p:spTree>
+    <p:extLst>
+      <p:ext uri="{BB962C8B-B14F-4D97-AF65-F5344CB8AC3E}">
+        <p14:creationId xmlns:p14="http://schemas.microsoft.com/office/powerpoint/2010/main" val="44672609"/>
+      </p:ext>
+    </p:extLst>
+  </p:cSld>
+  <p:clrMapOvr>
+    <a:masterClrMapping/>
+  </p:clrMapOvr>
+</p:sld>
+</file>
+
+<file path=ppt/slides/slide2.xml><?xml version="1.0" encoding="utf-8"?>
+<p:sld xmlns:a="http://schemas.openxmlformats.org/drawingml/2006/main" xmlns:r="http://schemas.openxmlformats.org/officeDocument/2006/relationships" xmlns:p="http://schemas.openxmlformats.org/presentationml/2006/main">
+  <p:cSld>
+    <p:spTree>
+      <p:nvGrpSpPr>
+        <p:cNvPr id="1" name=""/>
+        <p:cNvGrpSpPr/>
+        <p:nvPr/>
+      </p:nvGrpSpPr>
+      <p:grpSpPr>
+        <a:xfrm>
+          <a:off x="0" y="0"/>
+          <a:ext cx="0" cy="0"/>
+          <a:chOff x="0" y="0"/>
+          <a:chExt cx="0" cy="0"/>
+        </a:xfrm>
+      </p:grpSpPr>
+      <p:sp>
+        <p:nvSpPr>
+          <p:cNvPr id="2" name="Fußzeilenplatzhalter 1">
+            <a:extLst>
+              <a:ext uri="{FF2B5EF4-FFF2-40B4-BE49-F238E27FC236}">
+                <a16:creationId xmlns:a16="http://schemas.microsoft.com/office/drawing/2014/main" id="{E243F3DD-3A82-4C37-7893-A1CD1D5E8CDB}"/>
+              </a:ext>
+            </a:extLst>
+          </p:cNvPr>
+          <p:cNvSpPr>
+            <a:spLocks noGrp="1"/>
+          </p:cNvSpPr>
+          <p:nvPr>
+            <p:ph type="ftr" sz="quarter" idx="26"/>
+          </p:nvPr>
+        </p:nvSpPr>
+        <p:spPr/>
+        <p:txBody>
+          <a:bodyPr/>
+          <a:lstStyle/>
+          <a:p>
+            <a:r>
+              <a:rPr lang="de-DE"/>
+              <a:t>KI Projekt | Sina Brunner, Lars Nettersheim, John Schwarz, Leon Ulbrich, Felix Wensky </a:t>
+            </a:r>
+            <a:endParaRPr lang="de-DE" dirty="0"/>
+          </a:p>
+        </p:txBody>
+      </p:sp>
+      <p:sp>
+        <p:nvSpPr>
+          <p:cNvPr id="3" name="Foliennummernplatzhalter 2">
+            <a:extLst>
+              <a:ext uri="{FF2B5EF4-FFF2-40B4-BE49-F238E27FC236}">
+                <a16:creationId xmlns:a16="http://schemas.microsoft.com/office/drawing/2014/main" id="{2AB3BC2A-A1CF-319D-DB72-C39D63DF7332}"/>
+              </a:ext>
+            </a:extLst>
+          </p:cNvPr>
+          <p:cNvSpPr>
+            <a:spLocks noGrp="1"/>
+          </p:cNvSpPr>
+          <p:nvPr>
+            <p:ph type="sldNum" sz="quarter" idx="4"/>
+          </p:nvPr>
+        </p:nvSpPr>
+        <p:spPr/>
+        <p:txBody>
+          <a:bodyPr/>
+          <a:lstStyle/>
+          <a:p>
+            <a:fld id="{E7298502-BA22-4927-B2ED-0A18FFA86FFE}" type="slidenum">
+              <a:rPr lang="de-DE" smtClean="0"/>
+              <a:pPr/>
+              <a:t>2</a:t>
+            </a:fld>
+            <a:endParaRPr lang="de-DE" dirty="0"/>
+          </a:p>
+        </p:txBody>
+      </p:sp>
+      <p:cxnSp>
+        <p:nvCxnSpPr>
+          <p:cNvPr id="8" name="Gerader Verbinder 7">
+            <a:extLst>
+              <a:ext uri="{FF2B5EF4-FFF2-40B4-BE49-F238E27FC236}">
+                <a16:creationId xmlns:a16="http://schemas.microsoft.com/office/drawing/2014/main" id="{6E59BA97-E8DF-58DA-61CD-A073C1BE65C0}"/>
+              </a:ext>
+            </a:extLst>
+          </p:cNvPr>
+          <p:cNvCxnSpPr>
+            <a:cxnSpLocks/>
+          </p:cNvCxnSpPr>
+          <p:nvPr/>
+        </p:nvCxnSpPr>
+        <p:spPr>
+          <a:xfrm>
+            <a:off x="713582" y="746389"/>
+            <a:ext cx="0" cy="468000"/>
+          </a:xfrm>
+          <a:prstGeom prst="line">
+            <a:avLst/>
+          </a:prstGeom>
+          <a:ln w="28575"/>
+        </p:spPr>
+        <p:style>
+          <a:lnRef idx="1">
+            <a:schemeClr val="accent1"/>
+          </a:lnRef>
+          <a:fillRef idx="0">
+            <a:schemeClr val="accent1"/>
+          </a:fillRef>
+          <a:effectRef idx="0">
+            <a:schemeClr val="accent1"/>
+          </a:effectRef>
+          <a:fontRef idx="minor">
+            <a:schemeClr val="tx1"/>
+          </a:fontRef>
+        </p:style>
+      </p:cxnSp>
+      <p:sp>
+        <p:nvSpPr>
+          <p:cNvPr id="9" name="Textplatzhalter 12">
+            <a:extLst>
+              <a:ext uri="{FF2B5EF4-FFF2-40B4-BE49-F238E27FC236}">
+                <a16:creationId xmlns:a16="http://schemas.microsoft.com/office/drawing/2014/main" id="{FF9A9E24-B62E-A31E-AE20-E571D5E7B9F3}"/>
+              </a:ext>
+            </a:extLst>
+          </p:cNvPr>
+          <p:cNvSpPr>
+            <a:spLocks noGrp="1"/>
+          </p:cNvSpPr>
+          <p:nvPr>
+            <p:ph type="body" sz="quarter" idx="13" hasCustomPrompt="1"/>
+          </p:nvPr>
+        </p:nvSpPr>
+        <p:spPr>
+          <a:xfrm>
+            <a:off x="695325" y="199474"/>
+            <a:ext cx="10119053" cy="468000"/>
+          </a:xfrm>
+          <a:prstGeom prst="rect">
+            <a:avLst/>
+          </a:prstGeom>
+        </p:spPr>
+        <p:txBody>
+          <a:bodyPr anchor="t">
+            <a:noAutofit/>
+          </a:bodyPr>
+          <a:lstStyle>
+            <a:lvl1pPr marL="0" indent="0">
+              <a:buNone/>
+              <a:defRPr sz="3000" b="1" cap="none" baseline="0"/>
+            </a:lvl1pPr>
+            <a:lvl2pPr>
+              <a:defRPr sz="2900" b="1" cap="all" baseline="0"/>
+            </a:lvl2pPr>
+            <a:lvl3pPr>
+              <a:defRPr sz="2900" b="1" cap="all" baseline="0"/>
+            </a:lvl3pPr>
+            <a:lvl4pPr>
+              <a:defRPr sz="2900" b="1" cap="all" baseline="0"/>
+            </a:lvl4pPr>
+            <a:lvl5pPr>
+              <a:defRPr sz="2900" b="1" cap="all" baseline="0"/>
+            </a:lvl5pPr>
+          </a:lstStyle>
+          <a:p>
+            <a:r>
+              <a:rPr lang="de-DE" dirty="0"/>
+              <a:t>Projektübersicht</a:t>
+            </a:r>
+          </a:p>
+        </p:txBody>
+      </p:sp>
+      <p:sp>
+        <p:nvSpPr>
+          <p:cNvPr id="10" name="Textplatzhalter 20">
+            <a:extLst>
+              <a:ext uri="{FF2B5EF4-FFF2-40B4-BE49-F238E27FC236}">
+                <a16:creationId xmlns:a16="http://schemas.microsoft.com/office/drawing/2014/main" id="{6083A0B9-04A1-69B8-FC6E-9630A3C82F4B}"/>
+              </a:ext>
+            </a:extLst>
+          </p:cNvPr>
+          <p:cNvSpPr>
+            <a:spLocks noGrp="1"/>
+          </p:cNvSpPr>
+          <p:nvPr>
+            <p:ph type="body" sz="quarter" idx="25" hasCustomPrompt="1"/>
+          </p:nvPr>
+        </p:nvSpPr>
+        <p:spPr>
+          <a:xfrm>
+            <a:off x="710624" y="813558"/>
+            <a:ext cx="10119052" cy="338138"/>
+          </a:xfrm>
+          <a:prstGeom prst="rect">
+            <a:avLst/>
+          </a:prstGeom>
+        </p:spPr>
+        <p:txBody>
+          <a:bodyPr/>
+          <a:lstStyle>
+            <a:lvl1pPr marL="0" indent="0">
+              <a:buNone/>
+              <a:defRPr sz="2000" b="1"/>
+            </a:lvl1pPr>
+          </a:lstStyle>
+          <a:p>
+            <a:pPr lvl="0"/>
+            <a:r>
+              <a:rPr lang="de-DE" dirty="0"/>
+              <a:t>Projektbeschreibung</a:t>
+            </a:r>
+          </a:p>
+        </p:txBody>
+      </p:sp>
+      <p:sp>
+        <p:nvSpPr>
+          <p:cNvPr id="5" name="Text Placeholder 4">
+            <a:extLst>
+              <a:ext uri="{FF2B5EF4-FFF2-40B4-BE49-F238E27FC236}">
+                <a16:creationId xmlns:a16="http://schemas.microsoft.com/office/drawing/2014/main" id="{E19C23F6-85CE-F675-96F2-6D936270737F}"/>
+              </a:ext>
+            </a:extLst>
+          </p:cNvPr>
+          <p:cNvSpPr>
+            <a:spLocks noGrp="1"/>
+          </p:cNvSpPr>
+          <p:nvPr>
+            <p:ph type="body" sz="quarter" idx="16"/>
+          </p:nvPr>
+        </p:nvSpPr>
+        <p:spPr>
+          <a:xfrm>
+            <a:off x="710624" y="1485165"/>
+            <a:ext cx="11303356" cy="4163514"/>
+          </a:xfrm>
+        </p:spPr>
+        <p:txBody>
+          <a:bodyPr/>
+          <a:lstStyle/>
+          <a:p>
+            <a:pPr marL="0" indent="0">
+              <a:buNone/>
+            </a:pPr>
+            <a:r>
+              <a:rPr lang="en-US" dirty="0" err="1"/>
+              <a:t>Agentische</a:t>
+            </a:r>
+            <a:r>
+              <a:rPr lang="en-US" dirty="0"/>
+              <a:t> Regressions Pipeline</a:t>
+            </a:r>
+          </a:p>
+          <a:p>
+            <a:pPr marL="0" indent="0">
+              <a:buNone/>
+            </a:pPr>
+            <a:r>
+              <a:rPr lang="en-US" dirty="0"/>
+              <a:t>Idee: Kunde </a:t>
+            </a:r>
+            <a:r>
+              <a:rPr lang="en-US" dirty="0" err="1"/>
+              <a:t>kommt</a:t>
+            </a:r>
+            <a:r>
+              <a:rPr lang="en-US" dirty="0"/>
+              <a:t> </a:t>
+            </a:r>
+            <a:r>
+              <a:rPr lang="en-US" dirty="0" err="1"/>
+              <a:t>mit</a:t>
+            </a:r>
+            <a:r>
+              <a:rPr lang="en-US" dirty="0"/>
+              <a:t> </a:t>
+            </a:r>
+            <a:r>
+              <a:rPr lang="en-US" dirty="0" err="1"/>
+              <a:t>Produktionsdaten</a:t>
+            </a:r>
+            <a:r>
+              <a:rPr lang="en-US" dirty="0"/>
+              <a:t> (.csv) und </a:t>
+            </a:r>
+            <a:r>
+              <a:rPr lang="en-US" dirty="0" err="1"/>
+              <a:t>wünscht</a:t>
+            </a:r>
+            <a:r>
+              <a:rPr lang="en-US" dirty="0"/>
+              <a:t> </a:t>
+            </a:r>
+            <a:r>
+              <a:rPr lang="en-US" dirty="0" err="1"/>
+              <a:t>Optimierung</a:t>
+            </a:r>
+            <a:r>
+              <a:rPr lang="en-US" dirty="0"/>
+              <a:t> des Systems </a:t>
+            </a:r>
+            <a:r>
+              <a:rPr lang="en-US" dirty="0" err="1"/>
+              <a:t>ohne</a:t>
+            </a:r>
+            <a:r>
+              <a:rPr lang="en-US" dirty="0"/>
+              <a:t> </a:t>
+            </a:r>
+            <a:r>
+              <a:rPr lang="en-US" dirty="0" err="1"/>
+              <a:t>genauere</a:t>
+            </a:r>
+            <a:r>
+              <a:rPr lang="en-US" dirty="0"/>
+              <a:t> </a:t>
+            </a:r>
+            <a:r>
+              <a:rPr lang="en-US" dirty="0" err="1"/>
+              <a:t>Vorstellung</a:t>
+            </a:r>
+            <a:endParaRPr lang="en-US" dirty="0"/>
+          </a:p>
+          <a:p>
+            <a:pPr marL="0" indent="0">
+              <a:buNone/>
+            </a:pPr>
+            <a:r>
+              <a:rPr lang="en-US" dirty="0"/>
+              <a:t>Agent </a:t>
+            </a:r>
+            <a:r>
+              <a:rPr lang="en-US" dirty="0" err="1"/>
+              <a:t>soll</a:t>
+            </a:r>
+            <a:r>
+              <a:rPr lang="en-US" dirty="0"/>
+              <a:t> csv </a:t>
+            </a:r>
+            <a:r>
+              <a:rPr lang="en-US" dirty="0" err="1"/>
+              <a:t>analysieren</a:t>
+            </a:r>
+            <a:r>
+              <a:rPr lang="en-US" dirty="0"/>
+              <a:t> um </a:t>
+            </a:r>
+            <a:r>
+              <a:rPr lang="en-US" dirty="0" err="1"/>
+              <a:t>darin</a:t>
+            </a:r>
+            <a:r>
+              <a:rPr lang="en-US" dirty="0"/>
+              <a:t> </a:t>
+            </a:r>
+            <a:r>
+              <a:rPr lang="en-US" dirty="0" err="1"/>
+              <a:t>etwaige</a:t>
+            </a:r>
+            <a:r>
+              <a:rPr lang="en-US" dirty="0"/>
+              <a:t> Use Cases für Regressions-Forecasts und </a:t>
+            </a:r>
+            <a:r>
+              <a:rPr lang="en-US" dirty="0" err="1"/>
+              <a:t>Analysen</a:t>
+            </a:r>
+            <a:r>
+              <a:rPr lang="en-US" dirty="0"/>
+              <a:t> </a:t>
+            </a:r>
+            <a:r>
+              <a:rPr lang="en-US" dirty="0" err="1"/>
+              <a:t>zu</a:t>
+            </a:r>
+            <a:r>
+              <a:rPr lang="en-US" dirty="0"/>
+              <a:t> </a:t>
+            </a:r>
+            <a:r>
+              <a:rPr lang="en-US" dirty="0" err="1"/>
+              <a:t>entdecken</a:t>
+            </a:r>
+            <a:endParaRPr lang="en-US" dirty="0"/>
+          </a:p>
+          <a:p>
+            <a:pPr>
+              <a:buFontTx/>
+              <a:buChar char="-"/>
+            </a:pPr>
+            <a:r>
+              <a:rPr lang="en-US" dirty="0" err="1"/>
+              <a:t>Entdecken</a:t>
+            </a:r>
+            <a:r>
+              <a:rPr lang="en-US" dirty="0"/>
+              <a:t> des “</a:t>
+            </a:r>
+            <a:r>
+              <a:rPr lang="en-US" dirty="0" err="1"/>
+              <a:t>profitabelsten</a:t>
+            </a:r>
+            <a:r>
+              <a:rPr lang="en-US" dirty="0"/>
+              <a:t>” Data Analysis Use Case</a:t>
+            </a:r>
+          </a:p>
+          <a:p>
+            <a:pPr>
+              <a:buFontTx/>
+              <a:buChar char="-"/>
+            </a:pPr>
+            <a:r>
+              <a:rPr lang="en-US" dirty="0" err="1"/>
+              <a:t>Entwicklung</a:t>
+            </a:r>
+            <a:r>
+              <a:rPr lang="en-US" dirty="0"/>
+              <a:t> </a:t>
+            </a:r>
+            <a:r>
+              <a:rPr lang="en-US" dirty="0" err="1"/>
+              <a:t>einer</a:t>
+            </a:r>
+            <a:r>
+              <a:rPr lang="en-US" dirty="0"/>
+              <a:t> Regression Pipeline</a:t>
+            </a:r>
+          </a:p>
+          <a:p>
+            <a:pPr>
+              <a:buFontTx/>
+              <a:buChar char="-"/>
+            </a:pPr>
+            <a:r>
+              <a:rPr lang="en-US" dirty="0" err="1"/>
+              <a:t>Ausführen</a:t>
+            </a:r>
+            <a:r>
+              <a:rPr lang="en-US" dirty="0"/>
+              <a:t> der Pipeline auf csv</a:t>
+            </a:r>
+          </a:p>
+          <a:p>
+            <a:pPr>
+              <a:buFontTx/>
+              <a:buChar char="-"/>
+            </a:pPr>
+            <a:r>
+              <a:rPr lang="en-US" dirty="0" err="1"/>
+              <a:t>Auswerten</a:t>
+            </a:r>
+            <a:r>
+              <a:rPr lang="en-US" dirty="0"/>
+              <a:t> der </a:t>
+            </a:r>
+            <a:r>
+              <a:rPr lang="en-US" dirty="0" err="1"/>
+              <a:t>Ergebnisse</a:t>
+            </a:r>
+            <a:r>
+              <a:rPr lang="en-US" dirty="0"/>
+              <a:t> der Pipeline</a:t>
+            </a:r>
+          </a:p>
+          <a:p>
+            <a:pPr marL="0" indent="0">
+              <a:buNone/>
+            </a:pPr>
+            <a:r>
+              <a:rPr lang="en-US" dirty="0">
+                <a:sym typeface="Wingdings" pitchFamily="2" charset="2"/>
+              </a:rPr>
+              <a:t> </a:t>
+            </a:r>
+            <a:r>
+              <a:rPr lang="en-US" dirty="0" err="1">
+                <a:sym typeface="Wingdings" pitchFamily="2" charset="2"/>
+              </a:rPr>
+              <a:t>Ergebnis</a:t>
+            </a:r>
+            <a:r>
+              <a:rPr lang="en-US" dirty="0">
+                <a:sym typeface="Wingdings" pitchFamily="2" charset="2"/>
+              </a:rPr>
+              <a:t>: </a:t>
+            </a:r>
+            <a:r>
+              <a:rPr lang="en-US" dirty="0" err="1">
+                <a:sym typeface="Wingdings" pitchFamily="2" charset="2"/>
+              </a:rPr>
+              <a:t>vollständiges</a:t>
+            </a:r>
+            <a:r>
+              <a:rPr lang="en-US" dirty="0">
+                <a:sym typeface="Wingdings" pitchFamily="2" charset="2"/>
+              </a:rPr>
+              <a:t> Paket </a:t>
+            </a:r>
+            <a:r>
+              <a:rPr lang="en-US" dirty="0" err="1">
+                <a:sym typeface="Wingdings" pitchFamily="2" charset="2"/>
+              </a:rPr>
+              <a:t>mit</a:t>
+            </a:r>
+            <a:r>
+              <a:rPr lang="en-US" dirty="0">
+                <a:sym typeface="Wingdings" pitchFamily="2" charset="2"/>
+              </a:rPr>
+              <a:t> </a:t>
+            </a:r>
+            <a:r>
+              <a:rPr lang="en-US" dirty="0" err="1">
+                <a:sym typeface="Wingdings" pitchFamily="2" charset="2"/>
+              </a:rPr>
+              <a:t>gefitteten</a:t>
+            </a:r>
+            <a:r>
+              <a:rPr lang="en-US" dirty="0">
+                <a:sym typeface="Wingdings" pitchFamily="2" charset="2"/>
+              </a:rPr>
+              <a:t> Model-</a:t>
+            </a:r>
+            <a:r>
+              <a:rPr lang="en-US" dirty="0" err="1">
+                <a:sym typeface="Wingdings" pitchFamily="2" charset="2"/>
+              </a:rPr>
+              <a:t>Artefakten</a:t>
+            </a:r>
+            <a:r>
+              <a:rPr lang="en-US" dirty="0">
+                <a:sym typeface="Wingdings" pitchFamily="2" charset="2"/>
+              </a:rPr>
+              <a:t>, </a:t>
+            </a:r>
+            <a:r>
+              <a:rPr lang="en-US" dirty="0" err="1">
+                <a:sym typeface="Wingdings" pitchFamily="2" charset="2"/>
+              </a:rPr>
+              <a:t>Auswertung</a:t>
+            </a:r>
+            <a:r>
+              <a:rPr lang="en-US" dirty="0">
+                <a:sym typeface="Wingdings" pitchFamily="2" charset="2"/>
+              </a:rPr>
+              <a:t> und Potential </a:t>
+            </a:r>
+            <a:r>
+              <a:rPr lang="en-US" dirty="0" err="1">
+                <a:sym typeface="Wingdings" pitchFamily="2" charset="2"/>
+              </a:rPr>
+              <a:t>Analyse</a:t>
+            </a:r>
+            <a:endParaRPr lang="en-US" dirty="0"/>
           </a:p>
         </p:txBody>
       </p:sp>
@@ -11919,7 +14619,13 @@
   <p:cSld>
     <p:spTree>
       <p:nvGrpSpPr>
-        <p:cNvPr id="1" name=""/>
+        <p:cNvPr id="1" name="">
+          <a:extLst>
+            <a:ext uri="{FF2B5EF4-FFF2-40B4-BE49-F238E27FC236}">
+              <a16:creationId xmlns:a16="http://schemas.microsoft.com/office/drawing/2014/main" id="{7D5B60FE-15B0-9C1A-00F2-30CE297DF10B}"/>
+            </a:ext>
+          </a:extLst>
+        </p:cNvPr>
         <p:cNvGrpSpPr/>
         <p:nvPr/>
       </p:nvGrpSpPr>
@@ -11933,10 +14639,10 @@
       </p:grpSpPr>
       <p:sp>
         <p:nvSpPr>
-          <p:cNvPr id="2" name="Textplatzhalter 1">
-            <a:extLst>
-              <a:ext uri="{FF2B5EF4-FFF2-40B4-BE49-F238E27FC236}">
-                <a16:creationId xmlns:a16="http://schemas.microsoft.com/office/drawing/2014/main" id="{26DF4B18-6E4A-B8AF-4C30-F8C9C4D5E972}"/>
+          <p:cNvPr id="2" name="Fußzeilenplatzhalter 1">
+            <a:extLst>
+              <a:ext uri="{FF2B5EF4-FFF2-40B4-BE49-F238E27FC236}">
+                <a16:creationId xmlns:a16="http://schemas.microsoft.com/office/drawing/2014/main" id="{91F5B14E-66C1-34A1-7E5D-42965DFB2584}"/>
               </a:ext>
             </a:extLst>
           </p:cNvPr>
@@ -11944,7 +14650,7 @@
             <a:spLocks noGrp="1"/>
           </p:cNvSpPr>
           <p:nvPr>
-            <p:ph type="body" sz="quarter" idx="14"/>
+            <p:ph type="ftr" sz="quarter" idx="26"/>
           </p:nvPr>
         </p:nvSpPr>
         <p:spPr/>
@@ -11953,37 +14659,6 @@
           <a:lstStyle/>
           <a:p>
             <a:r>
-              <a:rPr lang="de-DE" dirty="0"/>
-              <a:t>Stabsstelle Kommunikation</a:t>
-            </a:r>
-          </a:p>
-          <a:p>
-            <a:endParaRPr lang="de-DE" dirty="0"/>
-          </a:p>
-        </p:txBody>
-      </p:sp>
-      <p:sp>
-        <p:nvSpPr>
-          <p:cNvPr id="3" name="Fußzeilenplatzhalter 2">
-            <a:extLst>
-              <a:ext uri="{FF2B5EF4-FFF2-40B4-BE49-F238E27FC236}">
-                <a16:creationId xmlns:a16="http://schemas.microsoft.com/office/drawing/2014/main" id="{951755B3-D6D0-0BDE-01FC-40B3DB5F0E9E}"/>
-              </a:ext>
-            </a:extLst>
-          </p:cNvPr>
-          <p:cNvSpPr>
-            <a:spLocks noGrp="1"/>
-          </p:cNvSpPr>
-          <p:nvPr>
-            <p:ph type="ftr" sz="quarter" idx="26"/>
-          </p:nvPr>
-        </p:nvSpPr>
-        <p:spPr/>
-        <p:txBody>
-          <a:bodyPr/>
-          <a:lstStyle/>
-          <a:p>
-            <a:r>
               <a:rPr lang="de-DE"/>
               <a:t>KI Projekt | Sina Brunner, Lars Nettersheim, John Schwarz, Leon Ulbrich, Felix Wensky </a:t>
             </a:r>
@@ -11993,10 +14668,10 @@
       </p:sp>
       <p:sp>
         <p:nvSpPr>
-          <p:cNvPr id="4" name="Foliennummernplatzhalter 3">
-            <a:extLst>
-              <a:ext uri="{FF2B5EF4-FFF2-40B4-BE49-F238E27FC236}">
-                <a16:creationId xmlns:a16="http://schemas.microsoft.com/office/drawing/2014/main" id="{C6C5996F-6B19-3176-B1A5-177D23732D8E}"/>
+          <p:cNvPr id="3" name="Foliennummernplatzhalter 2">
+            <a:extLst>
+              <a:ext uri="{FF2B5EF4-FFF2-40B4-BE49-F238E27FC236}">
+                <a16:creationId xmlns:a16="http://schemas.microsoft.com/office/drawing/2014/main" id="{95E26A0D-A777-6FBE-F092-27A39C81D373}"/>
               </a:ext>
             </a:extLst>
           </p:cNvPr>
@@ -12021,12 +14696,51 @@
           </a:p>
         </p:txBody>
       </p:sp>
-      <p:sp>
-        <p:nvSpPr>
-          <p:cNvPr id="5" name="Textplatzhalter 4">
-            <a:extLst>
-              <a:ext uri="{FF2B5EF4-FFF2-40B4-BE49-F238E27FC236}">
-                <a16:creationId xmlns:a16="http://schemas.microsoft.com/office/drawing/2014/main" id="{A07147D1-2036-95F4-774C-93DDF337863C}"/>
+      <p:cxnSp>
+        <p:nvCxnSpPr>
+          <p:cNvPr id="8" name="Gerader Verbinder 7">
+            <a:extLst>
+              <a:ext uri="{FF2B5EF4-FFF2-40B4-BE49-F238E27FC236}">
+                <a16:creationId xmlns:a16="http://schemas.microsoft.com/office/drawing/2014/main" id="{0ECE19D8-8C1B-4091-399B-0D529632951D}"/>
+              </a:ext>
+            </a:extLst>
+          </p:cNvPr>
+          <p:cNvCxnSpPr>
+            <a:cxnSpLocks/>
+          </p:cNvCxnSpPr>
+          <p:nvPr/>
+        </p:nvCxnSpPr>
+        <p:spPr>
+          <a:xfrm>
+            <a:off x="713582" y="746389"/>
+            <a:ext cx="0" cy="468000"/>
+          </a:xfrm>
+          <a:prstGeom prst="line">
+            <a:avLst/>
+          </a:prstGeom>
+          <a:ln w="28575"/>
+        </p:spPr>
+        <p:style>
+          <a:lnRef idx="1">
+            <a:schemeClr val="accent1"/>
+          </a:lnRef>
+          <a:fillRef idx="0">
+            <a:schemeClr val="accent1"/>
+          </a:fillRef>
+          <a:effectRef idx="0">
+            <a:schemeClr val="accent1"/>
+          </a:effectRef>
+          <a:fontRef idx="minor">
+            <a:schemeClr val="tx1"/>
+          </a:fontRef>
+        </p:style>
+      </p:cxnSp>
+      <p:sp>
+        <p:nvSpPr>
+          <p:cNvPr id="9" name="Textplatzhalter 12">
+            <a:extLst>
+              <a:ext uri="{FF2B5EF4-FFF2-40B4-BE49-F238E27FC236}">
+                <a16:creationId xmlns:a16="http://schemas.microsoft.com/office/drawing/2014/main" id="{4038E84E-1443-DF79-73AF-563E2336ED7D}"/>
               </a:ext>
             </a:extLst>
           </p:cNvPr>
@@ -12034,7 +14748,104 @@
             <a:spLocks noGrp="1"/>
           </p:cNvSpPr>
           <p:nvPr>
-            <p:ph type="body" sz="quarter" idx="13"/>
+            <p:ph type="body" sz="quarter" idx="13" hasCustomPrompt="1"/>
+          </p:nvPr>
+        </p:nvSpPr>
+        <p:spPr>
+          <a:xfrm>
+            <a:off x="695325" y="199474"/>
+            <a:ext cx="10119053" cy="468000"/>
+          </a:xfrm>
+          <a:prstGeom prst="rect">
+            <a:avLst/>
+          </a:prstGeom>
+        </p:spPr>
+        <p:txBody>
+          <a:bodyPr anchor="t">
+            <a:noAutofit/>
+          </a:bodyPr>
+          <a:lstStyle>
+            <a:lvl1pPr marL="0" indent="0">
+              <a:buNone/>
+              <a:defRPr sz="3000" b="1" cap="none" baseline="0"/>
+            </a:lvl1pPr>
+            <a:lvl2pPr>
+              <a:defRPr sz="2900" b="1" cap="all" baseline="0"/>
+            </a:lvl2pPr>
+            <a:lvl3pPr>
+              <a:defRPr sz="2900" b="1" cap="all" baseline="0"/>
+            </a:lvl3pPr>
+            <a:lvl4pPr>
+              <a:defRPr sz="2900" b="1" cap="all" baseline="0"/>
+            </a:lvl4pPr>
+            <a:lvl5pPr>
+              <a:defRPr sz="2900" b="1" cap="all" baseline="0"/>
+            </a:lvl5pPr>
+          </a:lstStyle>
+          <a:p>
+            <a:r>
+              <a:rPr lang="de-DE" dirty="0"/>
+              <a:t>Projektübersicht</a:t>
+            </a:r>
+          </a:p>
+        </p:txBody>
+      </p:sp>
+      <p:sp>
+        <p:nvSpPr>
+          <p:cNvPr id="10" name="Textplatzhalter 20">
+            <a:extLst>
+              <a:ext uri="{FF2B5EF4-FFF2-40B4-BE49-F238E27FC236}">
+                <a16:creationId xmlns:a16="http://schemas.microsoft.com/office/drawing/2014/main" id="{FCE3C451-4AD3-FB44-A1F6-5F3D05CDD2C5}"/>
+              </a:ext>
+            </a:extLst>
+          </p:cNvPr>
+          <p:cNvSpPr>
+            <a:spLocks noGrp="1"/>
+          </p:cNvSpPr>
+          <p:nvPr>
+            <p:ph type="body" sz="quarter" idx="25" hasCustomPrompt="1"/>
+          </p:nvPr>
+        </p:nvSpPr>
+        <p:spPr>
+          <a:xfrm>
+            <a:off x="710624" y="813558"/>
+            <a:ext cx="10119052" cy="338138"/>
+          </a:xfrm>
+          <a:prstGeom prst="rect">
+            <a:avLst/>
+          </a:prstGeom>
+        </p:spPr>
+        <p:txBody>
+          <a:bodyPr/>
+          <a:lstStyle>
+            <a:lvl1pPr marL="0" indent="0">
+              <a:buNone/>
+              <a:defRPr sz="2000" b="1"/>
+            </a:lvl1pPr>
+          </a:lstStyle>
+          <a:p>
+            <a:pPr lvl="0"/>
+            <a:r>
+              <a:rPr lang="de-DE" dirty="0"/>
+              <a:t>Projektablauf</a:t>
+            </a:r>
+          </a:p>
+        </p:txBody>
+      </p:sp>
+      <p:sp>
+        <p:nvSpPr>
+          <p:cNvPr id="5" name="Text Placeholder 4">
+            <a:extLst>
+              <a:ext uri="{FF2B5EF4-FFF2-40B4-BE49-F238E27FC236}">
+                <a16:creationId xmlns:a16="http://schemas.microsoft.com/office/drawing/2014/main" id="{DD42891A-4FEF-6445-694B-3BC702DEF625}"/>
+              </a:ext>
+            </a:extLst>
+          </p:cNvPr>
+          <p:cNvSpPr>
+            <a:spLocks noGrp="1"/>
+          </p:cNvSpPr>
+          <p:nvPr>
+            <p:ph type="body" sz="quarter" idx="16"/>
           </p:nvPr>
         </p:nvSpPr>
         <p:spPr/>
@@ -12042,150 +14853,3909 @@
           <a:bodyPr/>
           <a:lstStyle/>
           <a:p>
-            <a:endParaRPr lang="de-DE"/>
-          </a:p>
-        </p:txBody>
-      </p:sp>
-      <p:sp>
-        <p:nvSpPr>
-          <p:cNvPr id="6" name="Textplatzhalter 5">
-            <a:extLst>
-              <a:ext uri="{FF2B5EF4-FFF2-40B4-BE49-F238E27FC236}">
-                <a16:creationId xmlns:a16="http://schemas.microsoft.com/office/drawing/2014/main" id="{E8FB1FE0-8CCF-260D-D940-384FF80C15B6}"/>
-              </a:ext>
-            </a:extLst>
-          </p:cNvPr>
-          <p:cNvSpPr>
-            <a:spLocks noGrp="1"/>
-          </p:cNvSpPr>
-          <p:nvPr>
-            <p:ph type="body" sz="quarter" idx="25"/>
-          </p:nvPr>
-        </p:nvSpPr>
-        <p:spPr/>
-        <p:txBody>
-          <a:bodyPr/>
-          <a:lstStyle/>
-          <a:p>
-            <a:r>
-              <a:rPr lang="de-DE" dirty="0"/>
-              <a:t>Bitte wenden Sie sich bei Fragen an uns</a:t>
-            </a:r>
-          </a:p>
-          <a:p>
-            <a:endParaRPr lang="de-DE" dirty="0"/>
-          </a:p>
-        </p:txBody>
-      </p:sp>
-      <p:sp>
-        <p:nvSpPr>
-          <p:cNvPr id="7" name="Textplatzhalter 6">
-            <a:extLst>
-              <a:ext uri="{FF2B5EF4-FFF2-40B4-BE49-F238E27FC236}">
-                <a16:creationId xmlns:a16="http://schemas.microsoft.com/office/drawing/2014/main" id="{ED506ADA-D51D-0F47-C6FF-2523D3DFC682}"/>
-              </a:ext>
-            </a:extLst>
-          </p:cNvPr>
-          <p:cNvSpPr>
-            <a:spLocks noGrp="1"/>
-          </p:cNvSpPr>
-          <p:nvPr>
-            <p:ph type="body" sz="quarter" idx="27"/>
-          </p:nvPr>
-        </p:nvSpPr>
-        <p:spPr/>
-        <p:txBody>
-          <a:bodyPr/>
-          <a:lstStyle/>
-          <a:p>
-            <a:r>
-              <a:rPr lang="de-DE" dirty="0"/>
-              <a:t>-</a:t>
-            </a:r>
-          </a:p>
-        </p:txBody>
-      </p:sp>
-      <p:sp>
-        <p:nvSpPr>
-          <p:cNvPr id="8" name="Textplatzhalter 7">
-            <a:extLst>
-              <a:ext uri="{FF2B5EF4-FFF2-40B4-BE49-F238E27FC236}">
-                <a16:creationId xmlns:a16="http://schemas.microsoft.com/office/drawing/2014/main" id="{60FF552A-A38F-6D61-A136-653E08D20C73}"/>
-              </a:ext>
-            </a:extLst>
-          </p:cNvPr>
-          <p:cNvSpPr>
-            <a:spLocks noGrp="1"/>
-          </p:cNvSpPr>
-          <p:nvPr>
-            <p:ph type="body" sz="quarter" idx="28"/>
-          </p:nvPr>
-        </p:nvSpPr>
-        <p:spPr/>
-        <p:txBody>
-          <a:bodyPr/>
-          <a:lstStyle/>
-          <a:p>
-            <a:r>
-              <a:rPr lang="de-DE" dirty="0" err="1"/>
-              <a:t>Seybothstraße</a:t>
-            </a:r>
-            <a:r>
-              <a:rPr lang="de-DE" dirty="0"/>
-              <a:t> 2</a:t>
-            </a:r>
-          </a:p>
-          <a:p>
-            <a:r>
-              <a:rPr lang="de-DE" dirty="0"/>
-              <a:t>93053 Regensburg</a:t>
-            </a:r>
-          </a:p>
-          <a:p>
-            <a:endParaRPr lang="de-DE" dirty="0"/>
-          </a:p>
-        </p:txBody>
-      </p:sp>
-      <p:sp>
-        <p:nvSpPr>
-          <p:cNvPr id="9" name="Textplatzhalter 8">
-            <a:extLst>
-              <a:ext uri="{FF2B5EF4-FFF2-40B4-BE49-F238E27FC236}">
-                <a16:creationId xmlns:a16="http://schemas.microsoft.com/office/drawing/2014/main" id="{B938A625-4C84-E31C-2D1C-B2221751D30F}"/>
-              </a:ext>
-            </a:extLst>
-          </p:cNvPr>
-          <p:cNvSpPr>
-            <a:spLocks noGrp="1"/>
-          </p:cNvSpPr>
-          <p:nvPr>
-            <p:ph type="body" sz="quarter" idx="29"/>
-          </p:nvPr>
-        </p:nvSpPr>
-        <p:spPr>
-          <a:xfrm>
-            <a:off x="2248392" y="4513899"/>
-            <a:ext cx="3600000" cy="408495"/>
-          </a:xfrm>
-        </p:spPr>
-        <p:txBody>
-          <a:bodyPr/>
-          <a:lstStyle/>
-          <a:p>
-            <a:r>
-              <a:rPr lang="de-DE" dirty="0"/>
-              <a:t>kommunikation@oth-regensburg.de</a:t>
-            </a:r>
-          </a:p>
-          <a:p>
-            <a:endParaRPr lang="de-DE" dirty="0"/>
+            <a:pPr marL="0" indent="0">
+              <a:buNone/>
+            </a:pPr>
+            <a:r>
+              <a:rPr lang="en-US" dirty="0"/>
+              <a:t>Phase 1: </a:t>
+            </a:r>
+            <a:r>
+              <a:rPr lang="en-US" dirty="0" err="1"/>
+              <a:t>Erstellen</a:t>
+            </a:r>
+            <a:r>
+              <a:rPr lang="en-US" dirty="0"/>
+              <a:t> </a:t>
+            </a:r>
+            <a:r>
+              <a:rPr lang="en-US" dirty="0" err="1"/>
+              <a:t>eines</a:t>
+            </a:r>
+            <a:r>
+              <a:rPr lang="en-US" dirty="0"/>
+              <a:t> Single Prompt (Repo-Template) </a:t>
+            </a:r>
+          </a:p>
+          <a:p>
+            <a:pPr marL="0" indent="0">
+              <a:buNone/>
+            </a:pPr>
+            <a:r>
+              <a:rPr lang="en-US" dirty="0"/>
+              <a:t>Phase 2: </a:t>
+            </a:r>
+            <a:r>
+              <a:rPr lang="en-US" dirty="0" err="1"/>
+              <a:t>Auswertung</a:t>
+            </a:r>
+            <a:r>
+              <a:rPr lang="en-US" dirty="0"/>
+              <a:t> der </a:t>
+            </a:r>
+            <a:r>
+              <a:rPr lang="en-US" dirty="0" err="1"/>
+              <a:t>Qualität</a:t>
+            </a:r>
+            <a:r>
+              <a:rPr lang="en-US" dirty="0"/>
+              <a:t> der </a:t>
+            </a:r>
+            <a:r>
+              <a:rPr lang="en-US" dirty="0" err="1"/>
+              <a:t>erzeugten</a:t>
+            </a:r>
+            <a:r>
+              <a:rPr lang="en-US" dirty="0"/>
+              <a:t> MVP’s (LLM as a Judge)</a:t>
+            </a:r>
+          </a:p>
+          <a:p>
+            <a:pPr marL="0" indent="0">
+              <a:buNone/>
+            </a:pPr>
+            <a:r>
+              <a:rPr lang="en-US" dirty="0"/>
+              <a:t>Phase 3: Frontend (+</a:t>
+            </a:r>
+            <a:r>
+              <a:rPr lang="en-US" dirty="0" err="1"/>
+              <a:t>FastAPI</a:t>
+            </a:r>
+            <a:r>
+              <a:rPr lang="en-US" dirty="0"/>
+              <a:t>, </a:t>
+            </a:r>
+            <a:r>
+              <a:rPr lang="en-US" dirty="0" err="1"/>
+              <a:t>LangGraph</a:t>
+            </a:r>
+            <a:r>
+              <a:rPr lang="en-US" dirty="0"/>
+              <a:t>, </a:t>
+            </a:r>
+            <a:r>
+              <a:rPr lang="en-US" dirty="0" err="1"/>
+              <a:t>DeepAgents</a:t>
+            </a:r>
+            <a:r>
+              <a:rPr lang="en-US" dirty="0"/>
+              <a:t>)</a:t>
+            </a:r>
           </a:p>
         </p:txBody>
       </p:sp>
     </p:spTree>
     <p:extLst>
       <p:ext uri="{BB962C8B-B14F-4D97-AF65-F5344CB8AC3E}">
-        <p14:creationId xmlns:p14="http://schemas.microsoft.com/office/powerpoint/2010/main" val="44672609"/>
+        <p14:creationId xmlns:p14="http://schemas.microsoft.com/office/powerpoint/2010/main" val="3434147936"/>
+      </p:ext>
+    </p:extLst>
+  </p:cSld>
+  <p:clrMapOvr>
+    <a:masterClrMapping/>
+  </p:clrMapOvr>
+</p:sld>
+</file>
+
+<file path=ppt/slides/slide4.xml><?xml version="1.0" encoding="utf-8"?>
+<p:sld xmlns:a="http://schemas.openxmlformats.org/drawingml/2006/main" xmlns:r="http://schemas.openxmlformats.org/officeDocument/2006/relationships" xmlns:p="http://schemas.openxmlformats.org/presentationml/2006/main">
+  <p:cSld>
+    <p:spTree>
+      <p:nvGrpSpPr>
+        <p:cNvPr id="1" name="">
+          <a:extLst>
+            <a:ext uri="{FF2B5EF4-FFF2-40B4-BE49-F238E27FC236}">
+              <a16:creationId xmlns:a16="http://schemas.microsoft.com/office/drawing/2014/main" id="{B8A16A14-CE13-0A56-A4B1-FDEBBA68063E}"/>
+            </a:ext>
+          </a:extLst>
+        </p:cNvPr>
+        <p:cNvGrpSpPr/>
+        <p:nvPr/>
+      </p:nvGrpSpPr>
+      <p:grpSpPr>
+        <a:xfrm>
+          <a:off x="0" y="0"/>
+          <a:ext cx="0" cy="0"/>
+          <a:chOff x="0" y="0"/>
+          <a:chExt cx="0" cy="0"/>
+        </a:xfrm>
+      </p:grpSpPr>
+      <p:sp>
+        <p:nvSpPr>
+          <p:cNvPr id="2" name="Fußzeilenplatzhalter 1">
+            <a:extLst>
+              <a:ext uri="{FF2B5EF4-FFF2-40B4-BE49-F238E27FC236}">
+                <a16:creationId xmlns:a16="http://schemas.microsoft.com/office/drawing/2014/main" id="{5250BFAE-7654-2DFF-98AB-4778E0CE8BB5}"/>
+              </a:ext>
+            </a:extLst>
+          </p:cNvPr>
+          <p:cNvSpPr>
+            <a:spLocks noGrp="1"/>
+          </p:cNvSpPr>
+          <p:nvPr>
+            <p:ph type="ftr" sz="quarter" idx="26"/>
+          </p:nvPr>
+        </p:nvSpPr>
+        <p:spPr/>
+        <p:txBody>
+          <a:bodyPr/>
+          <a:lstStyle/>
+          <a:p>
+            <a:r>
+              <a:rPr lang="de-DE"/>
+              <a:t>KI Projekt | Sina Brunner, Lars Nettersheim, John Schwarz, Leon Ulbrich, Felix Wensky </a:t>
+            </a:r>
+            <a:endParaRPr lang="de-DE" dirty="0"/>
+          </a:p>
+        </p:txBody>
+      </p:sp>
+      <p:sp>
+        <p:nvSpPr>
+          <p:cNvPr id="3" name="Foliennummernplatzhalter 2">
+            <a:extLst>
+              <a:ext uri="{FF2B5EF4-FFF2-40B4-BE49-F238E27FC236}">
+                <a16:creationId xmlns:a16="http://schemas.microsoft.com/office/drawing/2014/main" id="{609F1FF3-9359-3AD0-7DC3-1EE25E9435D5}"/>
+              </a:ext>
+            </a:extLst>
+          </p:cNvPr>
+          <p:cNvSpPr>
+            <a:spLocks noGrp="1"/>
+          </p:cNvSpPr>
+          <p:nvPr>
+            <p:ph type="sldNum" sz="quarter" idx="4"/>
+          </p:nvPr>
+        </p:nvSpPr>
+        <p:spPr/>
+        <p:txBody>
+          <a:bodyPr/>
+          <a:lstStyle/>
+          <a:p>
+            <a:fld id="{E7298502-BA22-4927-B2ED-0A18FFA86FFE}" type="slidenum">
+              <a:rPr lang="de-DE" smtClean="0"/>
+              <a:pPr/>
+              <a:t>4</a:t>
+            </a:fld>
+            <a:endParaRPr lang="de-DE" dirty="0"/>
+          </a:p>
+        </p:txBody>
+      </p:sp>
+      <p:cxnSp>
+        <p:nvCxnSpPr>
+          <p:cNvPr id="8" name="Gerader Verbinder 7">
+            <a:extLst>
+              <a:ext uri="{FF2B5EF4-FFF2-40B4-BE49-F238E27FC236}">
+                <a16:creationId xmlns:a16="http://schemas.microsoft.com/office/drawing/2014/main" id="{947F15CF-D619-76B0-8124-F48F328AFAE8}"/>
+              </a:ext>
+            </a:extLst>
+          </p:cNvPr>
+          <p:cNvCxnSpPr>
+            <a:cxnSpLocks/>
+          </p:cNvCxnSpPr>
+          <p:nvPr/>
+        </p:nvCxnSpPr>
+        <p:spPr>
+          <a:xfrm>
+            <a:off x="713582" y="746389"/>
+            <a:ext cx="0" cy="468000"/>
+          </a:xfrm>
+          <a:prstGeom prst="line">
+            <a:avLst/>
+          </a:prstGeom>
+          <a:ln w="28575"/>
+        </p:spPr>
+        <p:style>
+          <a:lnRef idx="1">
+            <a:schemeClr val="accent1"/>
+          </a:lnRef>
+          <a:fillRef idx="0">
+            <a:schemeClr val="accent1"/>
+          </a:fillRef>
+          <a:effectRef idx="0">
+            <a:schemeClr val="accent1"/>
+          </a:effectRef>
+          <a:fontRef idx="minor">
+            <a:schemeClr val="tx1"/>
+          </a:fontRef>
+        </p:style>
+      </p:cxnSp>
+      <p:sp>
+        <p:nvSpPr>
+          <p:cNvPr id="9" name="Textplatzhalter 12">
+            <a:extLst>
+              <a:ext uri="{FF2B5EF4-FFF2-40B4-BE49-F238E27FC236}">
+                <a16:creationId xmlns:a16="http://schemas.microsoft.com/office/drawing/2014/main" id="{87DA1303-43F1-DFCB-AF73-770F0164EC66}"/>
+              </a:ext>
+            </a:extLst>
+          </p:cNvPr>
+          <p:cNvSpPr>
+            <a:spLocks noGrp="1"/>
+          </p:cNvSpPr>
+          <p:nvPr>
+            <p:ph type="body" sz="quarter" idx="13" hasCustomPrompt="1"/>
+          </p:nvPr>
+        </p:nvSpPr>
+        <p:spPr>
+          <a:xfrm>
+            <a:off x="695325" y="199474"/>
+            <a:ext cx="10119053" cy="468000"/>
+          </a:xfrm>
+          <a:prstGeom prst="rect">
+            <a:avLst/>
+          </a:prstGeom>
+        </p:spPr>
+        <p:txBody>
+          <a:bodyPr anchor="t">
+            <a:noAutofit/>
+          </a:bodyPr>
+          <a:lstStyle>
+            <a:lvl1pPr marL="0" indent="0">
+              <a:buNone/>
+              <a:defRPr sz="3000" b="1" cap="none" baseline="0"/>
+            </a:lvl1pPr>
+            <a:lvl2pPr>
+              <a:defRPr sz="2900" b="1" cap="all" baseline="0"/>
+            </a:lvl2pPr>
+            <a:lvl3pPr>
+              <a:defRPr sz="2900" b="1" cap="all" baseline="0"/>
+            </a:lvl3pPr>
+            <a:lvl4pPr>
+              <a:defRPr sz="2900" b="1" cap="all" baseline="0"/>
+            </a:lvl4pPr>
+            <a:lvl5pPr>
+              <a:defRPr sz="2900" b="1" cap="all" baseline="0"/>
+            </a:lvl5pPr>
+          </a:lstStyle>
+          <a:p>
+            <a:r>
+              <a:rPr lang="de-DE" dirty="0"/>
+              <a:t>Projektübersicht</a:t>
+            </a:r>
+          </a:p>
+        </p:txBody>
+      </p:sp>
+      <p:sp>
+        <p:nvSpPr>
+          <p:cNvPr id="10" name="Textplatzhalter 20">
+            <a:extLst>
+              <a:ext uri="{FF2B5EF4-FFF2-40B4-BE49-F238E27FC236}">
+                <a16:creationId xmlns:a16="http://schemas.microsoft.com/office/drawing/2014/main" id="{29EC22C4-AC0E-8DE0-3DAD-168424D8851B}"/>
+              </a:ext>
+            </a:extLst>
+          </p:cNvPr>
+          <p:cNvSpPr>
+            <a:spLocks noGrp="1"/>
+          </p:cNvSpPr>
+          <p:nvPr>
+            <p:ph type="body" sz="quarter" idx="25" hasCustomPrompt="1"/>
+          </p:nvPr>
+        </p:nvSpPr>
+        <p:spPr>
+          <a:xfrm>
+            <a:off x="710624" y="813558"/>
+            <a:ext cx="10119052" cy="338138"/>
+          </a:xfrm>
+          <a:prstGeom prst="rect">
+            <a:avLst/>
+          </a:prstGeom>
+        </p:spPr>
+        <p:txBody>
+          <a:bodyPr/>
+          <a:lstStyle>
+            <a:lvl1pPr marL="0" indent="0">
+              <a:buNone/>
+              <a:defRPr sz="2000" b="1"/>
+            </a:lvl1pPr>
+          </a:lstStyle>
+          <a:p>
+            <a:pPr lvl="0"/>
+            <a:r>
+              <a:rPr lang="de-DE" dirty="0"/>
+              <a:t>Festlegung des Projektumfangs (Felix)</a:t>
+            </a:r>
+          </a:p>
+        </p:txBody>
+      </p:sp>
+      <p:sp>
+        <p:nvSpPr>
+          <p:cNvPr id="5" name="Text Placeholder 4">
+            <a:extLst>
+              <a:ext uri="{FF2B5EF4-FFF2-40B4-BE49-F238E27FC236}">
+                <a16:creationId xmlns:a16="http://schemas.microsoft.com/office/drawing/2014/main" id="{9213DCA5-B2D8-1D87-9572-AE0DAFE33FAF}"/>
+              </a:ext>
+            </a:extLst>
+          </p:cNvPr>
+          <p:cNvSpPr>
+            <a:spLocks noGrp="1"/>
+          </p:cNvSpPr>
+          <p:nvPr>
+            <p:ph type="body" sz="quarter" idx="16"/>
+          </p:nvPr>
+        </p:nvSpPr>
+        <p:spPr>
+          <a:xfrm>
+            <a:off x="710624" y="1485165"/>
+            <a:ext cx="11303356" cy="4163514"/>
+          </a:xfrm>
+        </p:spPr>
+        <p:txBody>
+          <a:bodyPr/>
+          <a:lstStyle/>
+          <a:p>
+            <a:pPr marL="0" indent="0">
+              <a:buNone/>
+            </a:pPr>
+            <a:r>
+              <a:rPr lang="en-US" dirty="0"/>
+              <a:t>Fokus auf </a:t>
+            </a:r>
+            <a:r>
+              <a:rPr lang="en-US" dirty="0" err="1"/>
+              <a:t>Zeitreihen</a:t>
+            </a:r>
+            <a:endParaRPr lang="en-US" dirty="0"/>
+          </a:p>
+          <a:p>
+            <a:pPr marL="0" indent="0">
+              <a:buNone/>
+            </a:pPr>
+            <a:r>
+              <a:rPr lang="en-US" dirty="0" err="1"/>
+              <a:t>Vollautomatisierte</a:t>
+            </a:r>
+            <a:r>
+              <a:rPr lang="en-US" dirty="0"/>
+              <a:t> </a:t>
+            </a:r>
+            <a:r>
+              <a:rPr lang="en-US" dirty="0" err="1"/>
+              <a:t>agentische</a:t>
+            </a:r>
+            <a:r>
+              <a:rPr lang="en-US" dirty="0"/>
+              <a:t> </a:t>
+            </a:r>
+            <a:r>
+              <a:rPr lang="en-US" dirty="0" err="1"/>
+              <a:t>Regressionspipeline</a:t>
+            </a:r>
+            <a:endParaRPr lang="en-US" dirty="0"/>
+          </a:p>
+          <a:p>
+            <a:pPr marL="0" indent="0">
+              <a:buNone/>
+            </a:pPr>
+            <a:r>
+              <a:rPr lang="en-US" dirty="0"/>
+              <a:t>Aufbau von Trust in den MVP </a:t>
+            </a:r>
+            <a:r>
+              <a:rPr lang="en-US" dirty="0" err="1"/>
+              <a:t>durch</a:t>
+            </a:r>
+            <a:r>
+              <a:rPr lang="en-US" dirty="0"/>
+              <a:t> LLM as Judge</a:t>
+            </a:r>
+          </a:p>
+          <a:p>
+            <a:pPr marL="0" indent="0">
+              <a:buNone/>
+            </a:pPr>
+            <a:endParaRPr lang="en-US" dirty="0"/>
+          </a:p>
+        </p:txBody>
+      </p:sp>
+    </p:spTree>
+    <p:extLst>
+      <p:ext uri="{BB962C8B-B14F-4D97-AF65-F5344CB8AC3E}">
+        <p14:creationId xmlns:p14="http://schemas.microsoft.com/office/powerpoint/2010/main" val="2659850675"/>
+      </p:ext>
+    </p:extLst>
+  </p:cSld>
+  <p:clrMapOvr>
+    <a:masterClrMapping/>
+  </p:clrMapOvr>
+</p:sld>
+</file>
+
+<file path=ppt/slides/slide5.xml><?xml version="1.0" encoding="utf-8"?>
+<p:sld xmlns:a="http://schemas.openxmlformats.org/drawingml/2006/main" xmlns:r="http://schemas.openxmlformats.org/officeDocument/2006/relationships" xmlns:p="http://schemas.openxmlformats.org/presentationml/2006/main">
+  <p:cSld>
+    <p:spTree>
+      <p:nvGrpSpPr>
+        <p:cNvPr id="1" name="">
+          <a:extLst>
+            <a:ext uri="{FF2B5EF4-FFF2-40B4-BE49-F238E27FC236}">
+              <a16:creationId xmlns:a16="http://schemas.microsoft.com/office/drawing/2014/main" id="{1EEBD6C4-9A0C-5322-FF63-47EA723BD29D}"/>
+            </a:ext>
+          </a:extLst>
+        </p:cNvPr>
+        <p:cNvGrpSpPr/>
+        <p:nvPr/>
+      </p:nvGrpSpPr>
+      <p:grpSpPr>
+        <a:xfrm>
+          <a:off x="0" y="0"/>
+          <a:ext cx="0" cy="0"/>
+          <a:chOff x="0" y="0"/>
+          <a:chExt cx="0" cy="0"/>
+        </a:xfrm>
+      </p:grpSpPr>
+      <p:sp>
+        <p:nvSpPr>
+          <p:cNvPr id="2" name="Fußzeilenplatzhalter 1">
+            <a:extLst>
+              <a:ext uri="{FF2B5EF4-FFF2-40B4-BE49-F238E27FC236}">
+                <a16:creationId xmlns:a16="http://schemas.microsoft.com/office/drawing/2014/main" id="{74E25D59-3822-7CDA-0770-E14D76836FFA}"/>
+              </a:ext>
+            </a:extLst>
+          </p:cNvPr>
+          <p:cNvSpPr>
+            <a:spLocks noGrp="1"/>
+          </p:cNvSpPr>
+          <p:nvPr>
+            <p:ph type="ftr" sz="quarter" idx="26"/>
+          </p:nvPr>
+        </p:nvSpPr>
+        <p:spPr/>
+        <p:txBody>
+          <a:bodyPr/>
+          <a:lstStyle/>
+          <a:p>
+            <a:r>
+              <a:rPr lang="de-DE"/>
+              <a:t>KI Projekt | Sina Brunner, Lars Nettersheim, John Schwarz, Leon Ulbrich, Felix Wensky </a:t>
+            </a:r>
+            <a:endParaRPr lang="de-DE" dirty="0"/>
+          </a:p>
+        </p:txBody>
+      </p:sp>
+      <p:sp>
+        <p:nvSpPr>
+          <p:cNvPr id="3" name="Foliennummernplatzhalter 2">
+            <a:extLst>
+              <a:ext uri="{FF2B5EF4-FFF2-40B4-BE49-F238E27FC236}">
+                <a16:creationId xmlns:a16="http://schemas.microsoft.com/office/drawing/2014/main" id="{F299AF64-8A91-74FD-9F7A-85832FDF1BEE}"/>
+              </a:ext>
+            </a:extLst>
+          </p:cNvPr>
+          <p:cNvSpPr>
+            <a:spLocks noGrp="1"/>
+          </p:cNvSpPr>
+          <p:nvPr>
+            <p:ph type="sldNum" sz="quarter" idx="4"/>
+          </p:nvPr>
+        </p:nvSpPr>
+        <p:spPr/>
+        <p:txBody>
+          <a:bodyPr/>
+          <a:lstStyle/>
+          <a:p>
+            <a:fld id="{E7298502-BA22-4927-B2ED-0A18FFA86FFE}" type="slidenum">
+              <a:rPr lang="de-DE" smtClean="0"/>
+              <a:pPr/>
+              <a:t>5</a:t>
+            </a:fld>
+            <a:endParaRPr lang="de-DE" dirty="0"/>
+          </a:p>
+        </p:txBody>
+      </p:sp>
+      <p:cxnSp>
+        <p:nvCxnSpPr>
+          <p:cNvPr id="8" name="Gerader Verbinder 7">
+            <a:extLst>
+              <a:ext uri="{FF2B5EF4-FFF2-40B4-BE49-F238E27FC236}">
+                <a16:creationId xmlns:a16="http://schemas.microsoft.com/office/drawing/2014/main" id="{C57F2382-2C2B-5A14-0914-522B11F57258}"/>
+              </a:ext>
+            </a:extLst>
+          </p:cNvPr>
+          <p:cNvCxnSpPr>
+            <a:cxnSpLocks/>
+          </p:cNvCxnSpPr>
+          <p:nvPr/>
+        </p:nvCxnSpPr>
+        <p:spPr>
+          <a:xfrm>
+            <a:off x="713582" y="746389"/>
+            <a:ext cx="0" cy="468000"/>
+          </a:xfrm>
+          <a:prstGeom prst="line">
+            <a:avLst/>
+          </a:prstGeom>
+          <a:ln w="28575"/>
+        </p:spPr>
+        <p:style>
+          <a:lnRef idx="1">
+            <a:schemeClr val="accent1"/>
+          </a:lnRef>
+          <a:fillRef idx="0">
+            <a:schemeClr val="accent1"/>
+          </a:fillRef>
+          <a:effectRef idx="0">
+            <a:schemeClr val="accent1"/>
+          </a:effectRef>
+          <a:fontRef idx="minor">
+            <a:schemeClr val="tx1"/>
+          </a:fontRef>
+        </p:style>
+      </p:cxnSp>
+      <p:sp>
+        <p:nvSpPr>
+          <p:cNvPr id="9" name="Textplatzhalter 12">
+            <a:extLst>
+              <a:ext uri="{FF2B5EF4-FFF2-40B4-BE49-F238E27FC236}">
+                <a16:creationId xmlns:a16="http://schemas.microsoft.com/office/drawing/2014/main" id="{7F3CA1C3-8A48-C66D-CCD5-7C24AFF17E87}"/>
+              </a:ext>
+            </a:extLst>
+          </p:cNvPr>
+          <p:cNvSpPr>
+            <a:spLocks noGrp="1"/>
+          </p:cNvSpPr>
+          <p:nvPr>
+            <p:ph type="body" sz="quarter" idx="13" hasCustomPrompt="1"/>
+          </p:nvPr>
+        </p:nvSpPr>
+        <p:spPr>
+          <a:xfrm>
+            <a:off x="695325" y="199474"/>
+            <a:ext cx="10119053" cy="468000"/>
+          </a:xfrm>
+          <a:prstGeom prst="rect">
+            <a:avLst/>
+          </a:prstGeom>
+        </p:spPr>
+        <p:txBody>
+          <a:bodyPr anchor="t">
+            <a:noAutofit/>
+          </a:bodyPr>
+          <a:lstStyle>
+            <a:lvl1pPr marL="0" indent="0">
+              <a:buNone/>
+              <a:defRPr sz="3000" b="1" cap="none" baseline="0"/>
+            </a:lvl1pPr>
+            <a:lvl2pPr>
+              <a:defRPr sz="2900" b="1" cap="all" baseline="0"/>
+            </a:lvl2pPr>
+            <a:lvl3pPr>
+              <a:defRPr sz="2900" b="1" cap="all" baseline="0"/>
+            </a:lvl3pPr>
+            <a:lvl4pPr>
+              <a:defRPr sz="2900" b="1" cap="all" baseline="0"/>
+            </a:lvl4pPr>
+            <a:lvl5pPr>
+              <a:defRPr sz="2900" b="1" cap="all" baseline="0"/>
+            </a:lvl5pPr>
+          </a:lstStyle>
+          <a:p>
+            <a:r>
+              <a:rPr lang="de-DE" dirty="0"/>
+              <a:t>Projektübersicht</a:t>
+            </a:r>
+          </a:p>
+        </p:txBody>
+      </p:sp>
+      <p:sp>
+        <p:nvSpPr>
+          <p:cNvPr id="10" name="Textplatzhalter 20">
+            <a:extLst>
+              <a:ext uri="{FF2B5EF4-FFF2-40B4-BE49-F238E27FC236}">
+                <a16:creationId xmlns:a16="http://schemas.microsoft.com/office/drawing/2014/main" id="{87C9085C-3BC9-583E-C441-A63D243E9E22}"/>
+              </a:ext>
+            </a:extLst>
+          </p:cNvPr>
+          <p:cNvSpPr>
+            <a:spLocks noGrp="1"/>
+          </p:cNvSpPr>
+          <p:nvPr>
+            <p:ph type="body" sz="quarter" idx="25" hasCustomPrompt="1"/>
+          </p:nvPr>
+        </p:nvSpPr>
+        <p:spPr>
+          <a:xfrm>
+            <a:off x="710624" y="813558"/>
+            <a:ext cx="10119052" cy="338138"/>
+          </a:xfrm>
+          <a:prstGeom prst="rect">
+            <a:avLst/>
+          </a:prstGeom>
+        </p:spPr>
+        <p:txBody>
+          <a:bodyPr/>
+          <a:lstStyle>
+            <a:lvl1pPr marL="0" indent="0">
+              <a:buNone/>
+              <a:defRPr sz="2000" b="1"/>
+            </a:lvl1pPr>
+          </a:lstStyle>
+          <a:p>
+            <a:pPr lvl="0"/>
+            <a:r>
+              <a:rPr lang="de-DE" dirty="0"/>
+              <a:t>Projektorganisation</a:t>
+            </a:r>
+          </a:p>
+        </p:txBody>
+      </p:sp>
+      <p:sp>
+        <p:nvSpPr>
+          <p:cNvPr id="5" name="Text Placeholder 4">
+            <a:extLst>
+              <a:ext uri="{FF2B5EF4-FFF2-40B4-BE49-F238E27FC236}">
+                <a16:creationId xmlns:a16="http://schemas.microsoft.com/office/drawing/2014/main" id="{E8C6D92F-3571-E5CD-CA78-4B2AA058F583}"/>
+              </a:ext>
+            </a:extLst>
+          </p:cNvPr>
+          <p:cNvSpPr>
+            <a:spLocks noGrp="1"/>
+          </p:cNvSpPr>
+          <p:nvPr>
+            <p:ph type="body" sz="quarter" idx="16"/>
+          </p:nvPr>
+        </p:nvSpPr>
+        <p:spPr>
+          <a:xfrm>
+            <a:off x="710624" y="1453905"/>
+            <a:ext cx="11303356" cy="1464415"/>
+          </a:xfrm>
+        </p:spPr>
+        <p:txBody>
+          <a:bodyPr/>
+          <a:lstStyle/>
+          <a:p>
+            <a:pPr marL="0" indent="0">
+              <a:buNone/>
+            </a:pPr>
+            <a:r>
+              <a:rPr lang="en-US" sz="1400" dirty="0"/>
+              <a:t>5 </a:t>
+            </a:r>
+            <a:r>
+              <a:rPr lang="en-US" sz="1400" dirty="0" err="1"/>
+              <a:t>Teammitglieder</a:t>
+            </a:r>
+            <a:endParaRPr lang="en-US" sz="1400" dirty="0"/>
+          </a:p>
+          <a:p>
+            <a:pPr lvl="1"/>
+            <a:r>
+              <a:rPr lang="en-US" sz="1200" dirty="0"/>
+              <a:t>Product Owner (Felix Wensky)</a:t>
+            </a:r>
+          </a:p>
+          <a:p>
+            <a:pPr lvl="1"/>
+            <a:r>
+              <a:rPr lang="en-US" sz="1200" dirty="0"/>
+              <a:t>Scrum Master (John Schwarz)</a:t>
+            </a:r>
+          </a:p>
+          <a:p>
+            <a:pPr lvl="1"/>
+            <a:r>
+              <a:rPr lang="en-US" sz="1200" dirty="0"/>
+              <a:t>3 </a:t>
+            </a:r>
+            <a:r>
+              <a:rPr lang="en-US" sz="1200" dirty="0" err="1"/>
+              <a:t>Entwickler</a:t>
+            </a:r>
+            <a:r>
+              <a:rPr lang="en-US" sz="1200" dirty="0"/>
+              <a:t> (Sina Brunner, Lars </a:t>
+            </a:r>
+            <a:r>
+              <a:rPr lang="en-US" sz="1200" dirty="0" err="1"/>
+              <a:t>Nettersheim</a:t>
+            </a:r>
+            <a:r>
+              <a:rPr lang="en-US" sz="1200" dirty="0"/>
+              <a:t>, Leon Ulbrich)</a:t>
+            </a:r>
+          </a:p>
+          <a:p>
+            <a:pPr lvl="1"/>
+            <a:endParaRPr lang="en-US" sz="1200" dirty="0"/>
+          </a:p>
+          <a:p>
+            <a:pPr marL="457200" lvl="1" indent="0">
+              <a:buNone/>
+            </a:pPr>
+            <a:endParaRPr lang="en-US" sz="1200" dirty="0"/>
+          </a:p>
+        </p:txBody>
+      </p:sp>
+      <p:sp>
+        <p:nvSpPr>
+          <p:cNvPr id="4" name="Text Placeholder 4">
+            <a:extLst>
+              <a:ext uri="{FF2B5EF4-FFF2-40B4-BE49-F238E27FC236}">
+                <a16:creationId xmlns:a16="http://schemas.microsoft.com/office/drawing/2014/main" id="{B0281635-7A5E-BE6D-9DCC-02311F50492D}"/>
+              </a:ext>
+            </a:extLst>
+          </p:cNvPr>
+          <p:cNvSpPr txBox="1">
+            <a:spLocks/>
+          </p:cNvSpPr>
+          <p:nvPr/>
+        </p:nvSpPr>
+        <p:spPr>
+          <a:xfrm>
+            <a:off x="710624" y="3142810"/>
+            <a:ext cx="11303356" cy="1464415"/>
+          </a:xfrm>
+          <a:prstGeom prst="rect">
+            <a:avLst/>
+          </a:prstGeom>
+        </p:spPr>
+        <p:txBody>
+          <a:bodyPr/>
+          <a:lstStyle>
+            <a:lvl1pPr marL="228600" indent="-228600" algn="l" defTabSz="914400" rtl="0" eaLnBrk="1" latinLnBrk="0" hangingPunct="1">
+              <a:lnSpc>
+                <a:spcPct val="90000"/>
+              </a:lnSpc>
+              <a:spcBef>
+                <a:spcPts val="1000"/>
+              </a:spcBef>
+              <a:buFont typeface="Arial" panose="020B0604020202020204" pitchFamily="34" charset="0"/>
+              <a:buChar char="•"/>
+              <a:defRPr sz="2000" kern="1200">
+                <a:solidFill>
+                  <a:schemeClr val="tx1"/>
+                </a:solidFill>
+                <a:latin typeface="+mn-lt"/>
+                <a:ea typeface="+mn-ea"/>
+                <a:cs typeface="+mn-cs"/>
+              </a:defRPr>
+            </a:lvl1pPr>
+            <a:lvl2pPr marL="685800" indent="-228600" algn="l" defTabSz="914400" rtl="0" eaLnBrk="1" latinLnBrk="0" hangingPunct="1">
+              <a:lnSpc>
+                <a:spcPct val="90000"/>
+              </a:lnSpc>
+              <a:spcBef>
+                <a:spcPts val="500"/>
+              </a:spcBef>
+              <a:buFont typeface="Arial" panose="020B0604020202020204" pitchFamily="34" charset="0"/>
+              <a:buChar char="•"/>
+              <a:defRPr sz="1800" kern="1200">
+                <a:solidFill>
+                  <a:schemeClr val="tx1"/>
+                </a:solidFill>
+                <a:latin typeface="+mn-lt"/>
+                <a:ea typeface="+mn-ea"/>
+                <a:cs typeface="+mn-cs"/>
+              </a:defRPr>
+            </a:lvl2pPr>
+            <a:lvl3pPr marL="1143000" indent="-228600" algn="l" defTabSz="914400" rtl="0" eaLnBrk="1" latinLnBrk="0" hangingPunct="1">
+              <a:lnSpc>
+                <a:spcPct val="90000"/>
+              </a:lnSpc>
+              <a:spcBef>
+                <a:spcPts val="500"/>
+              </a:spcBef>
+              <a:buFont typeface="Arial" panose="020B0604020202020204" pitchFamily="34" charset="0"/>
+              <a:buChar char="•"/>
+              <a:defRPr sz="1600" kern="1200">
+                <a:solidFill>
+                  <a:schemeClr val="tx1"/>
+                </a:solidFill>
+                <a:latin typeface="+mn-lt"/>
+                <a:ea typeface="+mn-ea"/>
+                <a:cs typeface="+mn-cs"/>
+              </a:defRPr>
+            </a:lvl3pPr>
+            <a:lvl4pPr marL="1600200" indent="-228600" algn="l" defTabSz="914400" rtl="0" eaLnBrk="1" latinLnBrk="0" hangingPunct="1">
+              <a:lnSpc>
+                <a:spcPct val="90000"/>
+              </a:lnSpc>
+              <a:spcBef>
+                <a:spcPts val="500"/>
+              </a:spcBef>
+              <a:buFont typeface="Arial" panose="020B0604020202020204" pitchFamily="34" charset="0"/>
+              <a:buChar char="•"/>
+              <a:defRPr sz="1800" kern="1200">
+                <a:solidFill>
+                  <a:schemeClr val="tx1"/>
+                </a:solidFill>
+                <a:latin typeface="+mn-lt"/>
+                <a:ea typeface="+mn-ea"/>
+                <a:cs typeface="+mn-cs"/>
+              </a:defRPr>
+            </a:lvl4pPr>
+            <a:lvl5pPr marL="2057400" indent="-228600" algn="l" defTabSz="914400" rtl="0" eaLnBrk="1" latinLnBrk="0" hangingPunct="1">
+              <a:lnSpc>
+                <a:spcPct val="90000"/>
+              </a:lnSpc>
+              <a:spcBef>
+                <a:spcPts val="500"/>
+              </a:spcBef>
+              <a:buFont typeface="Arial" panose="020B0604020202020204" pitchFamily="34" charset="0"/>
+              <a:buChar char="•"/>
+              <a:defRPr sz="1800" kern="1200">
+                <a:solidFill>
+                  <a:schemeClr val="tx1"/>
+                </a:solidFill>
+                <a:latin typeface="+mn-lt"/>
+                <a:ea typeface="+mn-ea"/>
+                <a:cs typeface="+mn-cs"/>
+              </a:defRPr>
+            </a:lvl5pPr>
+            <a:lvl6pPr marL="2514600" indent="-228600" algn="l" defTabSz="914400" rtl="0" eaLnBrk="1" latinLnBrk="0" hangingPunct="1">
+              <a:lnSpc>
+                <a:spcPct val="90000"/>
+              </a:lnSpc>
+              <a:spcBef>
+                <a:spcPts val="500"/>
+              </a:spcBef>
+              <a:buFont typeface="Arial" panose="020B0604020202020204" pitchFamily="34" charset="0"/>
+              <a:buChar char="•"/>
+              <a:defRPr sz="1800" kern="1200">
+                <a:solidFill>
+                  <a:schemeClr val="tx1"/>
+                </a:solidFill>
+                <a:latin typeface="+mn-lt"/>
+                <a:ea typeface="+mn-ea"/>
+                <a:cs typeface="+mn-cs"/>
+              </a:defRPr>
+            </a:lvl6pPr>
+            <a:lvl7pPr marL="2971800" indent="-228600" algn="l" defTabSz="914400" rtl="0" eaLnBrk="1" latinLnBrk="0" hangingPunct="1">
+              <a:lnSpc>
+                <a:spcPct val="90000"/>
+              </a:lnSpc>
+              <a:spcBef>
+                <a:spcPts val="500"/>
+              </a:spcBef>
+              <a:buFont typeface="Arial" panose="020B0604020202020204" pitchFamily="34" charset="0"/>
+              <a:buChar char="•"/>
+              <a:defRPr sz="1800" kern="1200">
+                <a:solidFill>
+                  <a:schemeClr val="tx1"/>
+                </a:solidFill>
+                <a:latin typeface="+mn-lt"/>
+                <a:ea typeface="+mn-ea"/>
+                <a:cs typeface="+mn-cs"/>
+              </a:defRPr>
+            </a:lvl7pPr>
+            <a:lvl8pPr marL="3429000" indent="-228600" algn="l" defTabSz="914400" rtl="0" eaLnBrk="1" latinLnBrk="0" hangingPunct="1">
+              <a:lnSpc>
+                <a:spcPct val="90000"/>
+              </a:lnSpc>
+              <a:spcBef>
+                <a:spcPts val="500"/>
+              </a:spcBef>
+              <a:buFont typeface="Arial" panose="020B0604020202020204" pitchFamily="34" charset="0"/>
+              <a:buChar char="•"/>
+              <a:defRPr sz="1800" kern="1200">
+                <a:solidFill>
+                  <a:schemeClr val="tx1"/>
+                </a:solidFill>
+                <a:latin typeface="+mn-lt"/>
+                <a:ea typeface="+mn-ea"/>
+                <a:cs typeface="+mn-cs"/>
+              </a:defRPr>
+            </a:lvl8pPr>
+            <a:lvl9pPr marL="3886200" indent="-228600" algn="l" defTabSz="914400" rtl="0" eaLnBrk="1" latinLnBrk="0" hangingPunct="1">
+              <a:lnSpc>
+                <a:spcPct val="90000"/>
+              </a:lnSpc>
+              <a:spcBef>
+                <a:spcPts val="500"/>
+              </a:spcBef>
+              <a:buFont typeface="Arial" panose="020B0604020202020204" pitchFamily="34" charset="0"/>
+              <a:buChar char="•"/>
+              <a:defRPr sz="1800" kern="1200">
+                <a:solidFill>
+                  <a:schemeClr val="tx1"/>
+                </a:solidFill>
+                <a:latin typeface="+mn-lt"/>
+                <a:ea typeface="+mn-ea"/>
+                <a:cs typeface="+mn-cs"/>
+              </a:defRPr>
+            </a:lvl9pPr>
+          </a:lstStyle>
+          <a:p>
+            <a:pPr marL="457200" lvl="1" indent="0">
+              <a:buFont typeface="Arial" panose="020B0604020202020204" pitchFamily="34" charset="0"/>
+              <a:buNone/>
+            </a:pPr>
+            <a:endParaRPr lang="en-US" dirty="0"/>
+          </a:p>
+        </p:txBody>
+      </p:sp>
+      <p:sp>
+        <p:nvSpPr>
+          <p:cNvPr id="12" name="Text Placeholder 4">
+            <a:extLst>
+              <a:ext uri="{FF2B5EF4-FFF2-40B4-BE49-F238E27FC236}">
+                <a16:creationId xmlns:a16="http://schemas.microsoft.com/office/drawing/2014/main" id="{3DDB37DA-DBD5-3835-8CC8-3EC57726A44D}"/>
+              </a:ext>
+            </a:extLst>
+          </p:cNvPr>
+          <p:cNvSpPr txBox="1">
+            <a:spLocks/>
+          </p:cNvSpPr>
+          <p:nvPr/>
+        </p:nvSpPr>
+        <p:spPr>
+          <a:xfrm>
+            <a:off x="695325" y="3020182"/>
+            <a:ext cx="11303356" cy="1577702"/>
+          </a:xfrm>
+          <a:prstGeom prst="rect">
+            <a:avLst/>
+          </a:prstGeom>
+        </p:spPr>
+        <p:txBody>
+          <a:bodyPr/>
+          <a:lstStyle>
+            <a:lvl1pPr marL="228600" indent="-228600" algn="l" defTabSz="914400" rtl="0" eaLnBrk="1" latinLnBrk="0" hangingPunct="1">
+              <a:lnSpc>
+                <a:spcPct val="90000"/>
+              </a:lnSpc>
+              <a:spcBef>
+                <a:spcPts val="1000"/>
+              </a:spcBef>
+              <a:buFont typeface="Arial" panose="020B0604020202020204" pitchFamily="34" charset="0"/>
+              <a:buChar char="•"/>
+              <a:defRPr sz="2000" kern="1200">
+                <a:solidFill>
+                  <a:schemeClr val="tx1"/>
+                </a:solidFill>
+                <a:latin typeface="+mn-lt"/>
+                <a:ea typeface="+mn-ea"/>
+                <a:cs typeface="+mn-cs"/>
+              </a:defRPr>
+            </a:lvl1pPr>
+            <a:lvl2pPr marL="685800" indent="-228600" algn="l" defTabSz="914400" rtl="0" eaLnBrk="1" latinLnBrk="0" hangingPunct="1">
+              <a:lnSpc>
+                <a:spcPct val="90000"/>
+              </a:lnSpc>
+              <a:spcBef>
+                <a:spcPts val="500"/>
+              </a:spcBef>
+              <a:buFont typeface="Arial" panose="020B0604020202020204" pitchFamily="34" charset="0"/>
+              <a:buChar char="•"/>
+              <a:defRPr sz="1800" kern="1200">
+                <a:solidFill>
+                  <a:schemeClr val="tx1"/>
+                </a:solidFill>
+                <a:latin typeface="+mn-lt"/>
+                <a:ea typeface="+mn-ea"/>
+                <a:cs typeface="+mn-cs"/>
+              </a:defRPr>
+            </a:lvl2pPr>
+            <a:lvl3pPr marL="1143000" indent="-228600" algn="l" defTabSz="914400" rtl="0" eaLnBrk="1" latinLnBrk="0" hangingPunct="1">
+              <a:lnSpc>
+                <a:spcPct val="90000"/>
+              </a:lnSpc>
+              <a:spcBef>
+                <a:spcPts val="500"/>
+              </a:spcBef>
+              <a:buFont typeface="Arial" panose="020B0604020202020204" pitchFamily="34" charset="0"/>
+              <a:buChar char="•"/>
+              <a:defRPr sz="1600" kern="1200">
+                <a:solidFill>
+                  <a:schemeClr val="tx1"/>
+                </a:solidFill>
+                <a:latin typeface="+mn-lt"/>
+                <a:ea typeface="+mn-ea"/>
+                <a:cs typeface="+mn-cs"/>
+              </a:defRPr>
+            </a:lvl3pPr>
+            <a:lvl4pPr marL="1600200" indent="-228600" algn="l" defTabSz="914400" rtl="0" eaLnBrk="1" latinLnBrk="0" hangingPunct="1">
+              <a:lnSpc>
+                <a:spcPct val="90000"/>
+              </a:lnSpc>
+              <a:spcBef>
+                <a:spcPts val="500"/>
+              </a:spcBef>
+              <a:buFont typeface="Arial" panose="020B0604020202020204" pitchFamily="34" charset="0"/>
+              <a:buChar char="•"/>
+              <a:defRPr sz="1800" kern="1200">
+                <a:solidFill>
+                  <a:schemeClr val="tx1"/>
+                </a:solidFill>
+                <a:latin typeface="+mn-lt"/>
+                <a:ea typeface="+mn-ea"/>
+                <a:cs typeface="+mn-cs"/>
+              </a:defRPr>
+            </a:lvl4pPr>
+            <a:lvl5pPr marL="2057400" indent="-228600" algn="l" defTabSz="914400" rtl="0" eaLnBrk="1" latinLnBrk="0" hangingPunct="1">
+              <a:lnSpc>
+                <a:spcPct val="90000"/>
+              </a:lnSpc>
+              <a:spcBef>
+                <a:spcPts val="500"/>
+              </a:spcBef>
+              <a:buFont typeface="Arial" panose="020B0604020202020204" pitchFamily="34" charset="0"/>
+              <a:buChar char="•"/>
+              <a:defRPr sz="1800" kern="1200">
+                <a:solidFill>
+                  <a:schemeClr val="tx1"/>
+                </a:solidFill>
+                <a:latin typeface="+mn-lt"/>
+                <a:ea typeface="+mn-ea"/>
+                <a:cs typeface="+mn-cs"/>
+              </a:defRPr>
+            </a:lvl5pPr>
+            <a:lvl6pPr marL="2514600" indent="-228600" algn="l" defTabSz="914400" rtl="0" eaLnBrk="1" latinLnBrk="0" hangingPunct="1">
+              <a:lnSpc>
+                <a:spcPct val="90000"/>
+              </a:lnSpc>
+              <a:spcBef>
+                <a:spcPts val="500"/>
+              </a:spcBef>
+              <a:buFont typeface="Arial" panose="020B0604020202020204" pitchFamily="34" charset="0"/>
+              <a:buChar char="•"/>
+              <a:defRPr sz="1800" kern="1200">
+                <a:solidFill>
+                  <a:schemeClr val="tx1"/>
+                </a:solidFill>
+                <a:latin typeface="+mn-lt"/>
+                <a:ea typeface="+mn-ea"/>
+                <a:cs typeface="+mn-cs"/>
+              </a:defRPr>
+            </a:lvl6pPr>
+            <a:lvl7pPr marL="2971800" indent="-228600" algn="l" defTabSz="914400" rtl="0" eaLnBrk="1" latinLnBrk="0" hangingPunct="1">
+              <a:lnSpc>
+                <a:spcPct val="90000"/>
+              </a:lnSpc>
+              <a:spcBef>
+                <a:spcPts val="500"/>
+              </a:spcBef>
+              <a:buFont typeface="Arial" panose="020B0604020202020204" pitchFamily="34" charset="0"/>
+              <a:buChar char="•"/>
+              <a:defRPr sz="1800" kern="1200">
+                <a:solidFill>
+                  <a:schemeClr val="tx1"/>
+                </a:solidFill>
+                <a:latin typeface="+mn-lt"/>
+                <a:ea typeface="+mn-ea"/>
+                <a:cs typeface="+mn-cs"/>
+              </a:defRPr>
+            </a:lvl7pPr>
+            <a:lvl8pPr marL="3429000" indent="-228600" algn="l" defTabSz="914400" rtl="0" eaLnBrk="1" latinLnBrk="0" hangingPunct="1">
+              <a:lnSpc>
+                <a:spcPct val="90000"/>
+              </a:lnSpc>
+              <a:spcBef>
+                <a:spcPts val="500"/>
+              </a:spcBef>
+              <a:buFont typeface="Arial" panose="020B0604020202020204" pitchFamily="34" charset="0"/>
+              <a:buChar char="•"/>
+              <a:defRPr sz="1800" kern="1200">
+                <a:solidFill>
+                  <a:schemeClr val="tx1"/>
+                </a:solidFill>
+                <a:latin typeface="+mn-lt"/>
+                <a:ea typeface="+mn-ea"/>
+                <a:cs typeface="+mn-cs"/>
+              </a:defRPr>
+            </a:lvl8pPr>
+            <a:lvl9pPr marL="3886200" indent="-228600" algn="l" defTabSz="914400" rtl="0" eaLnBrk="1" latinLnBrk="0" hangingPunct="1">
+              <a:lnSpc>
+                <a:spcPct val="90000"/>
+              </a:lnSpc>
+              <a:spcBef>
+                <a:spcPts val="500"/>
+              </a:spcBef>
+              <a:buFont typeface="Arial" panose="020B0604020202020204" pitchFamily="34" charset="0"/>
+              <a:buChar char="•"/>
+              <a:defRPr sz="1800" kern="1200">
+                <a:solidFill>
+                  <a:schemeClr val="tx1"/>
+                </a:solidFill>
+                <a:latin typeface="+mn-lt"/>
+                <a:ea typeface="+mn-ea"/>
+                <a:cs typeface="+mn-cs"/>
+              </a:defRPr>
+            </a:lvl9pPr>
+          </a:lstStyle>
+          <a:p>
+            <a:pPr marL="0" indent="0">
+              <a:buFont typeface="Arial" panose="020B0604020202020204" pitchFamily="34" charset="0"/>
+              <a:buNone/>
+            </a:pPr>
+            <a:r>
+              <a:rPr lang="en-US" sz="1200" dirty="0" err="1"/>
+              <a:t>Organisation</a:t>
+            </a:r>
+            <a:r>
+              <a:rPr lang="en-US" sz="1200" dirty="0"/>
+              <a:t> </a:t>
+            </a:r>
+            <a:r>
+              <a:rPr lang="en-US" sz="1200" dirty="0" err="1"/>
+              <a:t>ausschließlich</a:t>
+            </a:r>
+            <a:r>
+              <a:rPr lang="en-US" sz="1200" dirty="0"/>
+              <a:t> </a:t>
+            </a:r>
+            <a:r>
+              <a:rPr lang="en-US" sz="1200" dirty="0" err="1"/>
+              <a:t>über</a:t>
+            </a:r>
+            <a:r>
+              <a:rPr lang="en-US" sz="1200" dirty="0"/>
+              <a:t> GitHub:</a:t>
+            </a:r>
+          </a:p>
+          <a:p>
+            <a:pPr marL="0" indent="0">
+              <a:buFont typeface="Arial" panose="020B0604020202020204" pitchFamily="34" charset="0"/>
+              <a:buNone/>
+            </a:pPr>
+            <a:r>
+              <a:rPr lang="en-US" sz="1200" dirty="0"/>
+              <a:t>Sprints: GitHub Milestones</a:t>
+            </a:r>
+          </a:p>
+          <a:p>
+            <a:pPr marL="0" indent="0">
+              <a:buFont typeface="Arial" panose="020B0604020202020204" pitchFamily="34" charset="0"/>
+              <a:buNone/>
+            </a:pPr>
+            <a:r>
+              <a:rPr lang="en-US" sz="1200" dirty="0"/>
+              <a:t>Tickets: </a:t>
+            </a:r>
+            <a:r>
+              <a:rPr lang="en-US" sz="1200" dirty="0" err="1"/>
+              <a:t>Github</a:t>
+            </a:r>
+            <a:r>
+              <a:rPr lang="en-US" sz="1200" dirty="0"/>
+              <a:t> Issues (</a:t>
+            </a:r>
+            <a:r>
+              <a:rPr lang="en-US" sz="1200" dirty="0" err="1"/>
+              <a:t>Zuteilung</a:t>
+            </a:r>
+            <a:r>
+              <a:rPr lang="en-US" sz="1200" dirty="0"/>
+              <a:t> / </a:t>
+            </a:r>
+            <a:r>
+              <a:rPr lang="en-US" sz="1200" dirty="0" err="1"/>
+              <a:t>Priorisierung</a:t>
+            </a:r>
+            <a:r>
+              <a:rPr lang="en-US" sz="1200" dirty="0"/>
+              <a:t> / </a:t>
+            </a:r>
+            <a:r>
+              <a:rPr lang="en-US" sz="1200" dirty="0" err="1"/>
+              <a:t>Schätzung</a:t>
+            </a:r>
+            <a:r>
+              <a:rPr lang="en-US" sz="1200" dirty="0"/>
+              <a:t>)</a:t>
+            </a:r>
+          </a:p>
+          <a:p>
+            <a:pPr marL="0" indent="0">
+              <a:buFont typeface="Arial" panose="020B0604020202020204" pitchFamily="34" charset="0"/>
+              <a:buNone/>
+            </a:pPr>
+            <a:r>
+              <a:rPr lang="en-US" sz="1200" dirty="0"/>
+              <a:t>- Epyc’s </a:t>
+            </a:r>
+            <a:r>
+              <a:rPr lang="en-US" sz="1200" dirty="0" err="1"/>
+              <a:t>als</a:t>
+            </a:r>
+            <a:r>
+              <a:rPr lang="en-US" sz="1200" dirty="0"/>
+              <a:t> Parents </a:t>
+            </a:r>
+            <a:r>
+              <a:rPr lang="en-US" sz="1200" dirty="0" err="1"/>
+              <a:t>angelegt</a:t>
+            </a:r>
+            <a:r>
+              <a:rPr lang="en-US" sz="1200" dirty="0"/>
+              <a:t> – Sub Issues für Tasks/User Stories</a:t>
+            </a:r>
+          </a:p>
+          <a:p>
+            <a:pPr marL="0" indent="0">
+              <a:buFont typeface="Arial" panose="020B0604020202020204" pitchFamily="34" charset="0"/>
+              <a:buNone/>
+            </a:pPr>
+            <a:r>
+              <a:rPr lang="en-US" sz="1200" dirty="0"/>
+              <a:t>Tracking: GitHub Projects – Kanban Board (Backlog, Ready, In Progress, In Review, Done)</a:t>
+            </a:r>
+          </a:p>
+          <a:p>
+            <a:pPr marL="0" indent="0">
+              <a:buFont typeface="Arial" panose="020B0604020202020204" pitchFamily="34" charset="0"/>
+              <a:buNone/>
+            </a:pPr>
+            <a:endParaRPr lang="en-US" sz="1200" dirty="0"/>
+          </a:p>
+          <a:p>
+            <a:pPr marL="0" indent="0">
+              <a:buNone/>
+            </a:pPr>
+            <a:r>
+              <a:rPr lang="en-US" sz="1200" dirty="0" err="1"/>
+              <a:t>Sprintdauer</a:t>
+            </a:r>
+            <a:r>
+              <a:rPr lang="en-US" sz="1200" dirty="0"/>
+              <a:t>: 2 </a:t>
+            </a:r>
+            <a:r>
+              <a:rPr lang="en-US" sz="1200" dirty="0" err="1"/>
+              <a:t>Wochen</a:t>
+            </a:r>
+            <a:r>
+              <a:rPr lang="en-US" sz="1200" dirty="0"/>
+              <a:t> (</a:t>
+            </a:r>
+            <a:r>
+              <a:rPr lang="en-US" sz="1200" dirty="0" err="1"/>
+              <a:t>nach</a:t>
+            </a:r>
+            <a:r>
+              <a:rPr lang="en-US" sz="1200" dirty="0"/>
+              <a:t> 1 </a:t>
+            </a:r>
+            <a:r>
+              <a:rPr lang="en-US" sz="1200" dirty="0" err="1"/>
+              <a:t>Woche</a:t>
+            </a:r>
+            <a:r>
+              <a:rPr lang="en-US" sz="1200" dirty="0"/>
+              <a:t> Refinement, am Ende Review into Planning)</a:t>
+            </a:r>
+          </a:p>
+          <a:p>
+            <a:pPr marL="0" indent="0">
+              <a:buNone/>
+            </a:pPr>
+            <a:r>
+              <a:rPr lang="en-US" sz="1200" dirty="0" err="1"/>
+              <a:t>Zeitlich</a:t>
+            </a:r>
+            <a:r>
+              <a:rPr lang="en-US" sz="1200" dirty="0"/>
+              <a:t>:</a:t>
+            </a:r>
+          </a:p>
+          <a:p>
+            <a:pPr>
+              <a:buFontTx/>
+              <a:buChar char="-"/>
+            </a:pPr>
+            <a:r>
+              <a:rPr lang="en-US" sz="1200" dirty="0" err="1"/>
+              <a:t>Mittwoch</a:t>
+            </a:r>
+            <a:r>
+              <a:rPr lang="en-US" sz="1200" dirty="0"/>
+              <a:t>: Planning / Refinement</a:t>
+            </a:r>
+          </a:p>
+          <a:p>
+            <a:pPr>
+              <a:buFontTx/>
+              <a:buChar char="-"/>
+            </a:pPr>
+            <a:r>
+              <a:rPr lang="en-US" sz="1200" dirty="0"/>
+              <a:t>Freitag (“Start” / Review) </a:t>
+            </a:r>
+          </a:p>
+          <a:p>
+            <a:pPr>
+              <a:buFontTx/>
+              <a:buChar char="-"/>
+            </a:pPr>
+            <a:r>
+              <a:rPr lang="en-US" sz="1200" dirty="0"/>
+              <a:t>Dienstag (</a:t>
+            </a:r>
+            <a:r>
+              <a:rPr lang="en-US" sz="1200" dirty="0" err="1"/>
+              <a:t>Optionales</a:t>
+            </a:r>
+            <a:r>
+              <a:rPr lang="en-US" sz="1200" dirty="0"/>
+              <a:t> </a:t>
+            </a:r>
+            <a:r>
+              <a:rPr lang="en-US" sz="1200" dirty="0" err="1"/>
+              <a:t>Halfweekly</a:t>
+            </a:r>
+            <a:r>
+              <a:rPr lang="en-US" sz="1200" dirty="0"/>
+              <a:t>)</a:t>
+            </a:r>
+          </a:p>
+        </p:txBody>
+      </p:sp>
+    </p:spTree>
+    <p:extLst>
+      <p:ext uri="{BB962C8B-B14F-4D97-AF65-F5344CB8AC3E}">
+        <p14:creationId xmlns:p14="http://schemas.microsoft.com/office/powerpoint/2010/main" val="4200083589"/>
+      </p:ext>
+    </p:extLst>
+  </p:cSld>
+  <p:clrMapOvr>
+    <a:masterClrMapping/>
+  </p:clrMapOvr>
+</p:sld>
+</file>
+
+<file path=ppt/slides/slide6.xml><?xml version="1.0" encoding="utf-8"?>
+<p:sld xmlns:a="http://schemas.openxmlformats.org/drawingml/2006/main" xmlns:r="http://schemas.openxmlformats.org/officeDocument/2006/relationships" xmlns:p="http://schemas.openxmlformats.org/presentationml/2006/main">
+  <p:cSld>
+    <p:spTree>
+      <p:nvGrpSpPr>
+        <p:cNvPr id="1" name="">
+          <a:extLst>
+            <a:ext uri="{FF2B5EF4-FFF2-40B4-BE49-F238E27FC236}">
+              <a16:creationId xmlns:a16="http://schemas.microsoft.com/office/drawing/2014/main" id="{55625DC6-1902-DBD6-F904-D9E92CD8857E}"/>
+            </a:ext>
+          </a:extLst>
+        </p:cNvPr>
+        <p:cNvGrpSpPr/>
+        <p:nvPr/>
+      </p:nvGrpSpPr>
+      <p:grpSpPr>
+        <a:xfrm>
+          <a:off x="0" y="0"/>
+          <a:ext cx="0" cy="0"/>
+          <a:chOff x="0" y="0"/>
+          <a:chExt cx="0" cy="0"/>
+        </a:xfrm>
+      </p:grpSpPr>
+      <p:sp>
+        <p:nvSpPr>
+          <p:cNvPr id="2" name="Fußzeilenplatzhalter 1">
+            <a:extLst>
+              <a:ext uri="{FF2B5EF4-FFF2-40B4-BE49-F238E27FC236}">
+                <a16:creationId xmlns:a16="http://schemas.microsoft.com/office/drawing/2014/main" id="{AC78FA6C-F9D4-A8CC-8D58-C7A925F113BD}"/>
+              </a:ext>
+            </a:extLst>
+          </p:cNvPr>
+          <p:cNvSpPr>
+            <a:spLocks noGrp="1"/>
+          </p:cNvSpPr>
+          <p:nvPr>
+            <p:ph type="ftr" sz="quarter" idx="26"/>
+          </p:nvPr>
+        </p:nvSpPr>
+        <p:spPr/>
+        <p:txBody>
+          <a:bodyPr/>
+          <a:lstStyle/>
+          <a:p>
+            <a:r>
+              <a:rPr lang="de-DE"/>
+              <a:t>KI Projekt | Sina Brunner, Lars Nettersheim, John Schwarz, Leon Ulbrich, Felix Wensky </a:t>
+            </a:r>
+            <a:endParaRPr lang="de-DE" dirty="0"/>
+          </a:p>
+        </p:txBody>
+      </p:sp>
+      <p:sp>
+        <p:nvSpPr>
+          <p:cNvPr id="3" name="Foliennummernplatzhalter 2">
+            <a:extLst>
+              <a:ext uri="{FF2B5EF4-FFF2-40B4-BE49-F238E27FC236}">
+                <a16:creationId xmlns:a16="http://schemas.microsoft.com/office/drawing/2014/main" id="{F91EEE1D-E08F-667B-3DCA-4B1C0F388891}"/>
+              </a:ext>
+            </a:extLst>
+          </p:cNvPr>
+          <p:cNvSpPr>
+            <a:spLocks noGrp="1"/>
+          </p:cNvSpPr>
+          <p:nvPr>
+            <p:ph type="sldNum" sz="quarter" idx="4"/>
+          </p:nvPr>
+        </p:nvSpPr>
+        <p:spPr/>
+        <p:txBody>
+          <a:bodyPr/>
+          <a:lstStyle/>
+          <a:p>
+            <a:fld id="{E7298502-BA22-4927-B2ED-0A18FFA86FFE}" type="slidenum">
+              <a:rPr lang="de-DE" smtClean="0"/>
+              <a:pPr/>
+              <a:t>6</a:t>
+            </a:fld>
+            <a:endParaRPr lang="de-DE" dirty="0"/>
+          </a:p>
+        </p:txBody>
+      </p:sp>
+      <p:cxnSp>
+        <p:nvCxnSpPr>
+          <p:cNvPr id="8" name="Gerader Verbinder 7">
+            <a:extLst>
+              <a:ext uri="{FF2B5EF4-FFF2-40B4-BE49-F238E27FC236}">
+                <a16:creationId xmlns:a16="http://schemas.microsoft.com/office/drawing/2014/main" id="{9F4BCE37-B016-D519-A5E8-4DA9B84E59EA}"/>
+              </a:ext>
+            </a:extLst>
+          </p:cNvPr>
+          <p:cNvCxnSpPr>
+            <a:cxnSpLocks/>
+          </p:cNvCxnSpPr>
+          <p:nvPr/>
+        </p:nvCxnSpPr>
+        <p:spPr>
+          <a:xfrm>
+            <a:off x="713582" y="746389"/>
+            <a:ext cx="0" cy="468000"/>
+          </a:xfrm>
+          <a:prstGeom prst="line">
+            <a:avLst/>
+          </a:prstGeom>
+          <a:ln w="28575"/>
+        </p:spPr>
+        <p:style>
+          <a:lnRef idx="1">
+            <a:schemeClr val="accent1"/>
+          </a:lnRef>
+          <a:fillRef idx="0">
+            <a:schemeClr val="accent1"/>
+          </a:fillRef>
+          <a:effectRef idx="0">
+            <a:schemeClr val="accent1"/>
+          </a:effectRef>
+          <a:fontRef idx="minor">
+            <a:schemeClr val="tx1"/>
+          </a:fontRef>
+        </p:style>
+      </p:cxnSp>
+      <p:sp>
+        <p:nvSpPr>
+          <p:cNvPr id="9" name="Textplatzhalter 12">
+            <a:extLst>
+              <a:ext uri="{FF2B5EF4-FFF2-40B4-BE49-F238E27FC236}">
+                <a16:creationId xmlns:a16="http://schemas.microsoft.com/office/drawing/2014/main" id="{DD1EACA9-50FA-55A0-E80F-DD97D421C801}"/>
+              </a:ext>
+            </a:extLst>
+          </p:cNvPr>
+          <p:cNvSpPr>
+            <a:spLocks noGrp="1"/>
+          </p:cNvSpPr>
+          <p:nvPr>
+            <p:ph type="body" sz="quarter" idx="13" hasCustomPrompt="1"/>
+          </p:nvPr>
+        </p:nvSpPr>
+        <p:spPr>
+          <a:xfrm>
+            <a:off x="695325" y="199474"/>
+            <a:ext cx="10119053" cy="468000"/>
+          </a:xfrm>
+          <a:prstGeom prst="rect">
+            <a:avLst/>
+          </a:prstGeom>
+        </p:spPr>
+        <p:txBody>
+          <a:bodyPr anchor="t">
+            <a:noAutofit/>
+          </a:bodyPr>
+          <a:lstStyle>
+            <a:lvl1pPr marL="0" indent="0">
+              <a:buNone/>
+              <a:defRPr sz="3000" b="1" cap="none" baseline="0"/>
+            </a:lvl1pPr>
+            <a:lvl2pPr>
+              <a:defRPr sz="2900" b="1" cap="all" baseline="0"/>
+            </a:lvl2pPr>
+            <a:lvl3pPr>
+              <a:defRPr sz="2900" b="1" cap="all" baseline="0"/>
+            </a:lvl3pPr>
+            <a:lvl4pPr>
+              <a:defRPr sz="2900" b="1" cap="all" baseline="0"/>
+            </a:lvl4pPr>
+            <a:lvl5pPr>
+              <a:defRPr sz="2900" b="1" cap="all" baseline="0"/>
+            </a:lvl5pPr>
+          </a:lstStyle>
+          <a:p>
+            <a:r>
+              <a:rPr lang="de-DE" dirty="0"/>
+              <a:t>Ist-Zustand</a:t>
+            </a:r>
+          </a:p>
+        </p:txBody>
+      </p:sp>
+      <p:sp>
+        <p:nvSpPr>
+          <p:cNvPr id="10" name="Textplatzhalter 20">
+            <a:extLst>
+              <a:ext uri="{FF2B5EF4-FFF2-40B4-BE49-F238E27FC236}">
+                <a16:creationId xmlns:a16="http://schemas.microsoft.com/office/drawing/2014/main" id="{6C36328A-AEA8-480E-0400-565E1035F182}"/>
+              </a:ext>
+            </a:extLst>
+          </p:cNvPr>
+          <p:cNvSpPr>
+            <a:spLocks noGrp="1"/>
+          </p:cNvSpPr>
+          <p:nvPr>
+            <p:ph type="body" sz="quarter" idx="25" hasCustomPrompt="1"/>
+          </p:nvPr>
+        </p:nvSpPr>
+        <p:spPr>
+          <a:xfrm>
+            <a:off x="710624" y="813558"/>
+            <a:ext cx="10119052" cy="338138"/>
+          </a:xfrm>
+          <a:prstGeom prst="rect">
+            <a:avLst/>
+          </a:prstGeom>
+        </p:spPr>
+        <p:txBody>
+          <a:bodyPr/>
+          <a:lstStyle>
+            <a:lvl1pPr marL="0" indent="0">
+              <a:buNone/>
+              <a:defRPr sz="2000" b="1"/>
+            </a:lvl1pPr>
+          </a:lstStyle>
+          <a:p>
+            <a:pPr lvl="0"/>
+            <a:r>
+              <a:rPr lang="de-DE" dirty="0"/>
+              <a:t>Projektstand</a:t>
+            </a:r>
+          </a:p>
+        </p:txBody>
+      </p:sp>
+      <p:sp>
+        <p:nvSpPr>
+          <p:cNvPr id="4" name="Text Placeholder 4">
+            <a:extLst>
+              <a:ext uri="{FF2B5EF4-FFF2-40B4-BE49-F238E27FC236}">
+                <a16:creationId xmlns:a16="http://schemas.microsoft.com/office/drawing/2014/main" id="{678F4151-A284-1A6D-2024-964A168171A1}"/>
+              </a:ext>
+            </a:extLst>
+          </p:cNvPr>
+          <p:cNvSpPr txBox="1">
+            <a:spLocks/>
+          </p:cNvSpPr>
+          <p:nvPr/>
+        </p:nvSpPr>
+        <p:spPr>
+          <a:xfrm>
+            <a:off x="710624" y="3142810"/>
+            <a:ext cx="11303356" cy="1464415"/>
+          </a:xfrm>
+          <a:prstGeom prst="rect">
+            <a:avLst/>
+          </a:prstGeom>
+        </p:spPr>
+        <p:txBody>
+          <a:bodyPr/>
+          <a:lstStyle>
+            <a:lvl1pPr marL="228600" indent="-228600" algn="l" defTabSz="914400" rtl="0" eaLnBrk="1" latinLnBrk="0" hangingPunct="1">
+              <a:lnSpc>
+                <a:spcPct val="90000"/>
+              </a:lnSpc>
+              <a:spcBef>
+                <a:spcPts val="1000"/>
+              </a:spcBef>
+              <a:buFont typeface="Arial" panose="020B0604020202020204" pitchFamily="34" charset="0"/>
+              <a:buChar char="•"/>
+              <a:defRPr sz="2000" kern="1200">
+                <a:solidFill>
+                  <a:schemeClr val="tx1"/>
+                </a:solidFill>
+                <a:latin typeface="+mn-lt"/>
+                <a:ea typeface="+mn-ea"/>
+                <a:cs typeface="+mn-cs"/>
+              </a:defRPr>
+            </a:lvl1pPr>
+            <a:lvl2pPr marL="685800" indent="-228600" algn="l" defTabSz="914400" rtl="0" eaLnBrk="1" latinLnBrk="0" hangingPunct="1">
+              <a:lnSpc>
+                <a:spcPct val="90000"/>
+              </a:lnSpc>
+              <a:spcBef>
+                <a:spcPts val="500"/>
+              </a:spcBef>
+              <a:buFont typeface="Arial" panose="020B0604020202020204" pitchFamily="34" charset="0"/>
+              <a:buChar char="•"/>
+              <a:defRPr sz="1800" kern="1200">
+                <a:solidFill>
+                  <a:schemeClr val="tx1"/>
+                </a:solidFill>
+                <a:latin typeface="+mn-lt"/>
+                <a:ea typeface="+mn-ea"/>
+                <a:cs typeface="+mn-cs"/>
+              </a:defRPr>
+            </a:lvl2pPr>
+            <a:lvl3pPr marL="1143000" indent="-228600" algn="l" defTabSz="914400" rtl="0" eaLnBrk="1" latinLnBrk="0" hangingPunct="1">
+              <a:lnSpc>
+                <a:spcPct val="90000"/>
+              </a:lnSpc>
+              <a:spcBef>
+                <a:spcPts val="500"/>
+              </a:spcBef>
+              <a:buFont typeface="Arial" panose="020B0604020202020204" pitchFamily="34" charset="0"/>
+              <a:buChar char="•"/>
+              <a:defRPr sz="1600" kern="1200">
+                <a:solidFill>
+                  <a:schemeClr val="tx1"/>
+                </a:solidFill>
+                <a:latin typeface="+mn-lt"/>
+                <a:ea typeface="+mn-ea"/>
+                <a:cs typeface="+mn-cs"/>
+              </a:defRPr>
+            </a:lvl3pPr>
+            <a:lvl4pPr marL="1600200" indent="-228600" algn="l" defTabSz="914400" rtl="0" eaLnBrk="1" latinLnBrk="0" hangingPunct="1">
+              <a:lnSpc>
+                <a:spcPct val="90000"/>
+              </a:lnSpc>
+              <a:spcBef>
+                <a:spcPts val="500"/>
+              </a:spcBef>
+              <a:buFont typeface="Arial" panose="020B0604020202020204" pitchFamily="34" charset="0"/>
+              <a:buChar char="•"/>
+              <a:defRPr sz="1800" kern="1200">
+                <a:solidFill>
+                  <a:schemeClr val="tx1"/>
+                </a:solidFill>
+                <a:latin typeface="+mn-lt"/>
+                <a:ea typeface="+mn-ea"/>
+                <a:cs typeface="+mn-cs"/>
+              </a:defRPr>
+            </a:lvl4pPr>
+            <a:lvl5pPr marL="2057400" indent="-228600" algn="l" defTabSz="914400" rtl="0" eaLnBrk="1" latinLnBrk="0" hangingPunct="1">
+              <a:lnSpc>
+                <a:spcPct val="90000"/>
+              </a:lnSpc>
+              <a:spcBef>
+                <a:spcPts val="500"/>
+              </a:spcBef>
+              <a:buFont typeface="Arial" panose="020B0604020202020204" pitchFamily="34" charset="0"/>
+              <a:buChar char="•"/>
+              <a:defRPr sz="1800" kern="1200">
+                <a:solidFill>
+                  <a:schemeClr val="tx1"/>
+                </a:solidFill>
+                <a:latin typeface="+mn-lt"/>
+                <a:ea typeface="+mn-ea"/>
+                <a:cs typeface="+mn-cs"/>
+              </a:defRPr>
+            </a:lvl5pPr>
+            <a:lvl6pPr marL="2514600" indent="-228600" algn="l" defTabSz="914400" rtl="0" eaLnBrk="1" latinLnBrk="0" hangingPunct="1">
+              <a:lnSpc>
+                <a:spcPct val="90000"/>
+              </a:lnSpc>
+              <a:spcBef>
+                <a:spcPts val="500"/>
+              </a:spcBef>
+              <a:buFont typeface="Arial" panose="020B0604020202020204" pitchFamily="34" charset="0"/>
+              <a:buChar char="•"/>
+              <a:defRPr sz="1800" kern="1200">
+                <a:solidFill>
+                  <a:schemeClr val="tx1"/>
+                </a:solidFill>
+                <a:latin typeface="+mn-lt"/>
+                <a:ea typeface="+mn-ea"/>
+                <a:cs typeface="+mn-cs"/>
+              </a:defRPr>
+            </a:lvl6pPr>
+            <a:lvl7pPr marL="2971800" indent="-228600" algn="l" defTabSz="914400" rtl="0" eaLnBrk="1" latinLnBrk="0" hangingPunct="1">
+              <a:lnSpc>
+                <a:spcPct val="90000"/>
+              </a:lnSpc>
+              <a:spcBef>
+                <a:spcPts val="500"/>
+              </a:spcBef>
+              <a:buFont typeface="Arial" panose="020B0604020202020204" pitchFamily="34" charset="0"/>
+              <a:buChar char="•"/>
+              <a:defRPr sz="1800" kern="1200">
+                <a:solidFill>
+                  <a:schemeClr val="tx1"/>
+                </a:solidFill>
+                <a:latin typeface="+mn-lt"/>
+                <a:ea typeface="+mn-ea"/>
+                <a:cs typeface="+mn-cs"/>
+              </a:defRPr>
+            </a:lvl7pPr>
+            <a:lvl8pPr marL="3429000" indent="-228600" algn="l" defTabSz="914400" rtl="0" eaLnBrk="1" latinLnBrk="0" hangingPunct="1">
+              <a:lnSpc>
+                <a:spcPct val="90000"/>
+              </a:lnSpc>
+              <a:spcBef>
+                <a:spcPts val="500"/>
+              </a:spcBef>
+              <a:buFont typeface="Arial" panose="020B0604020202020204" pitchFamily="34" charset="0"/>
+              <a:buChar char="•"/>
+              <a:defRPr sz="1800" kern="1200">
+                <a:solidFill>
+                  <a:schemeClr val="tx1"/>
+                </a:solidFill>
+                <a:latin typeface="+mn-lt"/>
+                <a:ea typeface="+mn-ea"/>
+                <a:cs typeface="+mn-cs"/>
+              </a:defRPr>
+            </a:lvl8pPr>
+            <a:lvl9pPr marL="3886200" indent="-228600" algn="l" defTabSz="914400" rtl="0" eaLnBrk="1" latinLnBrk="0" hangingPunct="1">
+              <a:lnSpc>
+                <a:spcPct val="90000"/>
+              </a:lnSpc>
+              <a:spcBef>
+                <a:spcPts val="500"/>
+              </a:spcBef>
+              <a:buFont typeface="Arial" panose="020B0604020202020204" pitchFamily="34" charset="0"/>
+              <a:buChar char="•"/>
+              <a:defRPr sz="1800" kern="1200">
+                <a:solidFill>
+                  <a:schemeClr val="tx1"/>
+                </a:solidFill>
+                <a:latin typeface="+mn-lt"/>
+                <a:ea typeface="+mn-ea"/>
+                <a:cs typeface="+mn-cs"/>
+              </a:defRPr>
+            </a:lvl9pPr>
+          </a:lstStyle>
+          <a:p>
+            <a:pPr marL="457200" lvl="1" indent="0">
+              <a:buFont typeface="Arial" panose="020B0604020202020204" pitchFamily="34" charset="0"/>
+              <a:buNone/>
+            </a:pPr>
+            <a:endParaRPr lang="en-US" dirty="0"/>
+          </a:p>
+        </p:txBody>
+      </p:sp>
+      <p:sp>
+        <p:nvSpPr>
+          <p:cNvPr id="11" name="Text Placeholder 4">
+            <a:extLst>
+              <a:ext uri="{FF2B5EF4-FFF2-40B4-BE49-F238E27FC236}">
+                <a16:creationId xmlns:a16="http://schemas.microsoft.com/office/drawing/2014/main" id="{6AD60C9F-F984-4666-6C1B-96D492D43878}"/>
+              </a:ext>
+            </a:extLst>
+          </p:cNvPr>
+          <p:cNvSpPr>
+            <a:spLocks noGrp="1"/>
+          </p:cNvSpPr>
+          <p:nvPr>
+            <p:ph type="body" sz="quarter" idx="16"/>
+          </p:nvPr>
+        </p:nvSpPr>
+        <p:spPr>
+          <a:xfrm>
+            <a:off x="695325" y="1635624"/>
+            <a:ext cx="11303356" cy="4163514"/>
+          </a:xfrm>
+        </p:spPr>
+        <p:txBody>
+          <a:bodyPr/>
+          <a:lstStyle/>
+          <a:p>
+            <a:pPr marL="0" indent="0">
+              <a:buNone/>
+            </a:pPr>
+            <a:r>
+              <a:rPr lang="en-US" dirty="0"/>
+              <a:t>Wir </a:t>
+            </a:r>
+            <a:r>
+              <a:rPr lang="en-US" dirty="0" err="1"/>
+              <a:t>befinden</a:t>
+            </a:r>
+            <a:r>
+              <a:rPr lang="en-US" dirty="0"/>
+              <a:t> </a:t>
+            </a:r>
+            <a:r>
+              <a:rPr lang="en-US" dirty="0" err="1"/>
+              <a:t>uns</a:t>
+            </a:r>
+            <a:r>
+              <a:rPr lang="en-US" dirty="0"/>
+              <a:t> </a:t>
+            </a:r>
+            <a:r>
+              <a:rPr lang="en-US" dirty="0" err="1"/>
+              <a:t>jetzt</a:t>
+            </a:r>
+            <a:r>
+              <a:rPr lang="en-US" dirty="0"/>
+              <a:t> </a:t>
+            </a:r>
+            <a:r>
+              <a:rPr lang="en-US" dirty="0" err="1"/>
+              <a:t>im</a:t>
+            </a:r>
+            <a:r>
+              <a:rPr lang="en-US" dirty="0"/>
+              <a:t> 3 Sprint</a:t>
+            </a:r>
+          </a:p>
+          <a:p>
+            <a:pPr marL="0" indent="0">
+              <a:buNone/>
+            </a:pPr>
+            <a:r>
+              <a:rPr lang="en-US" dirty="0"/>
+              <a:t>Sprint 1: 6 Tickets – XX </a:t>
+            </a:r>
+            <a:r>
+              <a:rPr lang="en-US" dirty="0" err="1"/>
+              <a:t>Schätzung</a:t>
+            </a:r>
+            <a:r>
+              <a:rPr lang="en-US" dirty="0"/>
+              <a:t> – XX </a:t>
+            </a:r>
+            <a:r>
+              <a:rPr lang="en-US" dirty="0" err="1"/>
+              <a:t>Tatsächlich</a:t>
+            </a:r>
+            <a:endParaRPr lang="en-US" dirty="0"/>
+          </a:p>
+          <a:p>
+            <a:pPr marL="0" indent="0">
+              <a:buNone/>
+            </a:pPr>
+            <a:r>
+              <a:rPr lang="en-US" dirty="0"/>
+              <a:t>Sprint 2: 6 Tickets – XX </a:t>
+            </a:r>
+            <a:r>
+              <a:rPr lang="en-US" dirty="0" err="1"/>
+              <a:t>Schätzung</a:t>
+            </a:r>
+            <a:r>
+              <a:rPr lang="en-US" dirty="0"/>
+              <a:t> – XX </a:t>
+            </a:r>
+            <a:r>
+              <a:rPr lang="en-US" dirty="0" err="1"/>
+              <a:t>Tatsächlich</a:t>
+            </a:r>
+            <a:endParaRPr lang="en-US" dirty="0"/>
+          </a:p>
+          <a:p>
+            <a:pPr marL="0" indent="0">
+              <a:buNone/>
+            </a:pPr>
+            <a:r>
+              <a:rPr lang="en-US" dirty="0"/>
+              <a:t>Sprint 3: 5 Tickets – XX </a:t>
+            </a:r>
+            <a:r>
+              <a:rPr lang="en-US" dirty="0" err="1"/>
+              <a:t>Schätzung</a:t>
+            </a:r>
+            <a:r>
+              <a:rPr lang="en-US" dirty="0"/>
+              <a:t> – XX </a:t>
+            </a:r>
+            <a:r>
+              <a:rPr lang="en-US" dirty="0" err="1"/>
+              <a:t>Tatsächlich</a:t>
+            </a:r>
+            <a:endParaRPr lang="en-US" dirty="0"/>
+          </a:p>
+          <a:p>
+            <a:pPr marL="0" indent="0">
+              <a:buNone/>
+            </a:pPr>
+            <a:r>
+              <a:rPr lang="en-US" dirty="0"/>
+              <a:t>	</a:t>
+            </a:r>
+          </a:p>
+        </p:txBody>
+      </p:sp>
+    </p:spTree>
+    <p:extLst>
+      <p:ext uri="{BB962C8B-B14F-4D97-AF65-F5344CB8AC3E}">
+        <p14:creationId xmlns:p14="http://schemas.microsoft.com/office/powerpoint/2010/main" val="2656136767"/>
+      </p:ext>
+    </p:extLst>
+  </p:cSld>
+  <p:clrMapOvr>
+    <a:masterClrMapping/>
+  </p:clrMapOvr>
+</p:sld>
+</file>
+
+<file path=ppt/slides/slide7.xml><?xml version="1.0" encoding="utf-8"?>
+<p:sld xmlns:a="http://schemas.openxmlformats.org/drawingml/2006/main" xmlns:r="http://schemas.openxmlformats.org/officeDocument/2006/relationships" xmlns:p="http://schemas.openxmlformats.org/presentationml/2006/main">
+  <p:cSld>
+    <p:spTree>
+      <p:nvGrpSpPr>
+        <p:cNvPr id="1" name="">
+          <a:extLst>
+            <a:ext uri="{FF2B5EF4-FFF2-40B4-BE49-F238E27FC236}">
+              <a16:creationId xmlns:a16="http://schemas.microsoft.com/office/drawing/2014/main" id="{CAB3E5E7-FDDE-5352-558B-EBEA4BBF5B84}"/>
+            </a:ext>
+          </a:extLst>
+        </p:cNvPr>
+        <p:cNvGrpSpPr/>
+        <p:nvPr/>
+      </p:nvGrpSpPr>
+      <p:grpSpPr>
+        <a:xfrm>
+          <a:off x="0" y="0"/>
+          <a:ext cx="0" cy="0"/>
+          <a:chOff x="0" y="0"/>
+          <a:chExt cx="0" cy="0"/>
+        </a:xfrm>
+      </p:grpSpPr>
+      <p:sp>
+        <p:nvSpPr>
+          <p:cNvPr id="2" name="Fußzeilenplatzhalter 1">
+            <a:extLst>
+              <a:ext uri="{FF2B5EF4-FFF2-40B4-BE49-F238E27FC236}">
+                <a16:creationId xmlns:a16="http://schemas.microsoft.com/office/drawing/2014/main" id="{C906C235-0C9E-ABEA-6E1E-B47063B36FCF}"/>
+              </a:ext>
+            </a:extLst>
+          </p:cNvPr>
+          <p:cNvSpPr>
+            <a:spLocks noGrp="1"/>
+          </p:cNvSpPr>
+          <p:nvPr>
+            <p:ph type="ftr" sz="quarter" idx="26"/>
+          </p:nvPr>
+        </p:nvSpPr>
+        <p:spPr/>
+        <p:txBody>
+          <a:bodyPr/>
+          <a:lstStyle/>
+          <a:p>
+            <a:r>
+              <a:rPr lang="de-DE"/>
+              <a:t>KI Projekt | Sina Brunner, Lars Nettersheim, John Schwarz, Leon Ulbrich, Felix Wensky </a:t>
+            </a:r>
+            <a:endParaRPr lang="de-DE" dirty="0"/>
+          </a:p>
+        </p:txBody>
+      </p:sp>
+      <p:sp>
+        <p:nvSpPr>
+          <p:cNvPr id="3" name="Foliennummernplatzhalter 2">
+            <a:extLst>
+              <a:ext uri="{FF2B5EF4-FFF2-40B4-BE49-F238E27FC236}">
+                <a16:creationId xmlns:a16="http://schemas.microsoft.com/office/drawing/2014/main" id="{870BC730-0C88-0843-0AC5-403944F78AC1}"/>
+              </a:ext>
+            </a:extLst>
+          </p:cNvPr>
+          <p:cNvSpPr>
+            <a:spLocks noGrp="1"/>
+          </p:cNvSpPr>
+          <p:nvPr>
+            <p:ph type="sldNum" sz="quarter" idx="4"/>
+          </p:nvPr>
+        </p:nvSpPr>
+        <p:spPr/>
+        <p:txBody>
+          <a:bodyPr/>
+          <a:lstStyle/>
+          <a:p>
+            <a:fld id="{E7298502-BA22-4927-B2ED-0A18FFA86FFE}" type="slidenum">
+              <a:rPr lang="de-DE" smtClean="0"/>
+              <a:pPr/>
+              <a:t>7</a:t>
+            </a:fld>
+            <a:endParaRPr lang="de-DE" dirty="0"/>
+          </a:p>
+        </p:txBody>
+      </p:sp>
+      <p:cxnSp>
+        <p:nvCxnSpPr>
+          <p:cNvPr id="8" name="Gerader Verbinder 7">
+            <a:extLst>
+              <a:ext uri="{FF2B5EF4-FFF2-40B4-BE49-F238E27FC236}">
+                <a16:creationId xmlns:a16="http://schemas.microsoft.com/office/drawing/2014/main" id="{9FF52357-2630-8615-7E52-AC082DB0C82F}"/>
+              </a:ext>
+            </a:extLst>
+          </p:cNvPr>
+          <p:cNvCxnSpPr>
+            <a:cxnSpLocks/>
+          </p:cNvCxnSpPr>
+          <p:nvPr/>
+        </p:nvCxnSpPr>
+        <p:spPr>
+          <a:xfrm>
+            <a:off x="713582" y="746389"/>
+            <a:ext cx="0" cy="468000"/>
+          </a:xfrm>
+          <a:prstGeom prst="line">
+            <a:avLst/>
+          </a:prstGeom>
+          <a:ln w="28575"/>
+        </p:spPr>
+        <p:style>
+          <a:lnRef idx="1">
+            <a:schemeClr val="accent1"/>
+          </a:lnRef>
+          <a:fillRef idx="0">
+            <a:schemeClr val="accent1"/>
+          </a:fillRef>
+          <a:effectRef idx="0">
+            <a:schemeClr val="accent1"/>
+          </a:effectRef>
+          <a:fontRef idx="minor">
+            <a:schemeClr val="tx1"/>
+          </a:fontRef>
+        </p:style>
+      </p:cxnSp>
+      <p:sp>
+        <p:nvSpPr>
+          <p:cNvPr id="9" name="Textplatzhalter 12">
+            <a:extLst>
+              <a:ext uri="{FF2B5EF4-FFF2-40B4-BE49-F238E27FC236}">
+                <a16:creationId xmlns:a16="http://schemas.microsoft.com/office/drawing/2014/main" id="{A55FB03C-7F3E-CA65-A9FA-BD25D989E75B}"/>
+              </a:ext>
+            </a:extLst>
+          </p:cNvPr>
+          <p:cNvSpPr>
+            <a:spLocks noGrp="1"/>
+          </p:cNvSpPr>
+          <p:nvPr>
+            <p:ph type="body" sz="quarter" idx="13" hasCustomPrompt="1"/>
+          </p:nvPr>
+        </p:nvSpPr>
+        <p:spPr>
+          <a:xfrm>
+            <a:off x="695325" y="199474"/>
+            <a:ext cx="10119053" cy="468000"/>
+          </a:xfrm>
+          <a:prstGeom prst="rect">
+            <a:avLst/>
+          </a:prstGeom>
+        </p:spPr>
+        <p:txBody>
+          <a:bodyPr anchor="t">
+            <a:noAutofit/>
+          </a:bodyPr>
+          <a:lstStyle>
+            <a:lvl1pPr marL="0" indent="0">
+              <a:buNone/>
+              <a:defRPr sz="3000" b="1" cap="none" baseline="0"/>
+            </a:lvl1pPr>
+            <a:lvl2pPr>
+              <a:defRPr sz="2900" b="1" cap="all" baseline="0"/>
+            </a:lvl2pPr>
+            <a:lvl3pPr>
+              <a:defRPr sz="2900" b="1" cap="all" baseline="0"/>
+            </a:lvl3pPr>
+            <a:lvl4pPr>
+              <a:defRPr sz="2900" b="1" cap="all" baseline="0"/>
+            </a:lvl4pPr>
+            <a:lvl5pPr>
+              <a:defRPr sz="2900" b="1" cap="all" baseline="0"/>
+            </a:lvl5pPr>
+          </a:lstStyle>
+          <a:p>
+            <a:r>
+              <a:rPr lang="de-DE" dirty="0"/>
+              <a:t>Ist-Zustand</a:t>
+            </a:r>
+          </a:p>
+        </p:txBody>
+      </p:sp>
+      <p:sp>
+        <p:nvSpPr>
+          <p:cNvPr id="10" name="Textplatzhalter 20">
+            <a:extLst>
+              <a:ext uri="{FF2B5EF4-FFF2-40B4-BE49-F238E27FC236}">
+                <a16:creationId xmlns:a16="http://schemas.microsoft.com/office/drawing/2014/main" id="{295DADE6-960C-F33A-7549-866EB941F816}"/>
+              </a:ext>
+            </a:extLst>
+          </p:cNvPr>
+          <p:cNvSpPr>
+            <a:spLocks noGrp="1"/>
+          </p:cNvSpPr>
+          <p:nvPr>
+            <p:ph type="body" sz="quarter" idx="25" hasCustomPrompt="1"/>
+          </p:nvPr>
+        </p:nvSpPr>
+        <p:spPr>
+          <a:xfrm>
+            <a:off x="710624" y="813558"/>
+            <a:ext cx="10119052" cy="338138"/>
+          </a:xfrm>
+          <a:prstGeom prst="rect">
+            <a:avLst/>
+          </a:prstGeom>
+        </p:spPr>
+        <p:txBody>
+          <a:bodyPr/>
+          <a:lstStyle>
+            <a:lvl1pPr marL="0" indent="0">
+              <a:buNone/>
+              <a:defRPr sz="2000" b="1"/>
+            </a:lvl1pPr>
+          </a:lstStyle>
+          <a:p>
+            <a:pPr lvl="0"/>
+            <a:r>
+              <a:rPr lang="de-DE" dirty="0"/>
+              <a:t>Phasen Evaluation</a:t>
+            </a:r>
+          </a:p>
+        </p:txBody>
+      </p:sp>
+      <p:sp>
+        <p:nvSpPr>
+          <p:cNvPr id="4" name="Text Placeholder 4">
+            <a:extLst>
+              <a:ext uri="{FF2B5EF4-FFF2-40B4-BE49-F238E27FC236}">
+                <a16:creationId xmlns:a16="http://schemas.microsoft.com/office/drawing/2014/main" id="{52D4FAFD-DDED-E43C-D232-BE908E95DE61}"/>
+              </a:ext>
+            </a:extLst>
+          </p:cNvPr>
+          <p:cNvSpPr txBox="1">
+            <a:spLocks/>
+          </p:cNvSpPr>
+          <p:nvPr/>
+        </p:nvSpPr>
+        <p:spPr>
+          <a:xfrm>
+            <a:off x="710624" y="3142810"/>
+            <a:ext cx="11303356" cy="1464415"/>
+          </a:xfrm>
+          <a:prstGeom prst="rect">
+            <a:avLst/>
+          </a:prstGeom>
+        </p:spPr>
+        <p:txBody>
+          <a:bodyPr/>
+          <a:lstStyle>
+            <a:lvl1pPr marL="228600" indent="-228600" algn="l" defTabSz="914400" rtl="0" eaLnBrk="1" latinLnBrk="0" hangingPunct="1">
+              <a:lnSpc>
+                <a:spcPct val="90000"/>
+              </a:lnSpc>
+              <a:spcBef>
+                <a:spcPts val="1000"/>
+              </a:spcBef>
+              <a:buFont typeface="Arial" panose="020B0604020202020204" pitchFamily="34" charset="0"/>
+              <a:buChar char="•"/>
+              <a:defRPr sz="2000" kern="1200">
+                <a:solidFill>
+                  <a:schemeClr val="tx1"/>
+                </a:solidFill>
+                <a:latin typeface="+mn-lt"/>
+                <a:ea typeface="+mn-ea"/>
+                <a:cs typeface="+mn-cs"/>
+              </a:defRPr>
+            </a:lvl1pPr>
+            <a:lvl2pPr marL="685800" indent="-228600" algn="l" defTabSz="914400" rtl="0" eaLnBrk="1" latinLnBrk="0" hangingPunct="1">
+              <a:lnSpc>
+                <a:spcPct val="90000"/>
+              </a:lnSpc>
+              <a:spcBef>
+                <a:spcPts val="500"/>
+              </a:spcBef>
+              <a:buFont typeface="Arial" panose="020B0604020202020204" pitchFamily="34" charset="0"/>
+              <a:buChar char="•"/>
+              <a:defRPr sz="1800" kern="1200">
+                <a:solidFill>
+                  <a:schemeClr val="tx1"/>
+                </a:solidFill>
+                <a:latin typeface="+mn-lt"/>
+                <a:ea typeface="+mn-ea"/>
+                <a:cs typeface="+mn-cs"/>
+              </a:defRPr>
+            </a:lvl2pPr>
+            <a:lvl3pPr marL="1143000" indent="-228600" algn="l" defTabSz="914400" rtl="0" eaLnBrk="1" latinLnBrk="0" hangingPunct="1">
+              <a:lnSpc>
+                <a:spcPct val="90000"/>
+              </a:lnSpc>
+              <a:spcBef>
+                <a:spcPts val="500"/>
+              </a:spcBef>
+              <a:buFont typeface="Arial" panose="020B0604020202020204" pitchFamily="34" charset="0"/>
+              <a:buChar char="•"/>
+              <a:defRPr sz="1600" kern="1200">
+                <a:solidFill>
+                  <a:schemeClr val="tx1"/>
+                </a:solidFill>
+                <a:latin typeface="+mn-lt"/>
+                <a:ea typeface="+mn-ea"/>
+                <a:cs typeface="+mn-cs"/>
+              </a:defRPr>
+            </a:lvl3pPr>
+            <a:lvl4pPr marL="1600200" indent="-228600" algn="l" defTabSz="914400" rtl="0" eaLnBrk="1" latinLnBrk="0" hangingPunct="1">
+              <a:lnSpc>
+                <a:spcPct val="90000"/>
+              </a:lnSpc>
+              <a:spcBef>
+                <a:spcPts val="500"/>
+              </a:spcBef>
+              <a:buFont typeface="Arial" panose="020B0604020202020204" pitchFamily="34" charset="0"/>
+              <a:buChar char="•"/>
+              <a:defRPr sz="1800" kern="1200">
+                <a:solidFill>
+                  <a:schemeClr val="tx1"/>
+                </a:solidFill>
+                <a:latin typeface="+mn-lt"/>
+                <a:ea typeface="+mn-ea"/>
+                <a:cs typeface="+mn-cs"/>
+              </a:defRPr>
+            </a:lvl4pPr>
+            <a:lvl5pPr marL="2057400" indent="-228600" algn="l" defTabSz="914400" rtl="0" eaLnBrk="1" latinLnBrk="0" hangingPunct="1">
+              <a:lnSpc>
+                <a:spcPct val="90000"/>
+              </a:lnSpc>
+              <a:spcBef>
+                <a:spcPts val="500"/>
+              </a:spcBef>
+              <a:buFont typeface="Arial" panose="020B0604020202020204" pitchFamily="34" charset="0"/>
+              <a:buChar char="•"/>
+              <a:defRPr sz="1800" kern="1200">
+                <a:solidFill>
+                  <a:schemeClr val="tx1"/>
+                </a:solidFill>
+                <a:latin typeface="+mn-lt"/>
+                <a:ea typeface="+mn-ea"/>
+                <a:cs typeface="+mn-cs"/>
+              </a:defRPr>
+            </a:lvl5pPr>
+            <a:lvl6pPr marL="2514600" indent="-228600" algn="l" defTabSz="914400" rtl="0" eaLnBrk="1" latinLnBrk="0" hangingPunct="1">
+              <a:lnSpc>
+                <a:spcPct val="90000"/>
+              </a:lnSpc>
+              <a:spcBef>
+                <a:spcPts val="500"/>
+              </a:spcBef>
+              <a:buFont typeface="Arial" panose="020B0604020202020204" pitchFamily="34" charset="0"/>
+              <a:buChar char="•"/>
+              <a:defRPr sz="1800" kern="1200">
+                <a:solidFill>
+                  <a:schemeClr val="tx1"/>
+                </a:solidFill>
+                <a:latin typeface="+mn-lt"/>
+                <a:ea typeface="+mn-ea"/>
+                <a:cs typeface="+mn-cs"/>
+              </a:defRPr>
+            </a:lvl6pPr>
+            <a:lvl7pPr marL="2971800" indent="-228600" algn="l" defTabSz="914400" rtl="0" eaLnBrk="1" latinLnBrk="0" hangingPunct="1">
+              <a:lnSpc>
+                <a:spcPct val="90000"/>
+              </a:lnSpc>
+              <a:spcBef>
+                <a:spcPts val="500"/>
+              </a:spcBef>
+              <a:buFont typeface="Arial" panose="020B0604020202020204" pitchFamily="34" charset="0"/>
+              <a:buChar char="•"/>
+              <a:defRPr sz="1800" kern="1200">
+                <a:solidFill>
+                  <a:schemeClr val="tx1"/>
+                </a:solidFill>
+                <a:latin typeface="+mn-lt"/>
+                <a:ea typeface="+mn-ea"/>
+                <a:cs typeface="+mn-cs"/>
+              </a:defRPr>
+            </a:lvl7pPr>
+            <a:lvl8pPr marL="3429000" indent="-228600" algn="l" defTabSz="914400" rtl="0" eaLnBrk="1" latinLnBrk="0" hangingPunct="1">
+              <a:lnSpc>
+                <a:spcPct val="90000"/>
+              </a:lnSpc>
+              <a:spcBef>
+                <a:spcPts val="500"/>
+              </a:spcBef>
+              <a:buFont typeface="Arial" panose="020B0604020202020204" pitchFamily="34" charset="0"/>
+              <a:buChar char="•"/>
+              <a:defRPr sz="1800" kern="1200">
+                <a:solidFill>
+                  <a:schemeClr val="tx1"/>
+                </a:solidFill>
+                <a:latin typeface="+mn-lt"/>
+                <a:ea typeface="+mn-ea"/>
+                <a:cs typeface="+mn-cs"/>
+              </a:defRPr>
+            </a:lvl8pPr>
+            <a:lvl9pPr marL="3886200" indent="-228600" algn="l" defTabSz="914400" rtl="0" eaLnBrk="1" latinLnBrk="0" hangingPunct="1">
+              <a:lnSpc>
+                <a:spcPct val="90000"/>
+              </a:lnSpc>
+              <a:spcBef>
+                <a:spcPts val="500"/>
+              </a:spcBef>
+              <a:buFont typeface="Arial" panose="020B0604020202020204" pitchFamily="34" charset="0"/>
+              <a:buChar char="•"/>
+              <a:defRPr sz="1800" kern="1200">
+                <a:solidFill>
+                  <a:schemeClr val="tx1"/>
+                </a:solidFill>
+                <a:latin typeface="+mn-lt"/>
+                <a:ea typeface="+mn-ea"/>
+                <a:cs typeface="+mn-cs"/>
+              </a:defRPr>
+            </a:lvl9pPr>
+          </a:lstStyle>
+          <a:p>
+            <a:pPr marL="457200" lvl="1" indent="0">
+              <a:buFont typeface="Arial" panose="020B0604020202020204" pitchFamily="34" charset="0"/>
+              <a:buNone/>
+            </a:pPr>
+            <a:endParaRPr lang="en-US" dirty="0"/>
+          </a:p>
+        </p:txBody>
+      </p:sp>
+      <p:sp>
+        <p:nvSpPr>
+          <p:cNvPr id="11" name="Text Placeholder 4">
+            <a:extLst>
+              <a:ext uri="{FF2B5EF4-FFF2-40B4-BE49-F238E27FC236}">
+                <a16:creationId xmlns:a16="http://schemas.microsoft.com/office/drawing/2014/main" id="{EF80EC85-155D-F135-0FC8-9607AE5D22D0}"/>
+              </a:ext>
+            </a:extLst>
+          </p:cNvPr>
+          <p:cNvSpPr>
+            <a:spLocks noGrp="1"/>
+          </p:cNvSpPr>
+          <p:nvPr>
+            <p:ph type="body" sz="quarter" idx="16"/>
+          </p:nvPr>
+        </p:nvSpPr>
+        <p:spPr>
+          <a:xfrm>
+            <a:off x="695325" y="1635624"/>
+            <a:ext cx="11303356" cy="4163514"/>
+          </a:xfrm>
+        </p:spPr>
+        <p:txBody>
+          <a:bodyPr/>
+          <a:lstStyle/>
+          <a:p>
+            <a:pPr marL="0" indent="0">
+              <a:buNone/>
+            </a:pPr>
+            <a:r>
+              <a:rPr lang="en-US" dirty="0"/>
+              <a:t>Phase 1: </a:t>
+            </a:r>
+            <a:r>
+              <a:rPr lang="en-US" dirty="0" err="1"/>
+              <a:t>Erstellen</a:t>
+            </a:r>
+            <a:r>
+              <a:rPr lang="en-US" dirty="0"/>
+              <a:t> </a:t>
+            </a:r>
+            <a:r>
+              <a:rPr lang="en-US" dirty="0" err="1"/>
+              <a:t>eines</a:t>
+            </a:r>
+            <a:r>
+              <a:rPr lang="en-US" dirty="0"/>
+              <a:t> Single Prompt Repo-Template / Agent + Skills</a:t>
+            </a:r>
+          </a:p>
+          <a:p>
+            <a:r>
+              <a:rPr lang="en-US" dirty="0"/>
+              <a:t>7/10 - Pipeline </a:t>
+            </a:r>
+            <a:r>
+              <a:rPr lang="en-US" dirty="0" err="1"/>
+              <a:t>steht</a:t>
+            </a:r>
+            <a:r>
+              <a:rPr lang="en-US" dirty="0"/>
+              <a:t>, </a:t>
+            </a:r>
+            <a:r>
+              <a:rPr lang="en-US" dirty="0" err="1"/>
+              <a:t>erste</a:t>
+            </a:r>
+            <a:r>
+              <a:rPr lang="en-US" dirty="0"/>
+              <a:t> </a:t>
+            </a:r>
+            <a:r>
+              <a:rPr lang="en-US" dirty="0" err="1"/>
+              <a:t>Ergebnisse</a:t>
+            </a:r>
+            <a:r>
+              <a:rPr lang="en-US" dirty="0"/>
+              <a:t> </a:t>
+            </a:r>
+            <a:r>
+              <a:rPr lang="en-US" dirty="0" err="1"/>
+              <a:t>können</a:t>
+            </a:r>
+            <a:r>
+              <a:rPr lang="en-US" dirty="0"/>
+              <a:t> </a:t>
+            </a:r>
+            <a:r>
+              <a:rPr lang="en-US" dirty="0" err="1"/>
+              <a:t>produziert</a:t>
+            </a:r>
+            <a:r>
+              <a:rPr lang="en-US" dirty="0"/>
+              <a:t> </a:t>
+            </a:r>
+            <a:r>
+              <a:rPr lang="en-US" dirty="0" err="1"/>
+              <a:t>werden</a:t>
+            </a:r>
+            <a:endParaRPr lang="en-US" dirty="0"/>
+          </a:p>
+          <a:p>
+            <a:r>
+              <a:rPr lang="en-US" dirty="0"/>
+              <a:t>Finetuning </a:t>
+            </a:r>
+            <a:r>
+              <a:rPr lang="en-US" dirty="0" err="1"/>
+              <a:t>fehlt</a:t>
+            </a:r>
+            <a:r>
+              <a:rPr lang="en-US" dirty="0"/>
+              <a:t> </a:t>
+            </a:r>
+            <a:r>
+              <a:rPr lang="en-US" dirty="0" err="1"/>
+              <a:t>jedoch</a:t>
+            </a:r>
+            <a:r>
+              <a:rPr lang="en-US" dirty="0"/>
+              <a:t> - </a:t>
+            </a:r>
+            <a:r>
+              <a:rPr lang="en-US" dirty="0" err="1"/>
+              <a:t>Ergebnisse</a:t>
+            </a:r>
+            <a:r>
+              <a:rPr lang="en-US" dirty="0"/>
+              <a:t> </a:t>
+            </a:r>
+            <a:r>
+              <a:rPr lang="en-US" dirty="0" err="1"/>
+              <a:t>sind</a:t>
+            </a:r>
+            <a:r>
+              <a:rPr lang="en-US" dirty="0"/>
+              <a:t> </a:t>
+            </a:r>
+            <a:r>
+              <a:rPr lang="en-US" dirty="0" err="1"/>
+              <a:t>schlecht</a:t>
+            </a:r>
+            <a:endParaRPr lang="en-US" dirty="0"/>
+          </a:p>
+          <a:p>
+            <a:pPr marL="0" indent="0">
+              <a:buNone/>
+            </a:pPr>
+            <a:r>
+              <a:rPr lang="en-US" dirty="0"/>
+              <a:t>Phase 2: </a:t>
+            </a:r>
+            <a:r>
+              <a:rPr lang="en-US" dirty="0" err="1"/>
+              <a:t>Auswertung</a:t>
+            </a:r>
+            <a:r>
+              <a:rPr lang="en-US" dirty="0"/>
+              <a:t> der </a:t>
+            </a:r>
+            <a:r>
+              <a:rPr lang="en-US" dirty="0" err="1"/>
+              <a:t>Qualität</a:t>
+            </a:r>
+            <a:r>
+              <a:rPr lang="en-US" dirty="0"/>
+              <a:t> der </a:t>
+            </a:r>
+            <a:r>
+              <a:rPr lang="en-US" dirty="0" err="1"/>
+              <a:t>erzeugten</a:t>
+            </a:r>
+            <a:r>
+              <a:rPr lang="en-US" dirty="0"/>
+              <a:t> MVP’s (LLM as a Judge)</a:t>
+            </a:r>
+          </a:p>
+          <a:p>
+            <a:r>
+              <a:rPr lang="en-US" dirty="0"/>
+              <a:t>1/10 - </a:t>
+            </a:r>
+            <a:r>
+              <a:rPr lang="en-US" dirty="0" err="1"/>
+              <a:t>Beginn</a:t>
+            </a:r>
+            <a:r>
+              <a:rPr lang="en-US" dirty="0"/>
+              <a:t> </a:t>
+            </a:r>
+            <a:r>
+              <a:rPr lang="en-US" dirty="0" err="1"/>
+              <a:t>mit</a:t>
+            </a:r>
+            <a:r>
+              <a:rPr lang="en-US" dirty="0"/>
+              <a:t> der </a:t>
+            </a:r>
+            <a:r>
+              <a:rPr lang="en-US" dirty="0" err="1"/>
+              <a:t>Ausarbeitung</a:t>
+            </a:r>
+            <a:endParaRPr lang="en-US" dirty="0"/>
+          </a:p>
+          <a:p>
+            <a:r>
+              <a:rPr lang="en-US" dirty="0"/>
+              <a:t>Fokus auf </a:t>
+            </a:r>
+            <a:r>
+              <a:rPr lang="en-US" dirty="0" err="1"/>
+              <a:t>weiteren</a:t>
+            </a:r>
+            <a:r>
+              <a:rPr lang="en-US" dirty="0"/>
+              <a:t> </a:t>
+            </a:r>
+            <a:r>
+              <a:rPr lang="en-US" dirty="0" err="1"/>
+              <a:t>Agenten</a:t>
+            </a:r>
+            <a:r>
+              <a:rPr lang="en-US" dirty="0"/>
+              <a:t> (LLM as a Judge)</a:t>
+            </a:r>
+          </a:p>
+          <a:p>
+            <a:pPr marL="0" indent="0">
+              <a:buNone/>
+            </a:pPr>
+            <a:r>
+              <a:rPr lang="en-US" dirty="0"/>
+              <a:t>Phase 3: Frontend (+</a:t>
+            </a:r>
+            <a:r>
+              <a:rPr lang="en-US" dirty="0" err="1"/>
+              <a:t>FastAPI</a:t>
+            </a:r>
+            <a:r>
+              <a:rPr lang="en-US" dirty="0"/>
+              <a:t>, </a:t>
+            </a:r>
+            <a:r>
+              <a:rPr lang="en-US" dirty="0" err="1"/>
+              <a:t>LangGraph</a:t>
+            </a:r>
+            <a:r>
+              <a:rPr lang="en-US" dirty="0"/>
+              <a:t>, </a:t>
+            </a:r>
+            <a:r>
+              <a:rPr lang="en-US" dirty="0" err="1"/>
+              <a:t>DeepAgents</a:t>
+            </a:r>
+            <a:r>
+              <a:rPr lang="en-US" dirty="0"/>
+              <a:t>)</a:t>
+            </a:r>
+          </a:p>
+          <a:p>
+            <a:r>
+              <a:rPr lang="en-US" dirty="0"/>
+              <a:t>2 / 10 - Für Midterm Review </a:t>
+            </a:r>
+            <a:r>
+              <a:rPr lang="en-US" dirty="0" err="1"/>
+              <a:t>wurde</a:t>
+            </a:r>
+            <a:r>
+              <a:rPr lang="en-US" dirty="0"/>
+              <a:t> </a:t>
+            </a:r>
+            <a:r>
+              <a:rPr lang="en-US" dirty="0" err="1"/>
+              <a:t>ein</a:t>
+            </a:r>
+            <a:r>
+              <a:rPr lang="en-US" dirty="0"/>
+              <a:t> </a:t>
+            </a:r>
+            <a:r>
+              <a:rPr lang="en-US" dirty="0" err="1"/>
+              <a:t>erstes</a:t>
+            </a:r>
+            <a:r>
+              <a:rPr lang="en-US" dirty="0"/>
+              <a:t> Frontend </a:t>
+            </a:r>
+            <a:r>
+              <a:rPr lang="en-US" dirty="0" err="1"/>
+              <a:t>erstellt</a:t>
+            </a:r>
+            <a:endParaRPr lang="en-US" dirty="0"/>
+          </a:p>
+          <a:p>
+            <a:r>
+              <a:rPr lang="en-US" dirty="0"/>
+              <a:t>Noch </a:t>
+            </a:r>
+            <a:r>
+              <a:rPr lang="en-US" dirty="0" err="1"/>
+              <a:t>unsicher</a:t>
+            </a:r>
+            <a:r>
+              <a:rPr lang="en-US" dirty="0"/>
+              <a:t> </a:t>
+            </a:r>
+            <a:r>
+              <a:rPr lang="en-US" dirty="0" err="1"/>
+              <a:t>über</a:t>
+            </a:r>
+            <a:r>
+              <a:rPr lang="en-US" dirty="0"/>
+              <a:t> </a:t>
+            </a:r>
+            <a:r>
+              <a:rPr lang="en-US" dirty="0" err="1"/>
+              <a:t>weitere</a:t>
+            </a:r>
+            <a:r>
+              <a:rPr lang="en-US" dirty="0"/>
+              <a:t> </a:t>
+            </a:r>
+            <a:r>
+              <a:rPr lang="en-US" dirty="0" err="1"/>
+              <a:t>Ausarbeitung</a:t>
+            </a:r>
+            <a:r>
+              <a:rPr lang="en-US" dirty="0"/>
+              <a:t> (Copilot </a:t>
+            </a:r>
+            <a:r>
+              <a:rPr lang="en-US" dirty="0" err="1"/>
+              <a:t>als</a:t>
+            </a:r>
+            <a:r>
+              <a:rPr lang="en-US" dirty="0"/>
+              <a:t> Backend </a:t>
+            </a:r>
+            <a:r>
+              <a:rPr lang="en-US" dirty="0" err="1"/>
+              <a:t>genügend</a:t>
+            </a:r>
+            <a:r>
+              <a:rPr lang="en-US" dirty="0"/>
+              <a:t>?)</a:t>
+            </a:r>
+          </a:p>
+        </p:txBody>
+      </p:sp>
+    </p:spTree>
+    <p:extLst>
+      <p:ext uri="{BB962C8B-B14F-4D97-AF65-F5344CB8AC3E}">
+        <p14:creationId xmlns:p14="http://schemas.microsoft.com/office/powerpoint/2010/main" val="4267299269"/>
+      </p:ext>
+    </p:extLst>
+  </p:cSld>
+  <p:clrMapOvr>
+    <a:masterClrMapping/>
+  </p:clrMapOvr>
+</p:sld>
+</file>
+
+<file path=ppt/slides/slide8.xml><?xml version="1.0" encoding="utf-8"?>
+<p:sld xmlns:a="http://schemas.openxmlformats.org/drawingml/2006/main" xmlns:r="http://schemas.openxmlformats.org/officeDocument/2006/relationships" xmlns:p="http://schemas.openxmlformats.org/presentationml/2006/main">
+  <p:cSld>
+    <p:spTree>
+      <p:nvGrpSpPr>
+        <p:cNvPr id="1" name="">
+          <a:extLst>
+            <a:ext uri="{FF2B5EF4-FFF2-40B4-BE49-F238E27FC236}">
+              <a16:creationId xmlns:a16="http://schemas.microsoft.com/office/drawing/2014/main" id="{18D4B10E-BE9A-DA1F-13A0-064D417EABB0}"/>
+            </a:ext>
+          </a:extLst>
+        </p:cNvPr>
+        <p:cNvGrpSpPr/>
+        <p:nvPr/>
+      </p:nvGrpSpPr>
+      <p:grpSpPr>
+        <a:xfrm>
+          <a:off x="0" y="0"/>
+          <a:ext cx="0" cy="0"/>
+          <a:chOff x="0" y="0"/>
+          <a:chExt cx="0" cy="0"/>
+        </a:xfrm>
+      </p:grpSpPr>
+      <p:sp>
+        <p:nvSpPr>
+          <p:cNvPr id="2" name="Fußzeilenplatzhalter 1">
+            <a:extLst>
+              <a:ext uri="{FF2B5EF4-FFF2-40B4-BE49-F238E27FC236}">
+                <a16:creationId xmlns:a16="http://schemas.microsoft.com/office/drawing/2014/main" id="{20F63991-021C-7CB5-1CE7-A4EA3D0292A3}"/>
+              </a:ext>
+            </a:extLst>
+          </p:cNvPr>
+          <p:cNvSpPr>
+            <a:spLocks noGrp="1"/>
+          </p:cNvSpPr>
+          <p:nvPr>
+            <p:ph type="ftr" sz="quarter" idx="26"/>
+          </p:nvPr>
+        </p:nvSpPr>
+        <p:spPr/>
+        <p:txBody>
+          <a:bodyPr/>
+          <a:lstStyle/>
+          <a:p>
+            <a:r>
+              <a:rPr lang="de-DE"/>
+              <a:t>KI Projekt | Sina Brunner, Lars Nettersheim, John Schwarz, Leon Ulbrich, Felix Wensky </a:t>
+            </a:r>
+            <a:endParaRPr lang="de-DE" dirty="0"/>
+          </a:p>
+        </p:txBody>
+      </p:sp>
+      <p:sp>
+        <p:nvSpPr>
+          <p:cNvPr id="3" name="Foliennummernplatzhalter 2">
+            <a:extLst>
+              <a:ext uri="{FF2B5EF4-FFF2-40B4-BE49-F238E27FC236}">
+                <a16:creationId xmlns:a16="http://schemas.microsoft.com/office/drawing/2014/main" id="{7E0D18ED-B631-6D5D-2CA3-BB29BB371DE3}"/>
+              </a:ext>
+            </a:extLst>
+          </p:cNvPr>
+          <p:cNvSpPr>
+            <a:spLocks noGrp="1"/>
+          </p:cNvSpPr>
+          <p:nvPr>
+            <p:ph type="sldNum" sz="quarter" idx="4"/>
+          </p:nvPr>
+        </p:nvSpPr>
+        <p:spPr/>
+        <p:txBody>
+          <a:bodyPr/>
+          <a:lstStyle/>
+          <a:p>
+            <a:fld id="{E7298502-BA22-4927-B2ED-0A18FFA86FFE}" type="slidenum">
+              <a:rPr lang="de-DE" smtClean="0"/>
+              <a:pPr/>
+              <a:t>8</a:t>
+            </a:fld>
+            <a:endParaRPr lang="de-DE" dirty="0"/>
+          </a:p>
+        </p:txBody>
+      </p:sp>
+      <p:cxnSp>
+        <p:nvCxnSpPr>
+          <p:cNvPr id="8" name="Gerader Verbinder 7">
+            <a:extLst>
+              <a:ext uri="{FF2B5EF4-FFF2-40B4-BE49-F238E27FC236}">
+                <a16:creationId xmlns:a16="http://schemas.microsoft.com/office/drawing/2014/main" id="{647D05F3-1344-CD6C-9D5E-2B780B0BE644}"/>
+              </a:ext>
+            </a:extLst>
+          </p:cNvPr>
+          <p:cNvCxnSpPr>
+            <a:cxnSpLocks/>
+          </p:cNvCxnSpPr>
+          <p:nvPr/>
+        </p:nvCxnSpPr>
+        <p:spPr>
+          <a:xfrm>
+            <a:off x="713582" y="746389"/>
+            <a:ext cx="0" cy="468000"/>
+          </a:xfrm>
+          <a:prstGeom prst="line">
+            <a:avLst/>
+          </a:prstGeom>
+          <a:ln w="28575"/>
+        </p:spPr>
+        <p:style>
+          <a:lnRef idx="1">
+            <a:schemeClr val="accent1"/>
+          </a:lnRef>
+          <a:fillRef idx="0">
+            <a:schemeClr val="accent1"/>
+          </a:fillRef>
+          <a:effectRef idx="0">
+            <a:schemeClr val="accent1"/>
+          </a:effectRef>
+          <a:fontRef idx="minor">
+            <a:schemeClr val="tx1"/>
+          </a:fontRef>
+        </p:style>
+      </p:cxnSp>
+      <p:sp>
+        <p:nvSpPr>
+          <p:cNvPr id="9" name="Textplatzhalter 12">
+            <a:extLst>
+              <a:ext uri="{FF2B5EF4-FFF2-40B4-BE49-F238E27FC236}">
+                <a16:creationId xmlns:a16="http://schemas.microsoft.com/office/drawing/2014/main" id="{700C3497-2A61-6315-E0D6-B5726C622924}"/>
+              </a:ext>
+            </a:extLst>
+          </p:cNvPr>
+          <p:cNvSpPr>
+            <a:spLocks noGrp="1"/>
+          </p:cNvSpPr>
+          <p:nvPr>
+            <p:ph type="body" sz="quarter" idx="13" hasCustomPrompt="1"/>
+          </p:nvPr>
+        </p:nvSpPr>
+        <p:spPr>
+          <a:xfrm>
+            <a:off x="695325" y="199474"/>
+            <a:ext cx="10119053" cy="468000"/>
+          </a:xfrm>
+          <a:prstGeom prst="rect">
+            <a:avLst/>
+          </a:prstGeom>
+        </p:spPr>
+        <p:txBody>
+          <a:bodyPr anchor="t">
+            <a:noAutofit/>
+          </a:bodyPr>
+          <a:lstStyle>
+            <a:lvl1pPr marL="0" indent="0">
+              <a:buNone/>
+              <a:defRPr sz="3000" b="1" cap="none" baseline="0"/>
+            </a:lvl1pPr>
+            <a:lvl2pPr>
+              <a:defRPr sz="2900" b="1" cap="all" baseline="0"/>
+            </a:lvl2pPr>
+            <a:lvl3pPr>
+              <a:defRPr sz="2900" b="1" cap="all" baseline="0"/>
+            </a:lvl3pPr>
+            <a:lvl4pPr>
+              <a:defRPr sz="2900" b="1" cap="all" baseline="0"/>
+            </a:lvl4pPr>
+            <a:lvl5pPr>
+              <a:defRPr sz="2900" b="1" cap="all" baseline="0"/>
+            </a:lvl5pPr>
+          </a:lstStyle>
+          <a:p>
+            <a:r>
+              <a:rPr lang="de-DE" dirty="0"/>
+              <a:t>Ist-Zustand</a:t>
+            </a:r>
+          </a:p>
+        </p:txBody>
+      </p:sp>
+      <p:sp>
+        <p:nvSpPr>
+          <p:cNvPr id="10" name="Textplatzhalter 20">
+            <a:extLst>
+              <a:ext uri="{FF2B5EF4-FFF2-40B4-BE49-F238E27FC236}">
+                <a16:creationId xmlns:a16="http://schemas.microsoft.com/office/drawing/2014/main" id="{94BA6159-752B-B38D-1D33-41A2834087B5}"/>
+              </a:ext>
+            </a:extLst>
+          </p:cNvPr>
+          <p:cNvSpPr>
+            <a:spLocks noGrp="1"/>
+          </p:cNvSpPr>
+          <p:nvPr>
+            <p:ph type="body" sz="quarter" idx="25" hasCustomPrompt="1"/>
+          </p:nvPr>
+        </p:nvSpPr>
+        <p:spPr>
+          <a:xfrm>
+            <a:off x="710624" y="813558"/>
+            <a:ext cx="10119052" cy="338138"/>
+          </a:xfrm>
+          <a:prstGeom prst="rect">
+            <a:avLst/>
+          </a:prstGeom>
+        </p:spPr>
+        <p:txBody>
+          <a:bodyPr/>
+          <a:lstStyle>
+            <a:lvl1pPr marL="0" indent="0">
+              <a:buNone/>
+              <a:defRPr sz="2000" b="1"/>
+            </a:lvl1pPr>
+          </a:lstStyle>
+          <a:p>
+            <a:pPr lvl="0"/>
+            <a:r>
+              <a:rPr lang="de-DE" dirty="0"/>
+              <a:t>Phase 1</a:t>
+            </a:r>
+          </a:p>
+        </p:txBody>
+      </p:sp>
+      <p:sp>
+        <p:nvSpPr>
+          <p:cNvPr id="4" name="Text Placeholder 4">
+            <a:extLst>
+              <a:ext uri="{FF2B5EF4-FFF2-40B4-BE49-F238E27FC236}">
+                <a16:creationId xmlns:a16="http://schemas.microsoft.com/office/drawing/2014/main" id="{C1B9C262-50F4-4B3B-E3DA-1783748A2F93}"/>
+              </a:ext>
+            </a:extLst>
+          </p:cNvPr>
+          <p:cNvSpPr txBox="1">
+            <a:spLocks/>
+          </p:cNvSpPr>
+          <p:nvPr/>
+        </p:nvSpPr>
+        <p:spPr>
+          <a:xfrm>
+            <a:off x="710624" y="3142810"/>
+            <a:ext cx="11303356" cy="1464415"/>
+          </a:xfrm>
+          <a:prstGeom prst="rect">
+            <a:avLst/>
+          </a:prstGeom>
+        </p:spPr>
+        <p:txBody>
+          <a:bodyPr/>
+          <a:lstStyle>
+            <a:lvl1pPr marL="228600" indent="-228600" algn="l" defTabSz="914400" rtl="0" eaLnBrk="1" latinLnBrk="0" hangingPunct="1">
+              <a:lnSpc>
+                <a:spcPct val="90000"/>
+              </a:lnSpc>
+              <a:spcBef>
+                <a:spcPts val="1000"/>
+              </a:spcBef>
+              <a:buFont typeface="Arial" panose="020B0604020202020204" pitchFamily="34" charset="0"/>
+              <a:buChar char="•"/>
+              <a:defRPr sz="2000" kern="1200">
+                <a:solidFill>
+                  <a:schemeClr val="tx1"/>
+                </a:solidFill>
+                <a:latin typeface="+mn-lt"/>
+                <a:ea typeface="+mn-ea"/>
+                <a:cs typeface="+mn-cs"/>
+              </a:defRPr>
+            </a:lvl1pPr>
+            <a:lvl2pPr marL="685800" indent="-228600" algn="l" defTabSz="914400" rtl="0" eaLnBrk="1" latinLnBrk="0" hangingPunct="1">
+              <a:lnSpc>
+                <a:spcPct val="90000"/>
+              </a:lnSpc>
+              <a:spcBef>
+                <a:spcPts val="500"/>
+              </a:spcBef>
+              <a:buFont typeface="Arial" panose="020B0604020202020204" pitchFamily="34" charset="0"/>
+              <a:buChar char="•"/>
+              <a:defRPr sz="1800" kern="1200">
+                <a:solidFill>
+                  <a:schemeClr val="tx1"/>
+                </a:solidFill>
+                <a:latin typeface="+mn-lt"/>
+                <a:ea typeface="+mn-ea"/>
+                <a:cs typeface="+mn-cs"/>
+              </a:defRPr>
+            </a:lvl2pPr>
+            <a:lvl3pPr marL="1143000" indent="-228600" algn="l" defTabSz="914400" rtl="0" eaLnBrk="1" latinLnBrk="0" hangingPunct="1">
+              <a:lnSpc>
+                <a:spcPct val="90000"/>
+              </a:lnSpc>
+              <a:spcBef>
+                <a:spcPts val="500"/>
+              </a:spcBef>
+              <a:buFont typeface="Arial" panose="020B0604020202020204" pitchFamily="34" charset="0"/>
+              <a:buChar char="•"/>
+              <a:defRPr sz="1600" kern="1200">
+                <a:solidFill>
+                  <a:schemeClr val="tx1"/>
+                </a:solidFill>
+                <a:latin typeface="+mn-lt"/>
+                <a:ea typeface="+mn-ea"/>
+                <a:cs typeface="+mn-cs"/>
+              </a:defRPr>
+            </a:lvl3pPr>
+            <a:lvl4pPr marL="1600200" indent="-228600" algn="l" defTabSz="914400" rtl="0" eaLnBrk="1" latinLnBrk="0" hangingPunct="1">
+              <a:lnSpc>
+                <a:spcPct val="90000"/>
+              </a:lnSpc>
+              <a:spcBef>
+                <a:spcPts val="500"/>
+              </a:spcBef>
+              <a:buFont typeface="Arial" panose="020B0604020202020204" pitchFamily="34" charset="0"/>
+              <a:buChar char="•"/>
+              <a:defRPr sz="1800" kern="1200">
+                <a:solidFill>
+                  <a:schemeClr val="tx1"/>
+                </a:solidFill>
+                <a:latin typeface="+mn-lt"/>
+                <a:ea typeface="+mn-ea"/>
+                <a:cs typeface="+mn-cs"/>
+              </a:defRPr>
+            </a:lvl4pPr>
+            <a:lvl5pPr marL="2057400" indent="-228600" algn="l" defTabSz="914400" rtl="0" eaLnBrk="1" latinLnBrk="0" hangingPunct="1">
+              <a:lnSpc>
+                <a:spcPct val="90000"/>
+              </a:lnSpc>
+              <a:spcBef>
+                <a:spcPts val="500"/>
+              </a:spcBef>
+              <a:buFont typeface="Arial" panose="020B0604020202020204" pitchFamily="34" charset="0"/>
+              <a:buChar char="•"/>
+              <a:defRPr sz="1800" kern="1200">
+                <a:solidFill>
+                  <a:schemeClr val="tx1"/>
+                </a:solidFill>
+                <a:latin typeface="+mn-lt"/>
+                <a:ea typeface="+mn-ea"/>
+                <a:cs typeface="+mn-cs"/>
+              </a:defRPr>
+            </a:lvl5pPr>
+            <a:lvl6pPr marL="2514600" indent="-228600" algn="l" defTabSz="914400" rtl="0" eaLnBrk="1" latinLnBrk="0" hangingPunct="1">
+              <a:lnSpc>
+                <a:spcPct val="90000"/>
+              </a:lnSpc>
+              <a:spcBef>
+                <a:spcPts val="500"/>
+              </a:spcBef>
+              <a:buFont typeface="Arial" panose="020B0604020202020204" pitchFamily="34" charset="0"/>
+              <a:buChar char="•"/>
+              <a:defRPr sz="1800" kern="1200">
+                <a:solidFill>
+                  <a:schemeClr val="tx1"/>
+                </a:solidFill>
+                <a:latin typeface="+mn-lt"/>
+                <a:ea typeface="+mn-ea"/>
+                <a:cs typeface="+mn-cs"/>
+              </a:defRPr>
+            </a:lvl6pPr>
+            <a:lvl7pPr marL="2971800" indent="-228600" algn="l" defTabSz="914400" rtl="0" eaLnBrk="1" latinLnBrk="0" hangingPunct="1">
+              <a:lnSpc>
+                <a:spcPct val="90000"/>
+              </a:lnSpc>
+              <a:spcBef>
+                <a:spcPts val="500"/>
+              </a:spcBef>
+              <a:buFont typeface="Arial" panose="020B0604020202020204" pitchFamily="34" charset="0"/>
+              <a:buChar char="•"/>
+              <a:defRPr sz="1800" kern="1200">
+                <a:solidFill>
+                  <a:schemeClr val="tx1"/>
+                </a:solidFill>
+                <a:latin typeface="+mn-lt"/>
+                <a:ea typeface="+mn-ea"/>
+                <a:cs typeface="+mn-cs"/>
+              </a:defRPr>
+            </a:lvl7pPr>
+            <a:lvl8pPr marL="3429000" indent="-228600" algn="l" defTabSz="914400" rtl="0" eaLnBrk="1" latinLnBrk="0" hangingPunct="1">
+              <a:lnSpc>
+                <a:spcPct val="90000"/>
+              </a:lnSpc>
+              <a:spcBef>
+                <a:spcPts val="500"/>
+              </a:spcBef>
+              <a:buFont typeface="Arial" panose="020B0604020202020204" pitchFamily="34" charset="0"/>
+              <a:buChar char="•"/>
+              <a:defRPr sz="1800" kern="1200">
+                <a:solidFill>
+                  <a:schemeClr val="tx1"/>
+                </a:solidFill>
+                <a:latin typeface="+mn-lt"/>
+                <a:ea typeface="+mn-ea"/>
+                <a:cs typeface="+mn-cs"/>
+              </a:defRPr>
+            </a:lvl8pPr>
+            <a:lvl9pPr marL="3886200" indent="-228600" algn="l" defTabSz="914400" rtl="0" eaLnBrk="1" latinLnBrk="0" hangingPunct="1">
+              <a:lnSpc>
+                <a:spcPct val="90000"/>
+              </a:lnSpc>
+              <a:spcBef>
+                <a:spcPts val="500"/>
+              </a:spcBef>
+              <a:buFont typeface="Arial" panose="020B0604020202020204" pitchFamily="34" charset="0"/>
+              <a:buChar char="•"/>
+              <a:defRPr sz="1800" kern="1200">
+                <a:solidFill>
+                  <a:schemeClr val="tx1"/>
+                </a:solidFill>
+                <a:latin typeface="+mn-lt"/>
+                <a:ea typeface="+mn-ea"/>
+                <a:cs typeface="+mn-cs"/>
+              </a:defRPr>
+            </a:lvl9pPr>
+          </a:lstStyle>
+          <a:p>
+            <a:pPr marL="457200" lvl="1" indent="0">
+              <a:buFont typeface="Arial" panose="020B0604020202020204" pitchFamily="34" charset="0"/>
+              <a:buNone/>
+            </a:pPr>
+            <a:endParaRPr lang="en-US" dirty="0"/>
+          </a:p>
+        </p:txBody>
+      </p:sp>
+      <p:sp>
+        <p:nvSpPr>
+          <p:cNvPr id="11" name="Text Placeholder 4">
+            <a:extLst>
+              <a:ext uri="{FF2B5EF4-FFF2-40B4-BE49-F238E27FC236}">
+                <a16:creationId xmlns:a16="http://schemas.microsoft.com/office/drawing/2014/main" id="{6090CB09-8E0F-9344-586B-7CF11C680F77}"/>
+              </a:ext>
+            </a:extLst>
+          </p:cNvPr>
+          <p:cNvSpPr>
+            <a:spLocks noGrp="1"/>
+          </p:cNvSpPr>
+          <p:nvPr>
+            <p:ph type="body" sz="quarter" idx="16"/>
+          </p:nvPr>
+        </p:nvSpPr>
+        <p:spPr>
+          <a:xfrm>
+            <a:off x="695325" y="1635624"/>
+            <a:ext cx="11303356" cy="4163514"/>
+          </a:xfrm>
+        </p:spPr>
+        <p:txBody>
+          <a:bodyPr/>
+          <a:lstStyle/>
+          <a:p>
+            <a:pPr marL="0" indent="0">
+              <a:buNone/>
+            </a:pPr>
+            <a:r>
+              <a:rPr lang="en-US" dirty="0"/>
+              <a:t>Single Agent </a:t>
+            </a:r>
+            <a:r>
+              <a:rPr lang="en-US" dirty="0" err="1"/>
+              <a:t>Analyse</a:t>
+            </a:r>
+            <a:r>
+              <a:rPr lang="en-US" dirty="0"/>
+              <a:t> Pipeline</a:t>
+            </a:r>
+          </a:p>
+          <a:p>
+            <a:pPr marL="0" indent="0">
+              <a:buNone/>
+            </a:pPr>
+            <a:r>
+              <a:rPr lang="en-US" dirty="0" err="1"/>
+              <a:t>Einzelne</a:t>
+            </a:r>
+            <a:r>
+              <a:rPr lang="en-US" dirty="0"/>
+              <a:t> </a:t>
+            </a:r>
+            <a:r>
+              <a:rPr lang="en-US" dirty="0" err="1"/>
+              <a:t>Bausteine</a:t>
+            </a:r>
+            <a:r>
+              <a:rPr lang="en-US" dirty="0"/>
+              <a:t> für:</a:t>
+            </a:r>
+          </a:p>
+          <a:p>
+            <a:pPr marL="457200" indent="-457200">
+              <a:buAutoNum type="arabicParenR"/>
+            </a:pPr>
+            <a:r>
+              <a:rPr lang="en-US" dirty="0"/>
+              <a:t>CSV Read / Cleansing (done)</a:t>
+            </a:r>
+          </a:p>
+          <a:p>
+            <a:pPr marL="457200" indent="-457200">
+              <a:buAutoNum type="arabicParenR"/>
+            </a:pPr>
+            <a:r>
+              <a:rPr lang="en-US" dirty="0"/>
+              <a:t>Data Exploration (done)</a:t>
+            </a:r>
+          </a:p>
+          <a:p>
+            <a:pPr marL="457200" indent="-457200">
+              <a:buAutoNum type="arabicParenR"/>
+            </a:pPr>
+            <a:r>
+              <a:rPr lang="en-US" dirty="0"/>
+              <a:t>Feature Extraction (done)</a:t>
+            </a:r>
+          </a:p>
+          <a:p>
+            <a:pPr marL="457200" indent="-457200">
+              <a:buAutoNum type="arabicParenR"/>
+            </a:pPr>
+            <a:r>
+              <a:rPr lang="en-US" dirty="0"/>
+              <a:t>Model Training (done)</a:t>
+            </a:r>
+          </a:p>
+          <a:p>
+            <a:pPr marL="457200" indent="-457200">
+              <a:buAutoNum type="arabicParenR"/>
+            </a:pPr>
+            <a:r>
+              <a:rPr lang="en-US" dirty="0"/>
+              <a:t>Model Evaluation (done)</a:t>
+            </a:r>
+          </a:p>
+          <a:p>
+            <a:pPr marL="457200" indent="-457200">
+              <a:buAutoNum type="arabicParenR"/>
+            </a:pPr>
+            <a:r>
+              <a:rPr lang="en-US" dirty="0"/>
+              <a:t>Model Selection (done)</a:t>
+            </a:r>
+          </a:p>
+          <a:p>
+            <a:pPr marL="457200" indent="-457200">
+              <a:buAutoNum type="arabicParenR"/>
+            </a:pPr>
+            <a:r>
+              <a:rPr lang="en-US" dirty="0"/>
+              <a:t>Result Presentation (done)</a:t>
+            </a:r>
+          </a:p>
+          <a:p>
+            <a:pPr marL="457200" indent="-457200">
+              <a:buAutoNum type="arabicParenR"/>
+            </a:pPr>
+            <a:r>
+              <a:rPr lang="en-US" dirty="0"/>
+              <a:t>Critical Self Audit (</a:t>
+            </a:r>
+            <a:r>
+              <a:rPr lang="en-US" dirty="0" err="1"/>
+              <a:t>wip</a:t>
+            </a:r>
+            <a:r>
+              <a:rPr lang="en-US" dirty="0"/>
+              <a:t>)</a:t>
+            </a:r>
+          </a:p>
+          <a:p>
+            <a:pPr marL="457200" indent="-457200">
+              <a:buAutoNum type="arabicParenR"/>
+            </a:pPr>
+            <a:r>
+              <a:rPr lang="en-US" dirty="0"/>
+              <a:t>(Validate Artifacts) (</a:t>
+            </a:r>
+            <a:r>
+              <a:rPr lang="en-US" dirty="0" err="1"/>
+              <a:t>tbd</a:t>
+            </a:r>
+            <a:r>
+              <a:rPr lang="en-US" dirty="0"/>
+              <a:t>) </a:t>
+            </a:r>
+          </a:p>
+          <a:p>
+            <a:pPr marL="457200" indent="-457200">
+              <a:buAutoNum type="arabicParenR"/>
+            </a:pPr>
+            <a:endParaRPr lang="en-US" dirty="0"/>
+          </a:p>
+        </p:txBody>
+      </p:sp>
+    </p:spTree>
+    <p:extLst>
+      <p:ext uri="{BB962C8B-B14F-4D97-AF65-F5344CB8AC3E}">
+        <p14:creationId xmlns:p14="http://schemas.microsoft.com/office/powerpoint/2010/main" val="556426952"/>
+      </p:ext>
+    </p:extLst>
+  </p:cSld>
+  <p:clrMapOvr>
+    <a:masterClrMapping/>
+  </p:clrMapOvr>
+</p:sld>
+</file>
+
+<file path=ppt/slides/slide9.xml><?xml version="1.0" encoding="utf-8"?>
+<p:sld xmlns:a="http://schemas.openxmlformats.org/drawingml/2006/main" xmlns:r="http://schemas.openxmlformats.org/officeDocument/2006/relationships" xmlns:p="http://schemas.openxmlformats.org/presentationml/2006/main">
+  <p:cSld>
+    <p:spTree>
+      <p:nvGrpSpPr>
+        <p:cNvPr id="1" name="">
+          <a:extLst>
+            <a:ext uri="{FF2B5EF4-FFF2-40B4-BE49-F238E27FC236}">
+              <a16:creationId xmlns:a16="http://schemas.microsoft.com/office/drawing/2014/main" id="{18935B83-BEE6-31EC-316E-4CB5F64FB885}"/>
+            </a:ext>
+          </a:extLst>
+        </p:cNvPr>
+        <p:cNvGrpSpPr/>
+        <p:nvPr/>
+      </p:nvGrpSpPr>
+      <p:grpSpPr>
+        <a:xfrm>
+          <a:off x="0" y="0"/>
+          <a:ext cx="0" cy="0"/>
+          <a:chOff x="0" y="0"/>
+          <a:chExt cx="0" cy="0"/>
+        </a:xfrm>
+      </p:grpSpPr>
+      <p:sp>
+        <p:nvSpPr>
+          <p:cNvPr id="2" name="Fußzeilenplatzhalter 1">
+            <a:extLst>
+              <a:ext uri="{FF2B5EF4-FFF2-40B4-BE49-F238E27FC236}">
+                <a16:creationId xmlns:a16="http://schemas.microsoft.com/office/drawing/2014/main" id="{94C65838-3D03-C043-1AC2-DB9D84390363}"/>
+              </a:ext>
+            </a:extLst>
+          </p:cNvPr>
+          <p:cNvSpPr>
+            <a:spLocks noGrp="1"/>
+          </p:cNvSpPr>
+          <p:nvPr>
+            <p:ph type="ftr" sz="quarter" idx="26"/>
+          </p:nvPr>
+        </p:nvSpPr>
+        <p:spPr/>
+        <p:txBody>
+          <a:bodyPr/>
+          <a:lstStyle/>
+          <a:p>
+            <a:r>
+              <a:rPr lang="de-DE"/>
+              <a:t>KI Projekt | Sina Brunner, Lars Nettersheim, John Schwarz, Leon Ulbrich, Felix Wensky </a:t>
+            </a:r>
+            <a:endParaRPr lang="de-DE" dirty="0"/>
+          </a:p>
+        </p:txBody>
+      </p:sp>
+      <p:sp>
+        <p:nvSpPr>
+          <p:cNvPr id="3" name="Foliennummernplatzhalter 2">
+            <a:extLst>
+              <a:ext uri="{FF2B5EF4-FFF2-40B4-BE49-F238E27FC236}">
+                <a16:creationId xmlns:a16="http://schemas.microsoft.com/office/drawing/2014/main" id="{A3AC07AA-CE7D-2475-49FB-E459582B2ACD}"/>
+              </a:ext>
+            </a:extLst>
+          </p:cNvPr>
+          <p:cNvSpPr>
+            <a:spLocks noGrp="1"/>
+          </p:cNvSpPr>
+          <p:nvPr>
+            <p:ph type="sldNum" sz="quarter" idx="4"/>
+          </p:nvPr>
+        </p:nvSpPr>
+        <p:spPr/>
+        <p:txBody>
+          <a:bodyPr/>
+          <a:lstStyle/>
+          <a:p>
+            <a:fld id="{E7298502-BA22-4927-B2ED-0A18FFA86FFE}" type="slidenum">
+              <a:rPr lang="de-DE" smtClean="0"/>
+              <a:pPr/>
+              <a:t>9</a:t>
+            </a:fld>
+            <a:endParaRPr lang="de-DE" dirty="0"/>
+          </a:p>
+        </p:txBody>
+      </p:sp>
+      <p:cxnSp>
+        <p:nvCxnSpPr>
+          <p:cNvPr id="8" name="Gerader Verbinder 7">
+            <a:extLst>
+              <a:ext uri="{FF2B5EF4-FFF2-40B4-BE49-F238E27FC236}">
+                <a16:creationId xmlns:a16="http://schemas.microsoft.com/office/drawing/2014/main" id="{B439578B-672C-B421-4A37-20DA4E15589A}"/>
+              </a:ext>
+            </a:extLst>
+          </p:cNvPr>
+          <p:cNvCxnSpPr>
+            <a:cxnSpLocks/>
+          </p:cNvCxnSpPr>
+          <p:nvPr/>
+        </p:nvCxnSpPr>
+        <p:spPr>
+          <a:xfrm>
+            <a:off x="713582" y="746389"/>
+            <a:ext cx="0" cy="468000"/>
+          </a:xfrm>
+          <a:prstGeom prst="line">
+            <a:avLst/>
+          </a:prstGeom>
+          <a:ln w="28575"/>
+        </p:spPr>
+        <p:style>
+          <a:lnRef idx="1">
+            <a:schemeClr val="accent1"/>
+          </a:lnRef>
+          <a:fillRef idx="0">
+            <a:schemeClr val="accent1"/>
+          </a:fillRef>
+          <a:effectRef idx="0">
+            <a:schemeClr val="accent1"/>
+          </a:effectRef>
+          <a:fontRef idx="minor">
+            <a:schemeClr val="tx1"/>
+          </a:fontRef>
+        </p:style>
+      </p:cxnSp>
+      <p:sp>
+        <p:nvSpPr>
+          <p:cNvPr id="9" name="Textplatzhalter 12">
+            <a:extLst>
+              <a:ext uri="{FF2B5EF4-FFF2-40B4-BE49-F238E27FC236}">
+                <a16:creationId xmlns:a16="http://schemas.microsoft.com/office/drawing/2014/main" id="{2470D797-C83F-8F8A-1913-02551AF13090}"/>
+              </a:ext>
+            </a:extLst>
+          </p:cNvPr>
+          <p:cNvSpPr>
+            <a:spLocks noGrp="1"/>
+          </p:cNvSpPr>
+          <p:nvPr>
+            <p:ph type="body" sz="quarter" idx="13" hasCustomPrompt="1"/>
+          </p:nvPr>
+        </p:nvSpPr>
+        <p:spPr>
+          <a:xfrm>
+            <a:off x="695325" y="199474"/>
+            <a:ext cx="10119053" cy="468000"/>
+          </a:xfrm>
+          <a:prstGeom prst="rect">
+            <a:avLst/>
+          </a:prstGeom>
+        </p:spPr>
+        <p:txBody>
+          <a:bodyPr anchor="t">
+            <a:noAutofit/>
+          </a:bodyPr>
+          <a:lstStyle>
+            <a:lvl1pPr marL="0" indent="0">
+              <a:buNone/>
+              <a:defRPr sz="3000" b="1" cap="none" baseline="0"/>
+            </a:lvl1pPr>
+            <a:lvl2pPr>
+              <a:defRPr sz="2900" b="1" cap="all" baseline="0"/>
+            </a:lvl2pPr>
+            <a:lvl3pPr>
+              <a:defRPr sz="2900" b="1" cap="all" baseline="0"/>
+            </a:lvl3pPr>
+            <a:lvl4pPr>
+              <a:defRPr sz="2900" b="1" cap="all" baseline="0"/>
+            </a:lvl4pPr>
+            <a:lvl5pPr>
+              <a:defRPr sz="2900" b="1" cap="all" baseline="0"/>
+            </a:lvl5pPr>
+          </a:lstStyle>
+          <a:p>
+            <a:r>
+              <a:rPr lang="de-DE" dirty="0"/>
+              <a:t>Ist-Zustand</a:t>
+            </a:r>
+          </a:p>
+        </p:txBody>
+      </p:sp>
+      <p:sp>
+        <p:nvSpPr>
+          <p:cNvPr id="10" name="Textplatzhalter 20">
+            <a:extLst>
+              <a:ext uri="{FF2B5EF4-FFF2-40B4-BE49-F238E27FC236}">
+                <a16:creationId xmlns:a16="http://schemas.microsoft.com/office/drawing/2014/main" id="{9F345409-1B58-ED3A-B5D2-E2B1BA666ADE}"/>
+              </a:ext>
+            </a:extLst>
+          </p:cNvPr>
+          <p:cNvSpPr>
+            <a:spLocks noGrp="1"/>
+          </p:cNvSpPr>
+          <p:nvPr>
+            <p:ph type="body" sz="quarter" idx="25" hasCustomPrompt="1"/>
+          </p:nvPr>
+        </p:nvSpPr>
+        <p:spPr>
+          <a:xfrm>
+            <a:off x="710624" y="813558"/>
+            <a:ext cx="10119052" cy="338138"/>
+          </a:xfrm>
+          <a:prstGeom prst="rect">
+            <a:avLst/>
+          </a:prstGeom>
+        </p:spPr>
+        <p:txBody>
+          <a:bodyPr/>
+          <a:lstStyle>
+            <a:lvl1pPr marL="0" indent="0">
+              <a:buNone/>
+              <a:defRPr sz="2000" b="1"/>
+            </a:lvl1pPr>
+          </a:lstStyle>
+          <a:p>
+            <a:pPr lvl="0"/>
+            <a:r>
+              <a:rPr lang="de-DE" dirty="0"/>
+              <a:t>Phase 2 + 3</a:t>
+            </a:r>
+          </a:p>
+        </p:txBody>
+      </p:sp>
+      <p:sp>
+        <p:nvSpPr>
+          <p:cNvPr id="4" name="Text Placeholder 4">
+            <a:extLst>
+              <a:ext uri="{FF2B5EF4-FFF2-40B4-BE49-F238E27FC236}">
+                <a16:creationId xmlns:a16="http://schemas.microsoft.com/office/drawing/2014/main" id="{81D941C6-B566-8C9D-38CE-D27E403D1BD4}"/>
+              </a:ext>
+            </a:extLst>
+          </p:cNvPr>
+          <p:cNvSpPr txBox="1">
+            <a:spLocks/>
+          </p:cNvSpPr>
+          <p:nvPr/>
+        </p:nvSpPr>
+        <p:spPr>
+          <a:xfrm>
+            <a:off x="710624" y="3142810"/>
+            <a:ext cx="11303356" cy="1464415"/>
+          </a:xfrm>
+          <a:prstGeom prst="rect">
+            <a:avLst/>
+          </a:prstGeom>
+        </p:spPr>
+        <p:txBody>
+          <a:bodyPr/>
+          <a:lstStyle>
+            <a:lvl1pPr marL="228600" indent="-228600" algn="l" defTabSz="914400" rtl="0" eaLnBrk="1" latinLnBrk="0" hangingPunct="1">
+              <a:lnSpc>
+                <a:spcPct val="90000"/>
+              </a:lnSpc>
+              <a:spcBef>
+                <a:spcPts val="1000"/>
+              </a:spcBef>
+              <a:buFont typeface="Arial" panose="020B0604020202020204" pitchFamily="34" charset="0"/>
+              <a:buChar char="•"/>
+              <a:defRPr sz="2000" kern="1200">
+                <a:solidFill>
+                  <a:schemeClr val="tx1"/>
+                </a:solidFill>
+                <a:latin typeface="+mn-lt"/>
+                <a:ea typeface="+mn-ea"/>
+                <a:cs typeface="+mn-cs"/>
+              </a:defRPr>
+            </a:lvl1pPr>
+            <a:lvl2pPr marL="685800" indent="-228600" algn="l" defTabSz="914400" rtl="0" eaLnBrk="1" latinLnBrk="0" hangingPunct="1">
+              <a:lnSpc>
+                <a:spcPct val="90000"/>
+              </a:lnSpc>
+              <a:spcBef>
+                <a:spcPts val="500"/>
+              </a:spcBef>
+              <a:buFont typeface="Arial" panose="020B0604020202020204" pitchFamily="34" charset="0"/>
+              <a:buChar char="•"/>
+              <a:defRPr sz="1800" kern="1200">
+                <a:solidFill>
+                  <a:schemeClr val="tx1"/>
+                </a:solidFill>
+                <a:latin typeface="+mn-lt"/>
+                <a:ea typeface="+mn-ea"/>
+                <a:cs typeface="+mn-cs"/>
+              </a:defRPr>
+            </a:lvl2pPr>
+            <a:lvl3pPr marL="1143000" indent="-228600" algn="l" defTabSz="914400" rtl="0" eaLnBrk="1" latinLnBrk="0" hangingPunct="1">
+              <a:lnSpc>
+                <a:spcPct val="90000"/>
+              </a:lnSpc>
+              <a:spcBef>
+                <a:spcPts val="500"/>
+              </a:spcBef>
+              <a:buFont typeface="Arial" panose="020B0604020202020204" pitchFamily="34" charset="0"/>
+              <a:buChar char="•"/>
+              <a:defRPr sz="1600" kern="1200">
+                <a:solidFill>
+                  <a:schemeClr val="tx1"/>
+                </a:solidFill>
+                <a:latin typeface="+mn-lt"/>
+                <a:ea typeface="+mn-ea"/>
+                <a:cs typeface="+mn-cs"/>
+              </a:defRPr>
+            </a:lvl3pPr>
+            <a:lvl4pPr marL="1600200" indent="-228600" algn="l" defTabSz="914400" rtl="0" eaLnBrk="1" latinLnBrk="0" hangingPunct="1">
+              <a:lnSpc>
+                <a:spcPct val="90000"/>
+              </a:lnSpc>
+              <a:spcBef>
+                <a:spcPts val="500"/>
+              </a:spcBef>
+              <a:buFont typeface="Arial" panose="020B0604020202020204" pitchFamily="34" charset="0"/>
+              <a:buChar char="•"/>
+              <a:defRPr sz="1800" kern="1200">
+                <a:solidFill>
+                  <a:schemeClr val="tx1"/>
+                </a:solidFill>
+                <a:latin typeface="+mn-lt"/>
+                <a:ea typeface="+mn-ea"/>
+                <a:cs typeface="+mn-cs"/>
+              </a:defRPr>
+            </a:lvl4pPr>
+            <a:lvl5pPr marL="2057400" indent="-228600" algn="l" defTabSz="914400" rtl="0" eaLnBrk="1" latinLnBrk="0" hangingPunct="1">
+              <a:lnSpc>
+                <a:spcPct val="90000"/>
+              </a:lnSpc>
+              <a:spcBef>
+                <a:spcPts val="500"/>
+              </a:spcBef>
+              <a:buFont typeface="Arial" panose="020B0604020202020204" pitchFamily="34" charset="0"/>
+              <a:buChar char="•"/>
+              <a:defRPr sz="1800" kern="1200">
+                <a:solidFill>
+                  <a:schemeClr val="tx1"/>
+                </a:solidFill>
+                <a:latin typeface="+mn-lt"/>
+                <a:ea typeface="+mn-ea"/>
+                <a:cs typeface="+mn-cs"/>
+              </a:defRPr>
+            </a:lvl5pPr>
+            <a:lvl6pPr marL="2514600" indent="-228600" algn="l" defTabSz="914400" rtl="0" eaLnBrk="1" latinLnBrk="0" hangingPunct="1">
+              <a:lnSpc>
+                <a:spcPct val="90000"/>
+              </a:lnSpc>
+              <a:spcBef>
+                <a:spcPts val="500"/>
+              </a:spcBef>
+              <a:buFont typeface="Arial" panose="020B0604020202020204" pitchFamily="34" charset="0"/>
+              <a:buChar char="•"/>
+              <a:defRPr sz="1800" kern="1200">
+                <a:solidFill>
+                  <a:schemeClr val="tx1"/>
+                </a:solidFill>
+                <a:latin typeface="+mn-lt"/>
+                <a:ea typeface="+mn-ea"/>
+                <a:cs typeface="+mn-cs"/>
+              </a:defRPr>
+            </a:lvl6pPr>
+            <a:lvl7pPr marL="2971800" indent="-228600" algn="l" defTabSz="914400" rtl="0" eaLnBrk="1" latinLnBrk="0" hangingPunct="1">
+              <a:lnSpc>
+                <a:spcPct val="90000"/>
+              </a:lnSpc>
+              <a:spcBef>
+                <a:spcPts val="500"/>
+              </a:spcBef>
+              <a:buFont typeface="Arial" panose="020B0604020202020204" pitchFamily="34" charset="0"/>
+              <a:buChar char="•"/>
+              <a:defRPr sz="1800" kern="1200">
+                <a:solidFill>
+                  <a:schemeClr val="tx1"/>
+                </a:solidFill>
+                <a:latin typeface="+mn-lt"/>
+                <a:ea typeface="+mn-ea"/>
+                <a:cs typeface="+mn-cs"/>
+              </a:defRPr>
+            </a:lvl7pPr>
+            <a:lvl8pPr marL="3429000" indent="-228600" algn="l" defTabSz="914400" rtl="0" eaLnBrk="1" latinLnBrk="0" hangingPunct="1">
+              <a:lnSpc>
+                <a:spcPct val="90000"/>
+              </a:lnSpc>
+              <a:spcBef>
+                <a:spcPts val="500"/>
+              </a:spcBef>
+              <a:buFont typeface="Arial" panose="020B0604020202020204" pitchFamily="34" charset="0"/>
+              <a:buChar char="•"/>
+              <a:defRPr sz="1800" kern="1200">
+                <a:solidFill>
+                  <a:schemeClr val="tx1"/>
+                </a:solidFill>
+                <a:latin typeface="+mn-lt"/>
+                <a:ea typeface="+mn-ea"/>
+                <a:cs typeface="+mn-cs"/>
+              </a:defRPr>
+            </a:lvl8pPr>
+            <a:lvl9pPr marL="3886200" indent="-228600" algn="l" defTabSz="914400" rtl="0" eaLnBrk="1" latinLnBrk="0" hangingPunct="1">
+              <a:lnSpc>
+                <a:spcPct val="90000"/>
+              </a:lnSpc>
+              <a:spcBef>
+                <a:spcPts val="500"/>
+              </a:spcBef>
+              <a:buFont typeface="Arial" panose="020B0604020202020204" pitchFamily="34" charset="0"/>
+              <a:buChar char="•"/>
+              <a:defRPr sz="1800" kern="1200">
+                <a:solidFill>
+                  <a:schemeClr val="tx1"/>
+                </a:solidFill>
+                <a:latin typeface="+mn-lt"/>
+                <a:ea typeface="+mn-ea"/>
+                <a:cs typeface="+mn-cs"/>
+              </a:defRPr>
+            </a:lvl9pPr>
+          </a:lstStyle>
+          <a:p>
+            <a:pPr marL="457200" lvl="1" indent="0">
+              <a:buFont typeface="Arial" panose="020B0604020202020204" pitchFamily="34" charset="0"/>
+              <a:buNone/>
+            </a:pPr>
+            <a:endParaRPr lang="en-US" dirty="0"/>
+          </a:p>
+        </p:txBody>
+      </p:sp>
+      <p:sp>
+        <p:nvSpPr>
+          <p:cNvPr id="11" name="Text Placeholder 4">
+            <a:extLst>
+              <a:ext uri="{FF2B5EF4-FFF2-40B4-BE49-F238E27FC236}">
+                <a16:creationId xmlns:a16="http://schemas.microsoft.com/office/drawing/2014/main" id="{DBB90C51-7977-A73D-B9FB-75CCBCFE88F4}"/>
+              </a:ext>
+            </a:extLst>
+          </p:cNvPr>
+          <p:cNvSpPr>
+            <a:spLocks noGrp="1"/>
+          </p:cNvSpPr>
+          <p:nvPr>
+            <p:ph type="body" sz="quarter" idx="16"/>
+          </p:nvPr>
+        </p:nvSpPr>
+        <p:spPr>
+          <a:xfrm>
+            <a:off x="695325" y="1635624"/>
+            <a:ext cx="11303356" cy="4163514"/>
+          </a:xfrm>
+        </p:spPr>
+        <p:txBody>
+          <a:bodyPr/>
+          <a:lstStyle/>
+          <a:p>
+            <a:pPr marL="0" indent="0">
+              <a:buNone/>
+            </a:pPr>
+            <a:r>
+              <a:rPr lang="en-US" dirty="0"/>
+              <a:t>Phase 2 - LLM as a Judge</a:t>
+            </a:r>
+          </a:p>
+          <a:p>
+            <a:pPr marL="0" indent="0">
+              <a:buNone/>
+            </a:pPr>
+            <a:r>
+              <a:rPr lang="en-US" dirty="0" err="1"/>
+              <a:t>Erstellung</a:t>
+            </a:r>
+            <a:r>
+              <a:rPr lang="en-US" dirty="0"/>
+              <a:t> </a:t>
+            </a:r>
+            <a:r>
+              <a:rPr lang="en-US" dirty="0" err="1"/>
+              <a:t>eines</a:t>
+            </a:r>
+            <a:r>
+              <a:rPr lang="en-US" dirty="0"/>
+              <a:t> </a:t>
+            </a:r>
+            <a:r>
+              <a:rPr lang="en-US" dirty="0" err="1"/>
+              <a:t>weitere</a:t>
+            </a:r>
+            <a:r>
+              <a:rPr lang="en-US" dirty="0"/>
+              <a:t> </a:t>
+            </a:r>
+            <a:r>
+              <a:rPr lang="en-US" dirty="0" err="1"/>
+              <a:t>Agenten</a:t>
+            </a:r>
+            <a:r>
+              <a:rPr lang="en-US" dirty="0"/>
+              <a:t>, </a:t>
+            </a:r>
+            <a:r>
+              <a:rPr lang="en-US" dirty="0" err="1"/>
+              <a:t>welcher</a:t>
+            </a:r>
+            <a:r>
+              <a:rPr lang="en-US" dirty="0"/>
+              <a:t> den </a:t>
+            </a:r>
+            <a:r>
+              <a:rPr lang="en-US" dirty="0" err="1"/>
+              <a:t>letzten</a:t>
+            </a:r>
+            <a:r>
+              <a:rPr lang="en-US" dirty="0"/>
+              <a:t> Run </a:t>
+            </a:r>
+            <a:r>
+              <a:rPr lang="en-US" dirty="0" err="1"/>
+              <a:t>überprüft</a:t>
+            </a:r>
+            <a:endParaRPr lang="en-US" dirty="0"/>
+          </a:p>
+          <a:p>
+            <a:pPr marL="457200" indent="-457200">
+              <a:buAutoNum type="arabicParenR"/>
+            </a:pPr>
+            <a:endParaRPr lang="en-US" dirty="0"/>
+          </a:p>
+          <a:p>
+            <a:pPr marL="0" indent="0">
+              <a:buNone/>
+            </a:pPr>
+            <a:r>
+              <a:rPr lang="en-US" dirty="0"/>
+              <a:t>Phase 3 – Frontend </a:t>
+            </a:r>
+            <a:r>
+              <a:rPr lang="en-US" dirty="0" err="1"/>
+              <a:t>mit</a:t>
+            </a:r>
+            <a:r>
+              <a:rPr lang="en-US" dirty="0"/>
+              <a:t> </a:t>
+            </a:r>
+            <a:r>
+              <a:rPr lang="en-US" dirty="0" err="1"/>
+              <a:t>Streamlit</a:t>
+            </a:r>
+            <a:endParaRPr lang="en-US" dirty="0"/>
+          </a:p>
+          <a:p>
+            <a:pPr marL="0" indent="0">
+              <a:buNone/>
+            </a:pPr>
+            <a:r>
+              <a:rPr lang="en-US" dirty="0" err="1"/>
+              <a:t>Erster</a:t>
+            </a:r>
+            <a:r>
+              <a:rPr lang="en-US" dirty="0"/>
+              <a:t> Draft für </a:t>
+            </a:r>
+            <a:r>
+              <a:rPr lang="en-US" dirty="0" err="1"/>
+              <a:t>simplen</a:t>
+            </a:r>
+            <a:r>
+              <a:rPr lang="en-US" dirty="0"/>
+              <a:t> Input der csv-</a:t>
+            </a:r>
+            <a:r>
+              <a:rPr lang="en-US" dirty="0" err="1"/>
+              <a:t>Datei</a:t>
+            </a:r>
+            <a:r>
+              <a:rPr lang="en-US" dirty="0"/>
+              <a:t> und </a:t>
+            </a:r>
+            <a:r>
+              <a:rPr lang="en-US" dirty="0" err="1"/>
+              <a:t>Visualisierung</a:t>
+            </a:r>
+            <a:r>
+              <a:rPr lang="en-US" dirty="0"/>
+              <a:t> der </a:t>
+            </a:r>
+            <a:r>
+              <a:rPr lang="en-US" dirty="0" err="1"/>
+              <a:t>Ergebnisse</a:t>
+            </a:r>
+            <a:endParaRPr lang="en-US" dirty="0"/>
+          </a:p>
+          <a:p>
+            <a:pPr marL="0" indent="0">
+              <a:buNone/>
+            </a:pPr>
+            <a:endParaRPr lang="en-US" dirty="0"/>
+          </a:p>
+          <a:p>
+            <a:pPr marL="0" indent="0">
+              <a:buNone/>
+            </a:pPr>
+            <a:endParaRPr lang="en-US" dirty="0"/>
+          </a:p>
+        </p:txBody>
+      </p:sp>
+    </p:spTree>
+    <p:extLst>
+      <p:ext uri="{BB962C8B-B14F-4D97-AF65-F5344CB8AC3E}">
+        <p14:creationId xmlns:p14="http://schemas.microsoft.com/office/powerpoint/2010/main" val="3948506726"/>
       </p:ext>
     </p:extLst>
   </p:cSld>
@@ -12987,6 +19557,15 @@
 </file>
 
 <file path=customXml/item1.xml><?xml version="1.0" encoding="utf-8"?>
+<?mso-contentType ?>
+<FormTemplates xmlns="http://schemas.microsoft.com/sharepoint/v3/contenttype/forms">
+  <Display>DocumentLibraryForm</Display>
+  <Edit>DocumentLibraryForm</Edit>
+  <New>DocumentLibraryForm</New>
+</FormTemplates>
+</file>
+
+<file path=customXml/item2.xml><?xml version="1.0" encoding="utf-8"?>
 <p:properties xmlns:p="http://schemas.microsoft.com/office/2006/metadata/properties" xmlns:xsi="http://www.w3.org/2001/XMLSchema-instance" xmlns:pc="http://schemas.microsoft.com/office/infopath/2007/PartnerControls">
   <documentManagement>
     <IconOverlay xmlns="http://schemas.microsoft.com/sharepoint/v4" xsi:nil="true"/>
@@ -13035,66 +19614,7 @@
 </p:properties>
 </file>
 
-<file path=customXml/item2.xml><?xml version="1.0" encoding="utf-8"?>
-<?mso-contentType ?>
-<FormTemplates xmlns="http://schemas.microsoft.com/sharepoint/v3/contenttype/forms">
-  <Display>DocumentLibraryForm</Display>
-  <Edit>DocumentLibraryForm</Edit>
-  <New>DocumentLibraryForm</New>
-</FormTemplates>
-</file>
-
 <file path=customXml/item3.xml><?xml version="1.0" encoding="utf-8"?>
-<?mso-contentType ?>
-<spe:Receivers xmlns:spe="http://schemas.microsoft.com/sharepoint/events">
-  <Receiver>
-    <Name>Document ID Generator</Name>
-    <Synchronization>Synchronous</Synchronization>
-    <Type>10001</Type>
-    <SequenceNumber>1000</SequenceNumber>
-    <Url/>
-    <Assembly>Microsoft.Office.DocumentManagement, Version=16.0.0.0, Culture=neutral, PublicKeyToken=71e9bce111e9429c</Assembly>
-    <Class>Microsoft.Office.DocumentManagement.Internal.DocIdHandler</Class>
-    <Data/>
-    <Filter/>
-  </Receiver>
-  <Receiver>
-    <Name>Document ID Generator</Name>
-    <Synchronization>Synchronous</Synchronization>
-    <Type>10002</Type>
-    <SequenceNumber>1001</SequenceNumber>
-    <Url/>
-    <Assembly>Microsoft.Office.DocumentManagement, Version=16.0.0.0, Culture=neutral, PublicKeyToken=71e9bce111e9429c</Assembly>
-    <Class>Microsoft.Office.DocumentManagement.Internal.DocIdHandler</Class>
-    <Data/>
-    <Filter/>
-  </Receiver>
-  <Receiver>
-    <Name>Document ID Generator</Name>
-    <Synchronization>Synchronous</Synchronization>
-    <Type>10004</Type>
-    <SequenceNumber>1002</SequenceNumber>
-    <Url/>
-    <Assembly>Microsoft.Office.DocumentManagement, Version=16.0.0.0, Culture=neutral, PublicKeyToken=71e9bce111e9429c</Assembly>
-    <Class>Microsoft.Office.DocumentManagement.Internal.DocIdHandler</Class>
-    <Data/>
-    <Filter/>
-  </Receiver>
-  <Receiver>
-    <Name>Document ID Generator</Name>
-    <Synchronization>Synchronous</Synchronization>
-    <Type>10006</Type>
-    <SequenceNumber>1003</SequenceNumber>
-    <Url/>
-    <Assembly>Microsoft.Office.DocumentManagement, Version=16.0.0.0, Culture=neutral, PublicKeyToken=71e9bce111e9429c</Assembly>
-    <Class>Microsoft.Office.DocumentManagement.Internal.DocIdHandler</Class>
-    <Data/>
-    <Filter/>
-  </Receiver>
-</spe:Receivers>
-</file>
-
-<file path=customXml/item4.xml><?xml version="1.0" encoding="utf-8"?>
 <ct:contentTypeSchema xmlns:ct="http://schemas.microsoft.com/office/2006/metadata/contentType" xmlns:ma="http://schemas.microsoft.com/office/2006/metadata/properties/metaAttributes" ct:_="" ma:_="" ma:contentTypeName="Dokument" ma:contentTypeID="0x010100A2122D5DF3E7384394A6965D22B98D58" ma:contentTypeVersion="21" ma:contentTypeDescription="Ein neues Dokument erstellen." ma:contentTypeScope="" ma:versionID="e9bcec3d4b4d820f1fd8570952de6515">
   <xsd:schema xmlns:xsd="http://www.w3.org/2001/XMLSchema" xmlns:xs="http://www.w3.org/2001/XMLSchema" xmlns:p="http://schemas.microsoft.com/office/2006/metadata/properties" xmlns:ns1="f6fd5e78-b8f3-4cb0-91f9-df1f4af60ed7" xmlns:ns3="7a12b140-0691-4f70-b58e-f168b3d46def" xmlns:ns4="http://schemas.microsoft.com/sharepoint/v4" targetNamespace="http://schemas.microsoft.com/office/2006/metadata/properties" ma:root="true" ma:fieldsID="198a3c60e0180174d8b93c3e1685b8c6" ns1:_="" ns3:_="" ns4:_="">
     <xsd:import namespace="f6fd5e78-b8f3-4cb0-91f9-df1f4af60ed7"/>
@@ -13443,7 +19963,65 @@
 </ct:contentTypeSchema>
 </file>
 
+<file path=customXml/item4.xml><?xml version="1.0" encoding="utf-8"?>
+<?mso-contentType ?>
+<spe:Receivers xmlns:spe="http://schemas.microsoft.com/sharepoint/events">
+  <Receiver>
+    <Name>Document ID Generator</Name>
+    <Synchronization>Synchronous</Synchronization>
+    <Type>10001</Type>
+    <SequenceNumber>1000</SequenceNumber>
+    <Url/>
+    <Assembly>Microsoft.Office.DocumentManagement, Version=16.0.0.0, Culture=neutral, PublicKeyToken=71e9bce111e9429c</Assembly>
+    <Class>Microsoft.Office.DocumentManagement.Internal.DocIdHandler</Class>
+    <Data/>
+    <Filter/>
+  </Receiver>
+  <Receiver>
+    <Name>Document ID Generator</Name>
+    <Synchronization>Synchronous</Synchronization>
+    <Type>10002</Type>
+    <SequenceNumber>1001</SequenceNumber>
+    <Url/>
+    <Assembly>Microsoft.Office.DocumentManagement, Version=16.0.0.0, Culture=neutral, PublicKeyToken=71e9bce111e9429c</Assembly>
+    <Class>Microsoft.Office.DocumentManagement.Internal.DocIdHandler</Class>
+    <Data/>
+    <Filter/>
+  </Receiver>
+  <Receiver>
+    <Name>Document ID Generator</Name>
+    <Synchronization>Synchronous</Synchronization>
+    <Type>10004</Type>
+    <SequenceNumber>1002</SequenceNumber>
+    <Url/>
+    <Assembly>Microsoft.Office.DocumentManagement, Version=16.0.0.0, Culture=neutral, PublicKeyToken=71e9bce111e9429c</Assembly>
+    <Class>Microsoft.Office.DocumentManagement.Internal.DocIdHandler</Class>
+    <Data/>
+    <Filter/>
+  </Receiver>
+  <Receiver>
+    <Name>Document ID Generator</Name>
+    <Synchronization>Synchronous</Synchronization>
+    <Type>10006</Type>
+    <SequenceNumber>1003</SequenceNumber>
+    <Url/>
+    <Assembly>Microsoft.Office.DocumentManagement, Version=16.0.0.0, Culture=neutral, PublicKeyToken=71e9bce111e9429c</Assembly>
+    <Class>Microsoft.Office.DocumentManagement.Internal.DocIdHandler</Class>
+    <Data/>
+    <Filter/>
+  </Receiver>
+</spe:Receivers>
+</file>
+
 <file path=customXml/itemProps1.xml><?xml version="1.0" encoding="utf-8"?>
+<ds:datastoreItem xmlns:ds="http://schemas.openxmlformats.org/officeDocument/2006/customXml" ds:itemID="{6EDF356B-A5CD-4962-9955-AA824DF37FCA}">
+  <ds:schemaRefs>
+    <ds:schemaRef ds:uri="http://schemas.microsoft.com/sharepoint/v3/contenttype/forms"/>
+  </ds:schemaRefs>
+</ds:datastoreItem>
+</file>
+
+<file path=customXml/itemProps2.xml><?xml version="1.0" encoding="utf-8"?>
 <ds:datastoreItem xmlns:ds="http://schemas.openxmlformats.org/officeDocument/2006/customXml" ds:itemID="{02356504-F539-424F-9E83-9400624CC88E}">
   <ds:schemaRefs>
     <ds:schemaRef ds:uri="http://schemas.microsoft.com/office/2006/documentManagement/types"/>
@@ -13465,23 +20043,7 @@
 </ds:datastoreItem>
 </file>
 
-<file path=customXml/itemProps2.xml><?xml version="1.0" encoding="utf-8"?>
-<ds:datastoreItem xmlns:ds="http://schemas.openxmlformats.org/officeDocument/2006/customXml" ds:itemID="{6EDF356B-A5CD-4962-9955-AA824DF37FCA}">
-  <ds:schemaRefs>
-    <ds:schemaRef ds:uri="http://schemas.microsoft.com/sharepoint/v3/contenttype/forms"/>
-  </ds:schemaRefs>
-</ds:datastoreItem>
-</file>
-
 <file path=customXml/itemProps3.xml><?xml version="1.0" encoding="utf-8"?>
-<ds:datastoreItem xmlns:ds="http://schemas.openxmlformats.org/officeDocument/2006/customXml" ds:itemID="{21685AF1-9D8B-4832-88E0-313350BCFD5E}">
-  <ds:schemaRefs>
-    <ds:schemaRef ds:uri="http://schemas.microsoft.com/sharepoint/events"/>
-  </ds:schemaRefs>
-</ds:datastoreItem>
-</file>
-
-<file path=customXml/itemProps4.xml><?xml version="1.0" encoding="utf-8"?>
 <ds:datastoreItem xmlns:ds="http://schemas.openxmlformats.org/officeDocument/2006/customXml" ds:itemID="{F7C641D0-CE2F-43BA-A7E4-2DA0F4189B5B}">
   <ds:schemaRefs>
     <ds:schemaRef ds:uri="http://schemas.microsoft.com/office/2006/metadata/contentType"/>
@@ -13499,4 +20061,12 @@
     <ds:schemaRef ds:uri="http://schemas.microsoft.com/internal/obd"/>
   </ds:schemaRefs>
 </ds:datastoreItem>
+</file>
+
+<file path=customXml/itemProps4.xml><?xml version="1.0" encoding="utf-8"?>
+<ds:datastoreItem xmlns:ds="http://schemas.openxmlformats.org/officeDocument/2006/customXml" ds:itemID="{21685AF1-9D8B-4832-88E0-313350BCFD5E}">
+  <ds:schemaRefs>
+    <ds:schemaRef ds:uri="http://schemas.microsoft.com/sharepoint/events"/>
+  </ds:schemaRefs>
+</ds:datastoreItem>
 </file>